--- a/deck/Прогноз потребления ОЭС СЗ — неоморфизм.pptx
+++ b/deck/Прогноз потребления ОЭС СЗ — неоморфизм.pptx
@@ -17312,7 +17312,7 @@
           <a:p>
             <a:r>
               <a:rPr lang="en-US" dirty="0"/>
-              <a:t>Тема: прогноз почасового потребления мощности ОЭС Северо-Запада на сутки вперёд. Сравниваем классическое машинное обучение и предобученную модель временных рядов Chronos-2, все модели используют прогноз погоды.</a:t>
+              <a:t>Здравствуйте! Меня зовут Мухаммадзохид Нематжанов. Тема моей работы — прогнозирование электропотребления объединённой энергосистемы Северо-Запада методами машинного обучения с учётом погодных факторов. Речь пойдёт о почасовом прогнозе на сутки вперёд.</a:t>
             </a:r>
             <a:endParaRPr lang="en-US" dirty="0"/>
           </a:p>
@@ -17400,7 +17400,7 @@
           <a:p>
             <a:r>
               <a:rPr lang="en-US" dirty="0"/>
-              <a:t>Chronos-2 — модель-основа для временных рядов: её не обучают с нуля, а дообучают на наших данных. Мы сравнили дообучение LoRA и полное.</a:t>
+              <a:t>Мы сравнили три подхода. Базовые модели — точка отсчёта. LightGBM — градиентный бустинг на сорока признаках: история потребления, погода, календарь. И Chronos-2 — предобученная нейросеть Amazon на сто двадцать миллионов параметров, которую мы дообучили на наших данных.</a:t>
             </a:r>
             <a:endParaRPr lang="en-US" dirty="0"/>
           </a:p>
@@ -17488,7 +17488,7 @@
           <a:p>
             <a:r>
               <a:rPr lang="en-US" dirty="0"/>
-              <a:t>Ключевое требование — отсутствие утечки будущего. Погода в тесте — именно прогноз, выпущенный накануне, а не факт.</a:t>
+              <a:t>Проверка честная, как в реальной работе диспетчера. Обучаем на данных до сентября двадцать пятого года, а тестируем на целом следующем годе. При этом используется только прогноз погоды, выпущенный накануне, а не фактическая погода — иначе точность была бы завышена.</a:t>
             </a:r>
             <a:endParaRPr lang="en-US" dirty="0"/>
           </a:p>
@@ -17576,7 +17576,7 @@
           <a:p>
             <a:r>
               <a:rPr lang="en-US" dirty="0"/>
-              <a:t>Третий раздел: результаты проверки на целом годе.</a:t>
+              <a:t>Третий раздел — результаты.</a:t>
             </a:r>
             <a:endParaRPr lang="en-US" dirty="0"/>
           </a:p>
@@ -17664,7 +17664,7 @@
           <a:p>
             <a:r>
               <a:rPr lang="en-US" dirty="0"/>
-              <a:t>Лучшая модель — Chronos-2 после дообучения LoRA: 0,84 %. Второй вариант дообучения: LoRA 0,84 %, полное 0,85 % — разница в пределах сотых. Ансамбль — 0,86 %.</a:t>
+              <a:t>Главный результат. Дообученная Chronos-2 ошибается в среднем на ноль целых восемьдесят четыре сотых процента — это в три раза точнее наивного прогноза. LightGBM с погодой — ноль девяносто семь, без погоды — один и тридцать девять сотых.</a:t>
             </a:r>
             <a:endParaRPr lang="en-US" dirty="0"/>
           </a:p>
@@ -17752,7 +17752,7 @@
           <a:p>
             <a:r>
               <a:rPr lang="en-US" dirty="0"/>
-              <a:t>В сильный мороз потребление выходит за пределы обычных значений. LightGBM не умеет экстраполировать и занижает пики, Chronos-2 держит форму кривой.</a:t>
+              <a:t>Самая холодная неделя, минус пятнадцать градусов в среднем. Здесь видна разница: LightGBM занижает пики, потому что деревья решений не умеют выходить за пределы данных из обучения. А нейросеть почти точно повторяет реальную кривую — ошибка около половины процента.</a:t>
             </a:r>
             <a:endParaRPr lang="en-US" dirty="0"/>
           </a:p>
@@ -17840,7 +17840,7 @@
           <a:p>
             <a:r>
               <a:rPr lang="en-US" dirty="0"/>
-              <a:t>Зимой и весной сильнее всех дообученная Chronos-2, летом — ансамбль. Можно переключать модель по сезону.</a:t>
+              <a:t>По сезонам: зимой лучшая — дообученная Chronos-2, летом чуть лучше ансамбль. Значит, модель можно выбирать в зависимости от сезона.</a:t>
             </a:r>
             <a:endParaRPr lang="en-US" dirty="0"/>
           </a:p>
@@ -17928,7 +17928,7 @@
           <a:p>
             <a:r>
               <a:rPr lang="en-US" dirty="0"/>
-              <a:t>Погода — самый ценный признак после истории потребления. При этом неточность прогноза погоды почти не вредит: разница с идеальной погодой — сотые доли процента.</a:t>
+              <a:t>Отдельно про погоду. Прогноз погоды снижает ошибку LightGBM на тридцать процентов, а нейросети — на двадцать четыре. При этом неточность самого прогноза погоды почти не мешает: разница с идеальной погодой — всего две сотых процента.</a:t>
             </a:r>
             <a:endParaRPr lang="en-US" dirty="0"/>
           </a:p>
@@ -18016,7 +18016,7 @@
           <a:p>
             <a:r>
               <a:rPr lang="en-US" dirty="0"/>
-              <a:t>Результат исследования оформлен в инструмент: выбираешь сутки, нажимаешь «Сделать прогноз» и через полминуты получаешь почасовой прогноз с коридором неопределённости.</a:t>
+              <a:t>Результат оформлен в инструмент. Есть приложение на Java и веб-интерфейс: выбираете сутки, нажимаете «Сделать прогноз», и примерно через полминуты получаете почасовой прогноз с коридором неопределённости. Свежие данные программа скачивает сама.</a:t>
             </a:r>
             <a:endParaRPr lang="en-US" dirty="0"/>
           </a:p>
@@ -18104,7 +18104,7 @@
           <a:p>
             <a:r>
               <a:rPr lang="en-US" dirty="0"/>
-              <a:t>Итог: предобученная модель временных рядов после дообучения даёт лучший прогноз, погода важна, всё работает на обычном ноутбуке. Дальше — масштабирование на все ОЭС.</a:t>
+              <a:t>Выводы. Дообученная нейросеть Chronos-2 даёт лучший прогноз — ноль целых восемьдесят четыре сотых процента ошибки. Погода важна и снижает ошибку на тридцать процентов. Всё работает на обычном ноутбуке. Следующий шаг — распространить подход на все объединённые энергосистемы: данные уже собраны. Спасибо за внимание, готов ответить на вопросы.</a:t>
             </a:r>
             <a:endParaRPr lang="en-US" dirty="0"/>
           </a:p>
@@ -18192,7 +18192,7 @@
           <a:p>
             <a:r>
               <a:rPr lang="en-US" dirty="0"/>
-              <a:t>Первый раздел: зачем нужен прогноз и что мы хотим получить.</a:t>
+              <a:t>Начну с постановки задачи: какую проблему мы решаем, почему это актуально и что хотели получить.</a:t>
             </a:r>
             <a:endParaRPr lang="en-US" dirty="0"/>
           </a:p>
@@ -18280,7 +18280,7 @@
           <a:p>
             <a:r>
               <a:rPr lang="en-US" dirty="0"/>
-              <a:t>Прогноз на сутки вперёд — основа планирования энергосистемы. Сложность в сильной зависимости от погоды и в том, что простые методы ошибаются, особенно в морозы.</a:t>
+              <a:t>Проблема в трёх пунктах. Первое — ошибка прогноза стоит денег: по нему планируют электростанции и резервы, и один процент ошибки — это около ста двадцати мегаватт. Второе — потребление сильно зависит от погоды: в морозы оно на сорок пять процентов выше, чем в тёплые дни. Третье — простые методы не справляются: прогноз «как неделю назад» ошибается почти на три процента.</a:t>
             </a:r>
             <a:endParaRPr lang="en-US" dirty="0"/>
           </a:p>
@@ -18368,7 +18368,7 @@
           <a:p>
             <a:r>
               <a:rPr lang="en-US" dirty="0"/>
-              <a:t>Задача востребована ежедневно; новые предобученные модели ещё не проверены на российских данных; открытые данные позволяют сделать воспроизводимое исследование.</a:t>
+              <a:t>Почему это актуально. Прогноз нужен каждый день — до подачи заявок на рынок на сутки вперёд. Появились предобученные нейросети временных рядов, например Chronos-2, и их нужно проверить на российских данных. И наконец, данные открытые, поэтому исследование полностью воспроизводимо.</a:t>
             </a:r>
             <a:endParaRPr lang="en-US" dirty="0"/>
           </a:p>
@@ -18456,7 +18456,7 @@
           <a:p>
             <a:r>
               <a:rPr lang="en-US" dirty="0"/>
-              <a:t>Цель — точный прогноз на сутки вперёд с учётом погоды. Пять задач идут по порядку: данные, классические модели, нейросеть, честная проверка, интерфейс.</a:t>
+              <a:t>Цель работы — разработать модель почасового прогноза потребления на сутки вперёд с учётом погоды и сравнить классическое машинное обучение с предобученной нейросетью. Для этого решены пять задач: собрать данные, построить базовые модели и LightGBM, дообучить Chronos-2, честно проверить модели на целом годе и сделать интерфейс прогноза на завтра.</a:t>
             </a:r>
             <a:endParaRPr lang="en-US" dirty="0"/>
           </a:p>
@@ -18544,7 +18544,7 @@
           <a:p>
             <a:r>
               <a:rPr lang="en-US" dirty="0"/>
-              <a:t>Прогноз на сутки D делается в 09:00 накануне. Часы с 09 до 23 предыдущих суток модель тоже прогнозирует, но в зачёт идут только 24 часа суток D.</a:t>
+              <a:t>Что именно прогнозируем. Двадцать четыре часовых значения потребления на следующие сутки. Прогноз выпускается накануне в девять утра — модель видит только факт потребления до восьми утра и прогноз погоды. Тестовый период — триста шестьдесят четыре дня.</a:t>
             </a:r>
             <a:endParaRPr lang="en-US" dirty="0"/>
           </a:p>
@@ -18632,7 +18632,7 @@
           <a:p>
             <a:r>
               <a:rPr lang="en-US" dirty="0"/>
-              <a:t>Второй раздел: данные, модели и методика проверки.</a:t>
+              <a:t>Второй раздел — данные и модели.</a:t>
             </a:r>
             <a:endParaRPr lang="en-US" dirty="0"/>
           </a:p>
@@ -18720,7 +18720,7 @@
           <a:p>
             <a:r>
               <a:rPr lang="en-US" dirty="0"/>
-              <a:t>Потребление — с сайта СО ЕЭС, почасово с 2021 года. Погода — Open-Meteo по 9 городам ОЭС с весами по населению. Календарь нужен, чтобы модель знала праздники и переносы выходных.</a:t>
+              <a:t>Данные из трёх открытых источников. Потребление — с сайта Системного оператора, больше пятидесяти тысяч часовых значений с две тысячи двадцать первого года. Погода — сервис Open-Meteo по девяти городам региона. И производственный календарь с праздниками и переносами выходных.</a:t>
             </a:r>
             <a:endParaRPr lang="en-US" dirty="0"/>
           </a:p>
@@ -18808,7 +18808,7 @@
           <a:p>
             <a:r>
               <a:rPr lang="en-US" dirty="0"/>
-              <a:t>Главный внешний фактор — температура: отопление и освещение. Отсюда идея добавить в модели прогноз погоды.</a:t>
+              <a:t>Главный внешний фактор — температура. Каждая точка на графике — один день. Корреляция минус ноль девяносто четыре: чем холоднее, тем больше потребление. Отсюда идея — передавать моделям прогноз погоды.</a:t>
             </a:r>
             <a:endParaRPr lang="en-US" dirty="0"/>
           </a:p>

--- a/deck/Прогноз потребления ОЭС СЗ — неоморфизм.pptx
+++ b/deck/Прогноз потребления ОЭС СЗ — неоморфизм.pptx
@@ -23,9 +23,11 @@
     <p:sldId id="271" r:id="rId17"/>
     <p:sldId id="272" r:id="rId18"/>
     <p:sldId id="273" r:id="rId19"/>
+    <p:sldId id="274" r:id="rId20"/>
+    <p:sldId id="275" r:id="rId21"/>
   </p:sldIdLst>
   <p:notesMasterIdLst>
-    <p:notesMasterId r:id="rId20"/>
+    <p:notesMasterId r:id="rId22"/>
   </p:notesMasterIdLst>
   <p:sldSz cx="12192000" cy="6858000"/>
   <p:notesSz cx="6858000" cy="12192000"/>
@@ -17400,7 +17402,7 @@
           <a:p>
             <a:r>
               <a:rPr lang="en-US" dirty="0"/>
-              <a:t>Мы сравнили три подхода. Базовые модели — точка отсчёта. LightGBM — градиентный бустинг на сорока признаках: история потребления, погода, календарь. И Chronos-2 — предобученная нейросеть Amazon на сто двадцать миллионов параметров, которую мы дообучили на наших данных.</a:t>
+              <a:t>Главный внешний фактор — температура. Каждая точка на графике — один день. Корреляция минус ноль девяносто четыре: чем холоднее, тем больше потребление. Отсюда идея — передавать моделям прогноз погоды.</a:t>
             </a:r>
             <a:endParaRPr lang="en-US" dirty="0"/>
           </a:p>
@@ -17488,7 +17490,7 @@
           <a:p>
             <a:r>
               <a:rPr lang="en-US" dirty="0"/>
-              <a:t>Проверка честная, как в реальной работе диспетчера. Обучаем на данных до сентября двадцать пятого года, а тестируем на целом следующем годе. При этом используется только прогноз погоды, выпущенный накануне, а не фактическая погода — иначе точность была бы завышена.</a:t>
+              <a:t>Мы сравнили три подхода. Базовые модели — точка отсчёта. LightGBM — градиентный бустинг на сорока признаках: история потребления, погода, календарь. И Chronos-2 — предобученная нейросеть Amazon на сто двадцать миллионов параметров, которую мы дообучили на наших данных.</a:t>
             </a:r>
             <a:endParaRPr lang="en-US" dirty="0"/>
           </a:p>
@@ -17576,7 +17578,7 @@
           <a:p>
             <a:r>
               <a:rPr lang="en-US" dirty="0"/>
-              <a:t>Третий раздел — результаты.</a:t>
+              <a:t>Проверка честная, как в реальной работе диспетчера. Обучаем на данных до сентября двадцать пятого года, а тестируем на целом следующем годе. При этом используется только прогноз погоды, выпущенный накануне, а не фактическая погода — иначе точность была бы завышена.</a:t>
             </a:r>
             <a:endParaRPr lang="en-US" dirty="0"/>
           </a:p>
@@ -17664,7 +17666,7 @@
           <a:p>
             <a:r>
               <a:rPr lang="en-US" dirty="0"/>
-              <a:t>Главный результат. Дообученная Chronos-2 ошибается в среднем на ноль целых восемьдесят четыре сотых процента — это в три раза точнее наивного прогноза. LightGBM с погодой — ноль девяносто семь, без погоды — один и тридцать девять сотых.</a:t>
+              <a:t>Третий раздел — результаты.</a:t>
             </a:r>
             <a:endParaRPr lang="en-US" dirty="0"/>
           </a:p>
@@ -17752,7 +17754,7 @@
           <a:p>
             <a:r>
               <a:rPr lang="en-US" dirty="0"/>
-              <a:t>Самая холодная неделя, минус пятнадцать градусов в среднем. Здесь видна разница: LightGBM занижает пики, потому что деревья решений не умеют выходить за пределы данных из обучения. А нейросеть почти точно повторяет реальную кривую — ошибка около половины процента.</a:t>
+              <a:t>Главный результат. Дообученная Chronos-2 ошибается в среднем на ноль целых восемьдесят четыре сотых процента — это в три раза точнее наивного прогноза. LightGBM с погодой — ноль девяносто семь, без погоды — один и тридцать девять сотых.</a:t>
             </a:r>
             <a:endParaRPr lang="en-US" dirty="0"/>
           </a:p>
@@ -17840,7 +17842,7 @@
           <a:p>
             <a:r>
               <a:rPr lang="en-US" dirty="0"/>
-              <a:t>По сезонам: зимой лучшая — дообученная Chronos-2, летом чуть лучше ансамбль. Значит, модель можно выбирать в зависимости от сезона.</a:t>
+              <a:t>Самая холодная неделя, минус пятнадцать градусов в среднем. Здесь видна разница: LightGBM занижает пики, потому что деревья решений не умеют выходить за пределы данных из обучения. А нейросеть почти точно повторяет реальную кривую — ошибка около половины процента.</a:t>
             </a:r>
             <a:endParaRPr lang="en-US" dirty="0"/>
           </a:p>
@@ -17928,7 +17930,7 @@
           <a:p>
             <a:r>
               <a:rPr lang="en-US" dirty="0"/>
-              <a:t>Отдельно про погоду. Прогноз погоды снижает ошибку LightGBM на тридцать процентов, а нейросети — на двадцать четыре. При этом неточность самого прогноза погоды почти не мешает: разница с идеальной погодой — всего две сотых процента.</a:t>
+              <a:t>По сезонам: зимой лучшая — дообученная Chronos-2, летом чуть лучше ансамбль. Значит, модель можно выбирать в зависимости от сезона.</a:t>
             </a:r>
             <a:endParaRPr lang="en-US" dirty="0"/>
           </a:p>
@@ -18016,7 +18018,7 @@
           <a:p>
             <a:r>
               <a:rPr lang="en-US" dirty="0"/>
-              <a:t>Результат оформлен в инструмент. Есть приложение на Java и веб-интерфейс: выбираете сутки, нажимаете «Сделать прогноз», и примерно через полминуты получаете почасовой прогноз с коридором неопределённости. Свежие данные программа скачивает сама.</a:t>
+              <a:t>Отдельно про погоду. Прогноз погоды снижает ошибку LightGBM на тридцать процентов, а нейросети — на двадцать четыре. При этом неточность самого прогноза погоды почти не мешает: разница с идеальной погодой — всего две сотых процента.</a:t>
             </a:r>
             <a:endParaRPr lang="en-US" dirty="0"/>
           </a:p>
@@ -18104,7 +18106,7 @@
           <a:p>
             <a:r>
               <a:rPr lang="en-US" dirty="0"/>
-              <a:t>Выводы. Дообученная нейросеть Chronos-2 даёт лучший прогноз — ноль целых восемьдесят четыре сотых процента ошибки. Погода важна и снижает ошибку на тридцать процентов. Всё работает на обычном ноутбуке. Следующий шаг — распространить подход на все объединённые энергосистемы: данные уже собраны. Спасибо за внимание, готов ответить на вопросы.</a:t>
+              <a:t>Результат оформлен в инструмент. Есть приложение на Java и веб-интерфейс: выбираете сутки, нажимаете «Сделать прогноз», и примерно через полминуты получаете почасовой прогноз с коридором неопределённости. Свежие данные программа скачивает сама.</a:t>
             </a:r>
             <a:endParaRPr lang="en-US" dirty="0"/>
           </a:p>
@@ -18128,6 +18130,94 @@
             <a:fld id="{F7021451-1387-4CA6-816F-3879F97B5CBC}" type="slidenum">
               <a:rPr lang="en-US"/>
               <a:t>18</a:t>
+            </a:fld>
+            <a:endParaRPr lang="en-US"/>
+          </a:p>
+        </p:txBody>
+      </p:sp>
+    </p:spTree>
+    <p:extLst>
+      <p:ext uri="{BB962C8B-B14F-4D97-AF65-F5344CB8AC3E}">
+        <p14:creationId xmlns:p14="http://schemas.microsoft.com/office/powerpoint/2010/main" val="1024086991"/>
+      </p:ext>
+    </p:extLst>
+  </p:cSld>
+  <p:clrMapOvr>
+    <a:masterClrMapping/>
+  </p:clrMapOvr>
+</p:notes>
+</file>
+
+<file path=ppt/notesSlides/notesSlide19.xml><?xml version="1.0" encoding="utf-8"?>
+<p:notes xmlns:a="http://schemas.openxmlformats.org/drawingml/2006/main" xmlns:r="http://schemas.openxmlformats.org/officeDocument/2006/relationships" xmlns:p="http://schemas.openxmlformats.org/presentationml/2006/main">
+  <p:cSld>
+    <p:spTree>
+      <p:nvGrpSpPr>
+        <p:cNvPr id="1" name=""/>
+        <p:cNvGrpSpPr/>
+        <p:nvPr/>
+      </p:nvGrpSpPr>
+      <p:grpSpPr>
+        <a:xfrm>
+          <a:off x="0" y="0"/>
+          <a:ext cx="0" cy="0"/>
+          <a:chOff x="0" y="0"/>
+          <a:chExt cx="0" cy="0"/>
+        </a:xfrm>
+      </p:grpSpPr>
+      <p:sp>
+        <p:nvSpPr>
+          <p:cNvPr id="2" name="Slide Image Placeholder 1"/>
+          <p:cNvSpPr>
+            <a:spLocks noGrp="1" noRot="1" noChangeAspect="1"/>
+          </p:cNvSpPr>
+          <p:nvPr>
+            <p:ph type="sldImg"/>
+          </p:nvPr>
+        </p:nvSpPr>
+        <p:spPr/>
+      </p:sp>
+      <p:sp>
+        <p:nvSpPr>
+          <p:cNvPr id="3" name="Notes Placeholder 2"/>
+          <p:cNvSpPr>
+            <a:spLocks noGrp="1"/>
+          </p:cNvSpPr>
+          <p:nvPr>
+            <p:ph type="body" idx="1"/>
+          </p:nvPr>
+        </p:nvSpPr>
+        <p:spPr/>
+        <p:txBody>
+          <a:bodyPr/>
+          <a:lstStyle/>
+          <a:p>
+            <a:r>
+              <a:rPr lang="en-US" dirty="0"/>
+              <a:t>Выводы. Дообученная нейросеть Chronos-2 даёт лучший прогноз — ноль целых восемьдесят четыре сотых процента ошибки. Погода важна и снижает ошибку на тридцать процентов. Всё работает на обычном ноутбуке. Следующий шаг — распространить подход на все объединённые энергосистемы: данные уже собраны.</a:t>
+            </a:r>
+            <a:endParaRPr lang="en-US" dirty="0"/>
+          </a:p>
+        </p:txBody>
+      </p:sp>
+      <p:sp>
+        <p:nvSpPr>
+          <p:cNvPr id="4" name="Slide Number Placeholder 3"/>
+          <p:cNvSpPr>
+            <a:spLocks noGrp="1"/>
+          </p:cNvSpPr>
+          <p:nvPr>
+            <p:ph type="sldNum" sz="quarter" idx="10"/>
+          </p:nvPr>
+        </p:nvSpPr>
+        <p:spPr/>
+        <p:txBody>
+          <a:bodyPr/>
+          <a:lstStyle/>
+          <a:p>
+            <a:fld id="{F7021451-1387-4CA6-816F-3879F97B5CBC}" type="slidenum">
+              <a:rPr lang="en-US"/>
+              <a:t>19</a:t>
             </a:fld>
             <a:endParaRPr lang="en-US"/>
           </a:p>
@@ -18192,7 +18282,7 @@
           <a:p>
             <a:r>
               <a:rPr lang="en-US" dirty="0"/>
-              <a:t>Начну с постановки задачи: какую проблему мы решаем, почему это актуально и что хотели получить.</a:t>
+              <a:t>Сначала небольшая история. В Великобритании есть такое явление — «телевизионный пик». Во время рекламы или после финального свистка миллионы людей одновременно включают чайники, и нагрузка на сеть за считанные минуты растёт на тысячи мегаватт. Рекорд — четвёртое июля тысяча девятьсот девяностого года, серия пенальти в полуфинале чемпионата мира между Англией и Германией: скачок в две тысячи восемьсот мегаватт, это около миллиона двухсот тысяч чайников. Диспетчеры сети заранее изучают телепрограмму и держат наготове быстрые станции — одна из них выдаёт тысячу триста мегаватт за двенадцать секунд. И это не история: в финале Евро две тысячи двадцать четвёртого пик в перерыве составил тысячу триста мегаватт. Наша задача такая же, только в масштабе региона: заранее знать, сколько электроэнергии понадобится в каждый час завтрашних суток.</a:t>
             </a:r>
             <a:endParaRPr lang="en-US" dirty="0"/>
           </a:p>
@@ -18216,6 +18306,94 @@
             <a:fld id="{F7021451-1387-4CA6-816F-3879F97B5CBC}" type="slidenum">
               <a:rPr lang="en-US"/>
               <a:t>2</a:t>
+            </a:fld>
+            <a:endParaRPr lang="en-US"/>
+          </a:p>
+        </p:txBody>
+      </p:sp>
+    </p:spTree>
+    <p:extLst>
+      <p:ext uri="{BB962C8B-B14F-4D97-AF65-F5344CB8AC3E}">
+        <p14:creationId xmlns:p14="http://schemas.microsoft.com/office/powerpoint/2010/main" val="1024086991"/>
+      </p:ext>
+    </p:extLst>
+  </p:cSld>
+  <p:clrMapOvr>
+    <a:masterClrMapping/>
+  </p:clrMapOvr>
+</p:notes>
+</file>
+
+<file path=ppt/notesSlides/notesSlide20.xml><?xml version="1.0" encoding="utf-8"?>
+<p:notes xmlns:a="http://schemas.openxmlformats.org/drawingml/2006/main" xmlns:r="http://schemas.openxmlformats.org/officeDocument/2006/relationships" xmlns:p="http://schemas.openxmlformats.org/presentationml/2006/main">
+  <p:cSld>
+    <p:spTree>
+      <p:nvGrpSpPr>
+        <p:cNvPr id="1" name=""/>
+        <p:cNvGrpSpPr/>
+        <p:nvPr/>
+      </p:nvGrpSpPr>
+      <p:grpSpPr>
+        <a:xfrm>
+          <a:off x="0" y="0"/>
+          <a:ext cx="0" cy="0"/>
+          <a:chOff x="0" y="0"/>
+          <a:chExt cx="0" cy="0"/>
+        </a:xfrm>
+      </p:grpSpPr>
+      <p:sp>
+        <p:nvSpPr>
+          <p:cNvPr id="2" name="Slide Image Placeholder 1"/>
+          <p:cNvSpPr>
+            <a:spLocks noGrp="1" noRot="1" noChangeAspect="1"/>
+          </p:cNvSpPr>
+          <p:nvPr>
+            <p:ph type="sldImg"/>
+          </p:nvPr>
+        </p:nvSpPr>
+        <p:spPr/>
+      </p:sp>
+      <p:sp>
+        <p:nvSpPr>
+          <p:cNvPr id="3" name="Notes Placeholder 2"/>
+          <p:cNvSpPr>
+            <a:spLocks noGrp="1"/>
+          </p:cNvSpPr>
+          <p:nvPr>
+            <p:ph type="body" idx="1"/>
+          </p:nvPr>
+        </p:nvSpPr>
+        <p:spPr/>
+        <p:txBody>
+          <a:bodyPr/>
+          <a:lstStyle/>
+          <a:p>
+            <a:r>
+              <a:rPr lang="en-US" dirty="0"/>
+              <a:t>Спасибо за внимание! Сайт с прогнозом на завтра, результатами за год и кодом проекта — по этому QR-коду. Готов ответить на вопросы.</a:t>
+            </a:r>
+            <a:endParaRPr lang="en-US" dirty="0"/>
+          </a:p>
+        </p:txBody>
+      </p:sp>
+      <p:sp>
+        <p:nvSpPr>
+          <p:cNvPr id="4" name="Slide Number Placeholder 3"/>
+          <p:cNvSpPr>
+            <a:spLocks noGrp="1"/>
+          </p:cNvSpPr>
+          <p:nvPr>
+            <p:ph type="sldNum" sz="quarter" idx="10"/>
+          </p:nvPr>
+        </p:nvSpPr>
+        <p:spPr/>
+        <p:txBody>
+          <a:bodyPr/>
+          <a:lstStyle/>
+          <a:p>
+            <a:fld id="{F7021451-1387-4CA6-816F-3879F97B5CBC}" type="slidenum">
+              <a:rPr lang="en-US"/>
+              <a:t>20</a:t>
             </a:fld>
             <a:endParaRPr lang="en-US"/>
           </a:p>
@@ -18280,7 +18458,7 @@
           <a:p>
             <a:r>
               <a:rPr lang="en-US" dirty="0"/>
-              <a:t>Проблема в трёх пунктах. Первое — ошибка прогноза стоит денег: по нему планируют электростанции и резервы, и один процент ошибки — это около ста двадцати мегаватт. Второе — потребление сильно зависит от погоды: в морозы оно на сорок пять процентов выше, чем в тёплые дни. Третье — простые методы не справляются: прогноз «как неделю назад» ошибается почти на три процента.</a:t>
+              <a:t>Теперь вернёмся к нашей задаче. Начну с постановки задачи: какую проблему мы решаем, почему это актуально и что хотели получить.</a:t>
             </a:r>
             <a:endParaRPr lang="en-US" dirty="0"/>
           </a:p>
@@ -18368,7 +18546,7 @@
           <a:p>
             <a:r>
               <a:rPr lang="en-US" dirty="0"/>
-              <a:t>Почему это актуально. Прогноз нужен каждый день — до подачи заявок на рынок на сутки вперёд. Появились предобученные нейросети временных рядов, например Chronos-2, и их нужно проверить на российских данных. И наконец, данные открытые, поэтому исследование полностью воспроизводимо.</a:t>
+              <a:t>Проблема в трёх пунктах. Первое — ошибка прогноза стоит денег: по нему планируют электростанции и резервы, и один процент ошибки — это около ста двадцати мегаватт. Второе — потребление сильно зависит от погоды: в морозы оно на сорок пять процентов выше, чем в тёплые дни. Третье — простые методы не справляются: прогноз «как неделю назад» ошибается почти на три процента.</a:t>
             </a:r>
             <a:endParaRPr lang="en-US" dirty="0"/>
           </a:p>
@@ -18456,7 +18634,7 @@
           <a:p>
             <a:r>
               <a:rPr lang="en-US" dirty="0"/>
-              <a:t>Цель работы — разработать модель почасового прогноза потребления на сутки вперёд с учётом погоды и сравнить классическое машинное обучение с предобученной нейросетью. Для этого решены пять задач: собрать данные, построить базовые модели и LightGBM, дообучить Chronos-2, честно проверить модели на целом годе и сделать интерфейс прогноза на завтра.</a:t>
+              <a:t>Почему это актуально. Прогноз нужен каждый день — до подачи заявок на рынок на сутки вперёд. Появились предобученные нейросети временных рядов, например Chronos-2, и их нужно проверить на российских данных. И наконец, данные открытые, поэтому исследование полностью воспроизводимо.</a:t>
             </a:r>
             <a:endParaRPr lang="en-US" dirty="0"/>
           </a:p>
@@ -18544,7 +18722,7 @@
           <a:p>
             <a:r>
               <a:rPr lang="en-US" dirty="0"/>
-              <a:t>Что именно прогнозируем. Двадцать четыре часовых значения потребления на следующие сутки. Прогноз выпускается накануне в девять утра — модель видит только факт потребления до восьми утра и прогноз погоды. Тестовый период — триста шестьдесят четыре дня.</a:t>
+              <a:t>Цель работы — разработать модель почасового прогноза потребления на сутки вперёд с учётом погоды и сравнить классическое машинное обучение с предобученной нейросетью. Для этого решены пять задач: собрать данные, построить базовые модели и LightGBM, дообучить Chronos-2, честно проверить модели на целом годе и сделать интерфейс прогноза на завтра.</a:t>
             </a:r>
             <a:endParaRPr lang="en-US" dirty="0"/>
           </a:p>
@@ -18632,7 +18810,7 @@
           <a:p>
             <a:r>
               <a:rPr lang="en-US" dirty="0"/>
-              <a:t>Второй раздел — данные и модели.</a:t>
+              <a:t>Что именно прогнозируем. Двадцать четыре часовых значения потребления на следующие сутки. Прогноз выпускается накануне в девять утра — модель видит только факт потребления до восьми утра и прогноз погоды. Тестовый период — триста шестьдесят четыре дня.</a:t>
             </a:r>
             <a:endParaRPr lang="en-US" dirty="0"/>
           </a:p>
@@ -18720,7 +18898,7 @@
           <a:p>
             <a:r>
               <a:rPr lang="en-US" dirty="0"/>
-              <a:t>Данные из трёх открытых источников. Потребление — с сайта Системного оператора, больше пятидесяти тысяч часовых значений с две тысячи двадцать первого года. Погода — сервис Open-Meteo по девяти городам региона. И производственный календарь с праздниками и переносами выходных.</a:t>
+              <a:t>Второй раздел — данные и модели.</a:t>
             </a:r>
             <a:endParaRPr lang="en-US" dirty="0"/>
           </a:p>
@@ -18808,7 +18986,7 @@
           <a:p>
             <a:r>
               <a:rPr lang="en-US" dirty="0"/>
-              <a:t>Главный внешний фактор — температура. Каждая точка на графике — один день. Корреляция минус ноль девяносто четыре: чем холоднее, тем больше потребление. Отсюда идея — передавать моделям прогноз погоды.</a:t>
+              <a:t>Данные из трёх открытых источников. Потребление — с сайта Системного оператора, больше пятидесяти тысяч часовых значений с две тысячи двадцать первого года. Погода — сервис Open-Meteo по девяти городам региона. И производственный календарь с праздниками и переносами выходных.</a:t>
             </a:r>
             <a:endParaRPr lang="en-US" dirty="0"/>
           </a:p>
@@ -19735,7 +19913,1037 @@
       </p:sp>
       <p:sp>
         <p:nvSpPr>
-          <p:cNvPr id="5" name="s10_txt_168"/>
+          <p:cNvPr id="5" name="s10_txt_181"/>
+          <p:cNvSpPr txBox="1"/>
+          <p:nvPr/>
+        </p:nvSpPr>
+        <p:spPr>
+          <a:xfrm>
+            <a:off x="1463040" y="384048"/>
+            <a:ext cx="10149840" cy="713232"/>
+          </a:xfrm>
+          <a:prstGeom prst="rect">
+            <a:avLst/>
+          </a:prstGeom>
+          <a:noFill/>
+          <a:ln/>
+        </p:spPr>
+        <p:txBody>
+          <a:bodyPr wrap="square" lIns="0" tIns="0" rIns="0" bIns="0" rtlCol="0" anchor="ctr"/>
+          <a:lstStyle/>
+          <a:p>
+            <a:pPr indent="0" marL="0">
+              <a:buNone/>
+            </a:pPr>
+            <a:r>
+              <a:rPr lang="en-US" sz="3200" b="1" dirty="0">
+                <a:solidFill>
+                  <a:srgbClr val="2D3748"/>
+                </a:solidFill>
+                <a:latin typeface="Calibri" pitchFamily="34" charset="0"/>
+                <a:ea typeface="Calibri" pitchFamily="34" charset="-122"/>
+                <a:cs typeface="Calibri" pitchFamily="34" charset="-120"/>
+              </a:rPr>
+              <a:t>Потребление зависит от температуры</a:t>
+            </a:r>
+            <a:endParaRPr lang="en-US" sz="3200" dirty="0"/>
+          </a:p>
+        </p:txBody>
+      </p:sp>
+      <p:sp>
+        <p:nvSpPr>
+          <p:cNvPr id="6" name="s10_txt_182"/>
+          <p:cNvSpPr txBox="1"/>
+          <p:nvPr/>
+        </p:nvSpPr>
+        <p:spPr>
+          <a:xfrm>
+            <a:off x="1463040" y="1060704"/>
+            <a:ext cx="10149840" cy="329184"/>
+          </a:xfrm>
+          <a:prstGeom prst="rect">
+            <a:avLst/>
+          </a:prstGeom>
+          <a:noFill/>
+          <a:ln/>
+        </p:spPr>
+        <p:txBody>
+          <a:bodyPr wrap="square" lIns="0" tIns="0" rIns="0" bIns="0" rtlCol="0" anchor="ctr"/>
+          <a:lstStyle/>
+          <a:p>
+            <a:pPr indent="0" marL="0">
+              <a:buNone/>
+            </a:pPr>
+            <a:r>
+              <a:rPr lang="en-US" sz="1500" dirty="0">
+                <a:solidFill>
+                  <a:srgbClr val="66768C"/>
+                </a:solidFill>
+                <a:latin typeface="Calibri" pitchFamily="34" charset="0"/>
+                <a:ea typeface="Calibri" pitchFamily="34" charset="-122"/>
+                <a:cs typeface="Calibri" pitchFamily="34" charset="-120"/>
+              </a:rPr>
+              <a:t>Среднесуточные значения, 2021–2026, 2 098 суток</a:t>
+            </a:r>
+            <a:endParaRPr lang="en-US" sz="1500" dirty="0"/>
+          </a:p>
+        </p:txBody>
+      </p:sp>
+      <p:sp>
+        <p:nvSpPr>
+          <p:cNvPr id="7" name="s10_shp_183"/>
+          <p:cNvSpPr/>
+          <p:nvPr/>
+        </p:nvSpPr>
+        <p:spPr>
+          <a:xfrm>
+            <a:off x="548640" y="1600200"/>
+            <a:ext cx="7406640" cy="4617720"/>
+          </a:xfrm>
+          <a:prstGeom prst="roundRect">
+            <a:avLst>
+              <a:gd name="adj" fmla="val 4356"/>
+            </a:avLst>
+          </a:prstGeom>
+          <a:solidFill>
+            <a:srgbClr val="E6EBF1"/>
+          </a:solidFill>
+          <a:ln/>
+          <a:effectLst>
+            <a:outerShdw sx="100000" sy="100000" kx="0" ky="0" algn="bl" rotWithShape="0" blurRad="139700" dist="63500" dir="13500000">
+              <a:srgbClr val="FFFFFF">
+                <a:alpha val="95000"/>
+              </a:srgbClr>
+            </a:outerShdw>
+          </a:effectLst>
+        </p:spPr>
+      </p:sp>
+      <p:sp>
+        <p:nvSpPr>
+          <p:cNvPr id="8" name="s10_shp_184"/>
+          <p:cNvSpPr/>
+          <p:nvPr/>
+        </p:nvSpPr>
+        <p:spPr>
+          <a:xfrm>
+            <a:off x="548640" y="1600200"/>
+            <a:ext cx="7406640" cy="4617720"/>
+          </a:xfrm>
+          <a:prstGeom prst="roundRect">
+            <a:avLst>
+              <a:gd name="adj" fmla="val 4356"/>
+            </a:avLst>
+          </a:prstGeom>
+          <a:solidFill>
+            <a:srgbClr val="E6EBF1"/>
+          </a:solidFill>
+          <a:ln/>
+          <a:effectLst>
+            <a:outerShdw sx="100000" sy="100000" kx="0" ky="0" algn="bl" rotWithShape="0" blurRad="139700" dist="63500" dir="2700000">
+              <a:srgbClr val="A3B1C6">
+                <a:alpha val="60000"/>
+              </a:srgbClr>
+            </a:outerShdw>
+          </a:effectLst>
+        </p:spPr>
+      </p:sp>
+      <p:graphicFrame>
+        <p:nvGraphicFramePr>
+          <p:cNvPr id="9" name="s10_chart_185" descr=""/>
+          <p:cNvGraphicFramePr/>
+          <p:nvPr/>
+        </p:nvGraphicFramePr>
+        <p:xfrm>
+          <a:off x="731520" y="1737360"/>
+          <a:ext cx="7040880" cy="4343400"/>
+        </p:xfrm>
+        <a:graphic xmlns:a="http://schemas.openxmlformats.org/drawingml/2006/main">
+          <a:graphicData uri="http://schemas.openxmlformats.org/drawingml/2006/chart">
+            <c:chart xmlns:c="http://schemas.openxmlformats.org/drawingml/2006/chart" r:id="rId1"/>
+          </a:graphicData>
+        </a:graphic>
+      </p:graphicFrame>
+      <p:sp>
+        <p:nvSpPr>
+          <p:cNvPr id="10" name="s10_shp_186"/>
+          <p:cNvSpPr/>
+          <p:nvPr/>
+        </p:nvSpPr>
+        <p:spPr>
+          <a:xfrm>
+            <a:off x="8321040" y="1600200"/>
+            <a:ext cx="3337560" cy="2103120"/>
+          </a:xfrm>
+          <a:prstGeom prst="roundRect">
+            <a:avLst>
+              <a:gd name="adj" fmla="val 9565"/>
+            </a:avLst>
+          </a:prstGeom>
+          <a:solidFill>
+            <a:srgbClr val="E6EBF1"/>
+          </a:solidFill>
+          <a:ln/>
+          <a:effectLst>
+            <a:outerShdw sx="100000" sy="100000" kx="0" ky="0" algn="bl" rotWithShape="0" blurRad="139700" dist="63500" dir="13500000">
+              <a:srgbClr val="FFFFFF">
+                <a:alpha val="95000"/>
+              </a:srgbClr>
+            </a:outerShdw>
+          </a:effectLst>
+        </p:spPr>
+      </p:sp>
+      <p:sp>
+        <p:nvSpPr>
+          <p:cNvPr id="11" name="s10_shp_187"/>
+          <p:cNvSpPr/>
+          <p:nvPr/>
+        </p:nvSpPr>
+        <p:spPr>
+          <a:xfrm>
+            <a:off x="8321040" y="1600200"/>
+            <a:ext cx="3337560" cy="2103120"/>
+          </a:xfrm>
+          <a:prstGeom prst="roundRect">
+            <a:avLst>
+              <a:gd name="adj" fmla="val 9565"/>
+            </a:avLst>
+          </a:prstGeom>
+          <a:solidFill>
+            <a:srgbClr val="E6EBF1"/>
+          </a:solidFill>
+          <a:ln/>
+          <a:effectLst>
+            <a:outerShdw sx="100000" sy="100000" kx="0" ky="0" algn="bl" rotWithShape="0" blurRad="139700" dist="63500" dir="2700000">
+              <a:srgbClr val="A3B1C6">
+                <a:alpha val="60000"/>
+              </a:srgbClr>
+            </a:outerShdw>
+          </a:effectLst>
+        </p:spPr>
+      </p:sp>
+      <p:sp>
+        <p:nvSpPr>
+          <p:cNvPr id="12" name="s10_txt_188"/>
+          <p:cNvSpPr txBox="1"/>
+          <p:nvPr/>
+        </p:nvSpPr>
+        <p:spPr>
+          <a:xfrm>
+            <a:off x="8577072" y="1783080"/>
+            <a:ext cx="2880360" cy="630621"/>
+          </a:xfrm>
+          <a:prstGeom prst="rect">
+            <a:avLst/>
+          </a:prstGeom>
+          <a:noFill/>
+          <a:ln/>
+        </p:spPr>
+        <p:txBody>
+          <a:bodyPr wrap="square" lIns="0" tIns="0" rIns="0" bIns="0" rtlCol="0" anchor="b"/>
+          <a:lstStyle/>
+          <a:p>
+            <a:pPr indent="0" marL="0">
+              <a:buNone/>
+            </a:pPr>
+            <a:r>
+              <a:rPr lang="en-US" sz="4000" b="1" dirty="0">
+                <a:solidFill>
+                  <a:srgbClr val="2563C9"/>
+                </a:solidFill>
+                <a:latin typeface="Calibri" pitchFamily="34" charset="0"/>
+                <a:ea typeface="Calibri" pitchFamily="34" charset="-122"/>
+                <a:cs typeface="Calibri" pitchFamily="34" charset="-120"/>
+              </a:rPr>
+              <a:t>r = −0,94</a:t>
+            </a:r>
+            <a:endParaRPr lang="en-US" sz="4000" dirty="0"/>
+          </a:p>
+        </p:txBody>
+      </p:sp>
+      <p:sp>
+        <p:nvSpPr>
+          <p:cNvPr id="13" name="s10_txt_189"/>
+          <p:cNvSpPr txBox="1"/>
+          <p:nvPr/>
+        </p:nvSpPr>
+        <p:spPr>
+          <a:xfrm>
+            <a:off x="8577072" y="2468565"/>
+            <a:ext cx="2880360" cy="1106739"/>
+          </a:xfrm>
+          <a:prstGeom prst="rect">
+            <a:avLst/>
+          </a:prstGeom>
+          <a:noFill/>
+          <a:ln/>
+        </p:spPr>
+        <p:txBody>
+          <a:bodyPr wrap="square" lIns="0" tIns="0" rIns="0" bIns="0" rtlCol="0" anchor="t"/>
+          <a:lstStyle/>
+          <a:p>
+            <a:pPr indent="0" marL="0">
+              <a:buNone/>
+            </a:pPr>
+            <a:r>
+              <a:rPr lang="en-US" sz="1300" dirty="0">
+                <a:solidFill>
+                  <a:srgbClr val="66768C"/>
+                </a:solidFill>
+                <a:latin typeface="Calibri" pitchFamily="34" charset="0"/>
+                <a:ea typeface="Calibri" pitchFamily="34" charset="-122"/>
+                <a:cs typeface="Calibri" pitchFamily="34" charset="-120"/>
+              </a:rPr>
+              <a:t>корреляция среднесуточного потребления и температуры</a:t>
+            </a:r>
+            <a:endParaRPr lang="en-US" sz="1300" dirty="0"/>
+          </a:p>
+        </p:txBody>
+      </p:sp>
+      <p:sp>
+        <p:nvSpPr>
+          <p:cNvPr id="14" name="s10_shp_190"/>
+          <p:cNvSpPr/>
+          <p:nvPr/>
+        </p:nvSpPr>
+        <p:spPr>
+          <a:xfrm>
+            <a:off x="8321040" y="4023360"/>
+            <a:ext cx="3337560" cy="2194560"/>
+          </a:xfrm>
+          <a:prstGeom prst="roundRect">
+            <a:avLst>
+              <a:gd name="adj" fmla="val 9167"/>
+            </a:avLst>
+          </a:prstGeom>
+          <a:solidFill>
+            <a:srgbClr val="E6EBF1"/>
+          </a:solidFill>
+          <a:ln/>
+          <a:effectLst>
+            <a:outerShdw sx="100000" sy="100000" kx="0" ky="0" algn="bl" rotWithShape="0" blurRad="139700" dist="63500" dir="13500000">
+              <a:srgbClr val="FFFFFF">
+                <a:alpha val="95000"/>
+              </a:srgbClr>
+            </a:outerShdw>
+          </a:effectLst>
+        </p:spPr>
+      </p:sp>
+      <p:sp>
+        <p:nvSpPr>
+          <p:cNvPr id="15" name="s10_shp_191"/>
+          <p:cNvSpPr/>
+          <p:nvPr/>
+        </p:nvSpPr>
+        <p:spPr>
+          <a:xfrm>
+            <a:off x="8321040" y="4023360"/>
+            <a:ext cx="3337560" cy="2194560"/>
+          </a:xfrm>
+          <a:prstGeom prst="roundRect">
+            <a:avLst>
+              <a:gd name="adj" fmla="val 9167"/>
+            </a:avLst>
+          </a:prstGeom>
+          <a:solidFill>
+            <a:srgbClr val="E6EBF1"/>
+          </a:solidFill>
+          <a:ln/>
+          <a:effectLst>
+            <a:outerShdw sx="100000" sy="100000" kx="0" ky="0" algn="bl" rotWithShape="0" blurRad="139700" dist="63500" dir="2700000">
+              <a:srgbClr val="A3B1C6">
+                <a:alpha val="60000"/>
+              </a:srgbClr>
+            </a:outerShdw>
+          </a:effectLst>
+        </p:spPr>
+      </p:sp>
+      <p:sp>
+        <p:nvSpPr>
+          <p:cNvPr id="16" name="s10_txt_192"/>
+          <p:cNvSpPr txBox="1"/>
+          <p:nvPr/>
+        </p:nvSpPr>
+        <p:spPr>
+          <a:xfrm>
+            <a:off x="8577072" y="4206240"/>
+            <a:ext cx="2880360" cy="630621"/>
+          </a:xfrm>
+          <a:prstGeom prst="rect">
+            <a:avLst/>
+          </a:prstGeom>
+          <a:noFill/>
+          <a:ln/>
+        </p:spPr>
+        <p:txBody>
+          <a:bodyPr wrap="square" lIns="0" tIns="0" rIns="0" bIns="0" rtlCol="0" anchor="b"/>
+          <a:lstStyle/>
+          <a:p>
+            <a:pPr indent="0" marL="0">
+              <a:buNone/>
+            </a:pPr>
+            <a:r>
+              <a:rPr lang="en-US" sz="4000" b="1" dirty="0">
+                <a:solidFill>
+                  <a:srgbClr val="2563C9"/>
+                </a:solidFill>
+                <a:latin typeface="Calibri" pitchFamily="34" charset="0"/>
+                <a:ea typeface="Calibri" pitchFamily="34" charset="-122"/>
+                <a:cs typeface="Calibri" pitchFamily="34" charset="-120"/>
+              </a:rPr>
+              <a:t>+45 %</a:t>
+            </a:r>
+            <a:endParaRPr lang="en-US" sz="4000" dirty="0"/>
+          </a:p>
+        </p:txBody>
+      </p:sp>
+      <p:sp>
+        <p:nvSpPr>
+          <p:cNvPr id="17" name="s10_txt_193"/>
+          <p:cNvSpPr txBox="1"/>
+          <p:nvPr/>
+        </p:nvSpPr>
+        <p:spPr>
+          <a:xfrm>
+            <a:off x="8577072" y="4891725"/>
+            <a:ext cx="2880360" cy="1198179"/>
+          </a:xfrm>
+          <a:prstGeom prst="rect">
+            <a:avLst/>
+          </a:prstGeom>
+          <a:noFill/>
+          <a:ln/>
+        </p:spPr>
+        <p:txBody>
+          <a:bodyPr wrap="square" lIns="0" tIns="0" rIns="0" bIns="0" rtlCol="0" anchor="t"/>
+          <a:lstStyle/>
+          <a:p>
+            <a:pPr indent="0" marL="0">
+              <a:buNone/>
+            </a:pPr>
+            <a:r>
+              <a:rPr lang="en-US" sz="1300" dirty="0">
+                <a:solidFill>
+                  <a:srgbClr val="66768C"/>
+                </a:solidFill>
+                <a:latin typeface="Calibri" pitchFamily="34" charset="0"/>
+                <a:ea typeface="Calibri" pitchFamily="34" charset="-122"/>
+                <a:cs typeface="Calibri" pitchFamily="34" charset="-120"/>
+              </a:rPr>
+              <a:t>потребление в морозы ниже −10 °C (13,7 ГВт) против дней теплее +15 °C (9,5 ГВт)</a:t>
+            </a:r>
+            <a:endParaRPr lang="en-US" sz="1300" dirty="0"/>
+          </a:p>
+        </p:txBody>
+      </p:sp>
+    </p:spTree>
+  </p:cSld>
+  <p:clrMapOvr>
+    <a:masterClrMapping/>
+  </p:clrMapOvr>
+  <mc:AlternateContent xmlns:mc="http://schemas.openxmlformats.org/markup-compatibility/2006">
+    <mc:Choice xmlns:p159="http://schemas.microsoft.com/office/powerpoint/2015/09/main" Requires="p159">
+      <p:transition xmlns:p14="http://schemas.microsoft.com/office/powerpoint/2010/main" spd="slow" p14:dur="1250">
+        <p159:morph option="byObject"/>
+      </p:transition>
+    </mc:Choice>
+    <mc:Fallback>
+      <p:transition spd="slow">
+        <p:fade/>
+      </p:transition>
+    </mc:Fallback>
+  </mc:AlternateContent>
+  <p:timing>
+    <p:tnLst>
+      <p:par>
+        <p:cTn id="1" dur="indefinite" restart="never" nodeType="tmRoot">
+          <p:childTnLst>
+            <p:seq concurrent="1" nextAc="seek">
+              <p:cTn id="2" dur="indefinite" nodeType="mainSeq">
+                <p:childTnLst>
+                  <p:par>
+                    <p:cTn id="3" fill="hold">
+                      <p:stCondLst>
+                        <p:cond delay="indefinite"/>
+                        <p:cond evt="onBegin" delay="0">
+                          <p:tn val="2"/>
+                        </p:cond>
+                      </p:stCondLst>
+                      <p:childTnLst>
+                        <p:par>
+                          <p:cTn id="4" fill="hold">
+                            <p:stCondLst>
+                              <p:cond delay="0"/>
+                            </p:stCondLst>
+                            <p:childTnLst>
+                              <p:par>
+                                <p:cTn id="5" presetID="10" presetClass="entr" presetSubtype="0" fill="hold" grpId="0" nodeType="afterEffect">
+                                  <p:stCondLst>
+                                    <p:cond delay="0"/>
+                                  </p:stCondLst>
+                                  <p:childTnLst>
+                                    <p:set>
+                                      <p:cBhvr>
+                                        <p:cTn id="6" dur="1" fill="hold">
+                                          <p:stCondLst>
+                                            <p:cond delay="0"/>
+                                          </p:stCondLst>
+                                        </p:cTn>
+                                        <p:tgtEl>
+                                          <p:spTgt spid="7"/>
+                                        </p:tgtEl>
+                                        <p:attrNameLst>
+                                          <p:attrName>style.visibility</p:attrName>
+                                        </p:attrNameLst>
+                                      </p:cBhvr>
+                                      <p:to>
+                                        <p:strVal val="visible"/>
+                                      </p:to>
+                                    </p:set>
+                                    <p:animEffect transition="in" filter="fade">
+                                      <p:cBhvr>
+                                        <p:cTn id="7" dur="500"/>
+                                        <p:tgtEl>
+                                          <p:spTgt spid="7"/>
+                                        </p:tgtEl>
+                                      </p:cBhvr>
+                                    </p:animEffect>
+                                  </p:childTnLst>
+                                </p:cTn>
+                              </p:par>
+                              <p:par>
+                                <p:cTn id="8" presetID="10" presetClass="entr" presetSubtype="0" fill="hold" grpId="0" nodeType="withEffect">
+                                  <p:stCondLst>
+                                    <p:cond delay="0"/>
+                                  </p:stCondLst>
+                                  <p:childTnLst>
+                                    <p:set>
+                                      <p:cBhvr>
+                                        <p:cTn id="9" dur="1" fill="hold">
+                                          <p:stCondLst>
+                                            <p:cond delay="0"/>
+                                          </p:stCondLst>
+                                        </p:cTn>
+                                        <p:tgtEl>
+                                          <p:spTgt spid="8"/>
+                                        </p:tgtEl>
+                                        <p:attrNameLst>
+                                          <p:attrName>style.visibility</p:attrName>
+                                        </p:attrNameLst>
+                                      </p:cBhvr>
+                                      <p:to>
+                                        <p:strVal val="visible"/>
+                                      </p:to>
+                                    </p:set>
+                                    <p:animEffect transition="in" filter="fade">
+                                      <p:cBhvr>
+                                        <p:cTn id="10" dur="500"/>
+                                        <p:tgtEl>
+                                          <p:spTgt spid="8"/>
+                                        </p:tgtEl>
+                                      </p:cBhvr>
+                                    </p:animEffect>
+                                  </p:childTnLst>
+                                </p:cTn>
+                              </p:par>
+                              <p:par>
+                                <p:cTn id="11" presetID="10" presetClass="entr" presetSubtype="0" fill="hold" grpId="0" nodeType="withEffect">
+                                  <p:stCondLst>
+                                    <p:cond delay="0"/>
+                                  </p:stCondLst>
+                                  <p:childTnLst>
+                                    <p:set>
+                                      <p:cBhvr>
+                                        <p:cTn id="12" dur="1" fill="hold">
+                                          <p:stCondLst>
+                                            <p:cond delay="0"/>
+                                          </p:stCondLst>
+                                        </p:cTn>
+                                        <p:tgtEl>
+                                          <p:spTgt spid="9"/>
+                                        </p:tgtEl>
+                                        <p:attrNameLst>
+                                          <p:attrName>style.visibility</p:attrName>
+                                        </p:attrNameLst>
+                                      </p:cBhvr>
+                                      <p:to>
+                                        <p:strVal val="visible"/>
+                                      </p:to>
+                                    </p:set>
+                                    <p:animEffect transition="in" filter="fade">
+                                      <p:cBhvr>
+                                        <p:cTn id="13" dur="500"/>
+                                        <p:tgtEl>
+                                          <p:spTgt spid="9"/>
+                                        </p:tgtEl>
+                                      </p:cBhvr>
+                                    </p:animEffect>
+                                  </p:childTnLst>
+                                </p:cTn>
+                              </p:par>
+                            </p:childTnLst>
+                          </p:cTn>
+                        </p:par>
+                        <p:par>
+                          <p:cTn id="14" fill="hold">
+                            <p:stCondLst>
+                              <p:cond delay="350"/>
+                            </p:stCondLst>
+                            <p:childTnLst>
+                              <p:par>
+                                <p:cTn id="15" presetID="10" presetClass="entr" presetSubtype="0" fill="hold" grpId="0" nodeType="afterEffect">
+                                  <p:stCondLst>
+                                    <p:cond delay="0"/>
+                                  </p:stCondLst>
+                                  <p:childTnLst>
+                                    <p:set>
+                                      <p:cBhvr>
+                                        <p:cTn id="16" dur="1" fill="hold">
+                                          <p:stCondLst>
+                                            <p:cond delay="0"/>
+                                          </p:stCondLst>
+                                        </p:cTn>
+                                        <p:tgtEl>
+                                          <p:spTgt spid="10"/>
+                                        </p:tgtEl>
+                                        <p:attrNameLst>
+                                          <p:attrName>style.visibility</p:attrName>
+                                        </p:attrNameLst>
+                                      </p:cBhvr>
+                                      <p:to>
+                                        <p:strVal val="visible"/>
+                                      </p:to>
+                                    </p:set>
+                                    <p:animEffect transition="in" filter="fade">
+                                      <p:cBhvr>
+                                        <p:cTn id="17" dur="500"/>
+                                        <p:tgtEl>
+                                          <p:spTgt spid="10"/>
+                                        </p:tgtEl>
+                                      </p:cBhvr>
+                                    </p:animEffect>
+                                  </p:childTnLst>
+                                </p:cTn>
+                              </p:par>
+                              <p:par>
+                                <p:cTn id="18" presetID="10" presetClass="entr" presetSubtype="0" fill="hold" grpId="0" nodeType="withEffect">
+                                  <p:stCondLst>
+                                    <p:cond delay="0"/>
+                                  </p:stCondLst>
+                                  <p:childTnLst>
+                                    <p:set>
+                                      <p:cBhvr>
+                                        <p:cTn id="19" dur="1" fill="hold">
+                                          <p:stCondLst>
+                                            <p:cond delay="0"/>
+                                          </p:stCondLst>
+                                        </p:cTn>
+                                        <p:tgtEl>
+                                          <p:spTgt spid="11"/>
+                                        </p:tgtEl>
+                                        <p:attrNameLst>
+                                          <p:attrName>style.visibility</p:attrName>
+                                        </p:attrNameLst>
+                                      </p:cBhvr>
+                                      <p:to>
+                                        <p:strVal val="visible"/>
+                                      </p:to>
+                                    </p:set>
+                                    <p:animEffect transition="in" filter="fade">
+                                      <p:cBhvr>
+                                        <p:cTn id="20" dur="500"/>
+                                        <p:tgtEl>
+                                          <p:spTgt spid="11"/>
+                                        </p:tgtEl>
+                                      </p:cBhvr>
+                                    </p:animEffect>
+                                  </p:childTnLst>
+                                </p:cTn>
+                              </p:par>
+                              <p:par>
+                                <p:cTn id="21" presetID="10" presetClass="entr" presetSubtype="0" fill="hold" grpId="0" nodeType="withEffect">
+                                  <p:stCondLst>
+                                    <p:cond delay="0"/>
+                                  </p:stCondLst>
+                                  <p:childTnLst>
+                                    <p:set>
+                                      <p:cBhvr>
+                                        <p:cTn id="22" dur="1" fill="hold">
+                                          <p:stCondLst>
+                                            <p:cond delay="0"/>
+                                          </p:stCondLst>
+                                        </p:cTn>
+                                        <p:tgtEl>
+                                          <p:spTgt spid="12"/>
+                                        </p:tgtEl>
+                                        <p:attrNameLst>
+                                          <p:attrName>style.visibility</p:attrName>
+                                        </p:attrNameLst>
+                                      </p:cBhvr>
+                                      <p:to>
+                                        <p:strVal val="visible"/>
+                                      </p:to>
+                                    </p:set>
+                                    <p:animEffect transition="in" filter="fade">
+                                      <p:cBhvr>
+                                        <p:cTn id="23" dur="500"/>
+                                        <p:tgtEl>
+                                          <p:spTgt spid="12"/>
+                                        </p:tgtEl>
+                                      </p:cBhvr>
+                                    </p:animEffect>
+                                  </p:childTnLst>
+                                </p:cTn>
+                              </p:par>
+                              <p:par>
+                                <p:cTn id="24" presetID="10" presetClass="entr" presetSubtype="0" fill="hold" grpId="0" nodeType="withEffect">
+                                  <p:stCondLst>
+                                    <p:cond delay="0"/>
+                                  </p:stCondLst>
+                                  <p:childTnLst>
+                                    <p:set>
+                                      <p:cBhvr>
+                                        <p:cTn id="25" dur="1" fill="hold">
+                                          <p:stCondLst>
+                                            <p:cond delay="0"/>
+                                          </p:stCondLst>
+                                        </p:cTn>
+                                        <p:tgtEl>
+                                          <p:spTgt spid="13"/>
+                                        </p:tgtEl>
+                                        <p:attrNameLst>
+                                          <p:attrName>style.visibility</p:attrName>
+                                        </p:attrNameLst>
+                                      </p:cBhvr>
+                                      <p:to>
+                                        <p:strVal val="visible"/>
+                                      </p:to>
+                                    </p:set>
+                                    <p:animEffect transition="in" filter="fade">
+                                      <p:cBhvr>
+                                        <p:cTn id="26" dur="500"/>
+                                        <p:tgtEl>
+                                          <p:spTgt spid="13"/>
+                                        </p:tgtEl>
+                                      </p:cBhvr>
+                                    </p:animEffect>
+                                  </p:childTnLst>
+                                </p:cTn>
+                              </p:par>
+                            </p:childTnLst>
+                          </p:cTn>
+                        </p:par>
+                        <p:par>
+                          <p:cTn id="27" fill="hold">
+                            <p:stCondLst>
+                              <p:cond delay="700"/>
+                            </p:stCondLst>
+                            <p:childTnLst>
+                              <p:par>
+                                <p:cTn id="28" presetID="10" presetClass="entr" presetSubtype="0" fill="hold" grpId="0" nodeType="afterEffect">
+                                  <p:stCondLst>
+                                    <p:cond delay="0"/>
+                                  </p:stCondLst>
+                                  <p:childTnLst>
+                                    <p:set>
+                                      <p:cBhvr>
+                                        <p:cTn id="29" dur="1" fill="hold">
+                                          <p:stCondLst>
+                                            <p:cond delay="0"/>
+                                          </p:stCondLst>
+                                        </p:cTn>
+                                        <p:tgtEl>
+                                          <p:spTgt spid="14"/>
+                                        </p:tgtEl>
+                                        <p:attrNameLst>
+                                          <p:attrName>style.visibility</p:attrName>
+                                        </p:attrNameLst>
+                                      </p:cBhvr>
+                                      <p:to>
+                                        <p:strVal val="visible"/>
+                                      </p:to>
+                                    </p:set>
+                                    <p:animEffect transition="in" filter="fade">
+                                      <p:cBhvr>
+                                        <p:cTn id="30" dur="500"/>
+                                        <p:tgtEl>
+                                          <p:spTgt spid="14"/>
+                                        </p:tgtEl>
+                                      </p:cBhvr>
+                                    </p:animEffect>
+                                  </p:childTnLst>
+                                </p:cTn>
+                              </p:par>
+                              <p:par>
+                                <p:cTn id="31" presetID="10" presetClass="entr" presetSubtype="0" fill="hold" grpId="0" nodeType="withEffect">
+                                  <p:stCondLst>
+                                    <p:cond delay="0"/>
+                                  </p:stCondLst>
+                                  <p:childTnLst>
+                                    <p:set>
+                                      <p:cBhvr>
+                                        <p:cTn id="32" dur="1" fill="hold">
+                                          <p:stCondLst>
+                                            <p:cond delay="0"/>
+                                          </p:stCondLst>
+                                        </p:cTn>
+                                        <p:tgtEl>
+                                          <p:spTgt spid="15"/>
+                                        </p:tgtEl>
+                                        <p:attrNameLst>
+                                          <p:attrName>style.visibility</p:attrName>
+                                        </p:attrNameLst>
+                                      </p:cBhvr>
+                                      <p:to>
+                                        <p:strVal val="visible"/>
+                                      </p:to>
+                                    </p:set>
+                                    <p:animEffect transition="in" filter="fade">
+                                      <p:cBhvr>
+                                        <p:cTn id="33" dur="500"/>
+                                        <p:tgtEl>
+                                          <p:spTgt spid="15"/>
+                                        </p:tgtEl>
+                                      </p:cBhvr>
+                                    </p:animEffect>
+                                  </p:childTnLst>
+                                </p:cTn>
+                              </p:par>
+                              <p:par>
+                                <p:cTn id="34" presetID="10" presetClass="entr" presetSubtype="0" fill="hold" grpId="0" nodeType="withEffect">
+                                  <p:stCondLst>
+                                    <p:cond delay="0"/>
+                                  </p:stCondLst>
+                                  <p:childTnLst>
+                                    <p:set>
+                                      <p:cBhvr>
+                                        <p:cTn id="35" dur="1" fill="hold">
+                                          <p:stCondLst>
+                                            <p:cond delay="0"/>
+                                          </p:stCondLst>
+                                        </p:cTn>
+                                        <p:tgtEl>
+                                          <p:spTgt spid="16"/>
+                                        </p:tgtEl>
+                                        <p:attrNameLst>
+                                          <p:attrName>style.visibility</p:attrName>
+                                        </p:attrNameLst>
+                                      </p:cBhvr>
+                                      <p:to>
+                                        <p:strVal val="visible"/>
+                                      </p:to>
+                                    </p:set>
+                                    <p:animEffect transition="in" filter="fade">
+                                      <p:cBhvr>
+                                        <p:cTn id="36" dur="500"/>
+                                        <p:tgtEl>
+                                          <p:spTgt spid="16"/>
+                                        </p:tgtEl>
+                                      </p:cBhvr>
+                                    </p:animEffect>
+                                  </p:childTnLst>
+                                </p:cTn>
+                              </p:par>
+                              <p:par>
+                                <p:cTn id="37" presetID="10" presetClass="entr" presetSubtype="0" fill="hold" grpId="0" nodeType="withEffect">
+                                  <p:stCondLst>
+                                    <p:cond delay="0"/>
+                                  </p:stCondLst>
+                                  <p:childTnLst>
+                                    <p:set>
+                                      <p:cBhvr>
+                                        <p:cTn id="38" dur="1" fill="hold">
+                                          <p:stCondLst>
+                                            <p:cond delay="0"/>
+                                          </p:stCondLst>
+                                        </p:cTn>
+                                        <p:tgtEl>
+                                          <p:spTgt spid="17"/>
+                                        </p:tgtEl>
+                                        <p:attrNameLst>
+                                          <p:attrName>style.visibility</p:attrName>
+                                        </p:attrNameLst>
+                                      </p:cBhvr>
+                                      <p:to>
+                                        <p:strVal val="visible"/>
+                                      </p:to>
+                                    </p:set>
+                                    <p:animEffect transition="in" filter="fade">
+                                      <p:cBhvr>
+                                        <p:cTn id="39" dur="500"/>
+                                        <p:tgtEl>
+                                          <p:spTgt spid="17"/>
+                                        </p:tgtEl>
+                                      </p:cBhvr>
+                                    </p:animEffect>
+                                  </p:childTnLst>
+                                </p:cTn>
+                              </p:par>
+                            </p:childTnLst>
+                          </p:cTn>
+                        </p:par>
+                      </p:childTnLst>
+                    </p:cTn>
+                  </p:par>
+                </p:childTnLst>
+              </p:cTn>
+              <p:prevCondLst>
+                <p:cond evt="onPrev" delay="0">
+                  <p:tgtEl>
+                    <p:sldTgt/>
+                  </p:tgtEl>
+                </p:cond>
+              </p:prevCondLst>
+              <p:nextCondLst>
+                <p:cond evt="onNext" delay="0">
+                  <p:tgtEl>
+                    <p:sldTgt/>
+                  </p:tgtEl>
+                </p:cond>
+              </p:nextCondLst>
+            </p:seq>
+          </p:childTnLst>
+        </p:cTn>
+      </p:par>
+    </p:tnLst>
+    <p:bldLst>
+      <p:bldP spid="7" grpId="0" animBg="1"/>
+      <p:bldP spid="8" grpId="0" animBg="1"/>
+      <p:bldGraphic spid="9" grpId="0">
+        <p:bldAsOne/>
+      </p:bldGraphic>
+      <p:bldP spid="10" grpId="0" animBg="1"/>
+      <p:bldP spid="11" grpId="0" animBg="1"/>
+      <p:bldP spid="12" grpId="0" animBg="1"/>
+      <p:bldP spid="13" grpId="0" animBg="1"/>
+      <p:bldP spid="14" grpId="0" animBg="1"/>
+      <p:bldP spid="15" grpId="0" animBg="1"/>
+      <p:bldP spid="16" grpId="0" animBg="1"/>
+      <p:bldP spid="17" grpId="0" animBg="1"/>
+    </p:bldLst>
+  </p:timing>
+</p:sld>
+</file>
+
+<file path=ppt/slides/slide11.xml><?xml version="1.0" encoding="utf-8"?>
+<p:sld xmlns:a="http://schemas.openxmlformats.org/drawingml/2006/main" xmlns:r="http://schemas.openxmlformats.org/officeDocument/2006/relationships" xmlns:p="http://schemas.openxmlformats.org/presentationml/2006/main">
+  <p:cSld name="Slide 11">
+    <p:bg>
+      <p:bgPr>
+        <a:solidFill>
+          <a:srgbClr val="E6EBF1"/>
+        </a:solidFill>
+      </p:bgPr>
+    </p:bg>
+    <p:spTree>
+      <p:nvGrpSpPr>
+        <p:cNvPr id="1" name=""/>
+        <p:cNvGrpSpPr/>
+        <p:nvPr/>
+      </p:nvGrpSpPr>
+      <p:grpSpPr>
+        <a:xfrm>
+          <a:off x="0" y="0"/>
+          <a:ext cx="0" cy="0"/>
+          <a:chOff x="0" y="0"/>
+          <a:chExt cx="0" cy="0"/>
+        </a:xfrm>
+      </p:grpSpPr>
+      <p:sp>
+        <p:nvSpPr>
+          <p:cNvPr id="2" name="!!orbL"/>
+          <p:cNvSpPr/>
+          <p:nvPr/>
+        </p:nvSpPr>
+        <p:spPr>
+          <a:xfrm>
+            <a:off x="502920" y="384048"/>
+            <a:ext cx="713232" cy="713232"/>
+          </a:xfrm>
+          <a:prstGeom prst="ellipse">
+            <a:avLst/>
+          </a:prstGeom>
+          <a:solidFill>
+            <a:srgbClr val="E6EBF1"/>
+          </a:solidFill>
+          <a:ln/>
+          <a:effectLst>
+            <a:outerShdw sx="100000" sy="100000" kx="0" ky="0" algn="bl" rotWithShape="0" blurRad="83820" dist="38100" dir="13500000">
+              <a:srgbClr val="FFFFFF">
+                <a:alpha val="95000"/>
+              </a:srgbClr>
+            </a:outerShdw>
+          </a:effectLst>
+        </p:spPr>
+      </p:sp>
+      <p:sp>
+        <p:nvSpPr>
+          <p:cNvPr id="3" name="!!orbD"/>
+          <p:cNvSpPr/>
+          <p:nvPr/>
+        </p:nvSpPr>
+        <p:spPr>
+          <a:xfrm>
+            <a:off x="502920" y="384048"/>
+            <a:ext cx="713232" cy="713232"/>
+          </a:xfrm>
+          <a:prstGeom prst="ellipse">
+            <a:avLst/>
+          </a:prstGeom>
+          <a:solidFill>
+            <a:srgbClr val="E6EBF1"/>
+          </a:solidFill>
+          <a:ln/>
+          <a:effectLst>
+            <a:outerShdw sx="100000" sy="100000" kx="0" ky="0" algn="bl" rotWithShape="0" blurRad="83820" dist="38100" dir="2700000">
+              <a:srgbClr val="A3B1C6">
+                <a:alpha val="60000"/>
+              </a:srgbClr>
+            </a:outerShdw>
+          </a:effectLst>
+        </p:spPr>
+      </p:sp>
+      <p:sp>
+        <p:nvSpPr>
+          <p:cNvPr id="4" name="!!num"/>
+          <p:cNvSpPr txBox="1"/>
+          <p:nvPr/>
+        </p:nvSpPr>
+        <p:spPr>
+          <a:xfrm>
+            <a:off x="502920" y="384048"/>
+            <a:ext cx="713232" cy="713232"/>
+          </a:xfrm>
+          <a:prstGeom prst="rect">
+            <a:avLst/>
+          </a:prstGeom>
+          <a:noFill/>
+          <a:ln/>
+        </p:spPr>
+        <p:txBody>
+          <a:bodyPr wrap="square" lIns="0" tIns="0" rIns="0" bIns="0" rtlCol="0" anchor="ctr"/>
+          <a:lstStyle/>
+          <a:p>
+            <a:pPr algn="ctr" indent="0" marL="0">
+              <a:buNone/>
+            </a:pPr>
+            <a:r>
+              <a:rPr lang="en-US" sz="2000" b="1" dirty="0">
+                <a:solidFill>
+                  <a:srgbClr val="2563C9"/>
+                </a:solidFill>
+                <a:latin typeface="Calibri" pitchFamily="34" charset="0"/>
+                <a:ea typeface="Calibri" pitchFamily="34" charset="-122"/>
+                <a:cs typeface="Calibri" pitchFamily="34" charset="-120"/>
+              </a:rPr>
+              <a:t>02</a:t>
+            </a:r>
+            <a:endParaRPr lang="en-US" sz="2000" dirty="0"/>
+          </a:p>
+        </p:txBody>
+      </p:sp>
+      <p:sp>
+        <p:nvSpPr>
+          <p:cNvPr id="5" name="s11_txt_194"/>
           <p:cNvSpPr txBox="1"/>
           <p:nvPr/>
         </p:nvSpPr>
@@ -19774,7 +20982,7 @@
       </p:sp>
       <p:sp>
         <p:nvSpPr>
-          <p:cNvPr id="6" name="s10_shp_169"/>
+          <p:cNvPr id="6" name="s11_shp_195"/>
           <p:cNvSpPr/>
           <p:nvPr/>
         </p:nvSpPr>
@@ -19803,7 +21011,7 @@
       </p:sp>
       <p:sp>
         <p:nvSpPr>
-          <p:cNvPr id="7" name="s10_shp_170"/>
+          <p:cNvPr id="7" name="s11_shp_196"/>
           <p:cNvSpPr/>
           <p:nvPr/>
         </p:nvSpPr>
@@ -19832,7 +21040,7 @@
       </p:sp>
       <p:sp>
         <p:nvSpPr>
-          <p:cNvPr id="8" name="s10_shp_171"/>
+          <p:cNvPr id="8" name="s11_shp_197"/>
           <p:cNvSpPr/>
           <p:nvPr/>
         </p:nvSpPr>
@@ -19859,7 +21067,7 @@
       </p:sp>
       <p:sp>
         <p:nvSpPr>
-          <p:cNvPr id="9" name="s10_shp_172"/>
+          <p:cNvPr id="9" name="s11_shp_198"/>
           <p:cNvSpPr/>
           <p:nvPr/>
         </p:nvSpPr>
@@ -19886,7 +21094,7 @@
       </p:sp>
       <p:sp>
         <p:nvSpPr>
-          <p:cNvPr id="10" name="s10_shp_173"/>
+          <p:cNvPr id="10" name="s11_shp_199"/>
           <p:cNvSpPr/>
           <p:nvPr/>
         </p:nvSpPr>
@@ -19906,7 +21114,7 @@
       </p:sp>
       <p:sp>
         <p:nvSpPr>
-          <p:cNvPr id="11" name="s10_txt_174"/>
+          <p:cNvPr id="11" name="s11_txt_200"/>
           <p:cNvSpPr txBox="1"/>
           <p:nvPr/>
         </p:nvSpPr>
@@ -19945,7 +21153,7 @@
       </p:sp>
       <p:sp>
         <p:nvSpPr>
-          <p:cNvPr id="12" name="s10_txt_175"/>
+          <p:cNvPr id="12" name="s11_txt_201"/>
           <p:cNvSpPr txBox="1"/>
           <p:nvPr/>
         </p:nvSpPr>
@@ -19984,7 +21192,7 @@
       </p:sp>
       <p:sp>
         <p:nvSpPr>
-          <p:cNvPr id="13" name="s10_txt_176"/>
+          <p:cNvPr id="13" name="s11_txt_202"/>
           <p:cNvSpPr txBox="1"/>
           <p:nvPr/>
         </p:nvSpPr>
@@ -20023,7 +21231,7 @@
       </p:sp>
       <p:sp>
         <p:nvSpPr>
-          <p:cNvPr id="14" name="s10_shp_177"/>
+          <p:cNvPr id="14" name="s11_shp_203"/>
           <p:cNvSpPr/>
           <p:nvPr/>
         </p:nvSpPr>
@@ -20052,7 +21260,7 @@
       </p:sp>
       <p:sp>
         <p:nvSpPr>
-          <p:cNvPr id="15" name="s10_shp_178"/>
+          <p:cNvPr id="15" name="s11_shp_204"/>
           <p:cNvSpPr/>
           <p:nvPr/>
         </p:nvSpPr>
@@ -20081,7 +21289,7 @@
       </p:sp>
       <p:sp>
         <p:nvSpPr>
-          <p:cNvPr id="16" name="s10_shp_179"/>
+          <p:cNvPr id="16" name="s11_shp_205"/>
           <p:cNvSpPr/>
           <p:nvPr/>
         </p:nvSpPr>
@@ -20108,7 +21316,7 @@
       </p:sp>
       <p:sp>
         <p:nvSpPr>
-          <p:cNvPr id="17" name="s10_shp_180"/>
+          <p:cNvPr id="17" name="s11_shp_206"/>
           <p:cNvSpPr/>
           <p:nvPr/>
         </p:nvSpPr>
@@ -20135,7 +21343,7 @@
       </p:sp>
       <p:sp>
         <p:nvSpPr>
-          <p:cNvPr id="18" name="s10_shp_181"/>
+          <p:cNvPr id="18" name="s11_shp_207"/>
           <p:cNvSpPr/>
           <p:nvPr/>
         </p:nvSpPr>
@@ -20155,7 +21363,7 @@
       </p:sp>
       <p:sp>
         <p:nvSpPr>
-          <p:cNvPr id="19" name="s10_txt_182"/>
+          <p:cNvPr id="19" name="s11_txt_208"/>
           <p:cNvSpPr txBox="1"/>
           <p:nvPr/>
         </p:nvSpPr>
@@ -20194,7 +21402,7 @@
       </p:sp>
       <p:sp>
         <p:nvSpPr>
-          <p:cNvPr id="20" name="s10_txt_183"/>
+          <p:cNvPr id="20" name="s11_txt_209"/>
           <p:cNvSpPr txBox="1"/>
           <p:nvPr/>
         </p:nvSpPr>
@@ -20233,7 +21441,7 @@
       </p:sp>
       <p:sp>
         <p:nvSpPr>
-          <p:cNvPr id="21" name="s10_txt_184"/>
+          <p:cNvPr id="21" name="s11_txt_210"/>
           <p:cNvSpPr txBox="1"/>
           <p:nvPr/>
         </p:nvSpPr>
@@ -20272,7 +21480,7 @@
       </p:sp>
       <p:sp>
         <p:nvSpPr>
-          <p:cNvPr id="22" name="s10_shp_185"/>
+          <p:cNvPr id="22" name="s11_shp_211"/>
           <p:cNvSpPr/>
           <p:nvPr/>
         </p:nvSpPr>
@@ -20301,7 +21509,7 @@
       </p:sp>
       <p:sp>
         <p:nvSpPr>
-          <p:cNvPr id="23" name="s10_shp_186"/>
+          <p:cNvPr id="23" name="s11_shp_212"/>
           <p:cNvSpPr/>
           <p:nvPr/>
         </p:nvSpPr>
@@ -20330,7 +21538,7 @@
       </p:sp>
       <p:sp>
         <p:nvSpPr>
-          <p:cNvPr id="24" name="s10_shp_187"/>
+          <p:cNvPr id="24" name="s11_shp_213"/>
           <p:cNvSpPr/>
           <p:nvPr/>
         </p:nvSpPr>
@@ -20350,7 +21558,7 @@
       </p:sp>
       <p:sp>
         <p:nvSpPr>
-          <p:cNvPr id="25" name="s10_txt_188"/>
+          <p:cNvPr id="25" name="s11_txt_214"/>
           <p:cNvSpPr txBox="1"/>
           <p:nvPr/>
         </p:nvSpPr>
@@ -20389,7 +21597,7 @@
       </p:sp>
       <p:sp>
         <p:nvSpPr>
-          <p:cNvPr id="26" name="s10_txt_189"/>
+          <p:cNvPr id="26" name="s11_txt_215"/>
           <p:cNvSpPr txBox="1"/>
           <p:nvPr/>
         </p:nvSpPr>
@@ -20428,7 +21636,7 @@
       </p:sp>
       <p:sp>
         <p:nvSpPr>
-          <p:cNvPr id="27" name="s10_txt_190"/>
+          <p:cNvPr id="27" name="s11_txt_216"/>
           <p:cNvSpPr txBox="1"/>
           <p:nvPr/>
         </p:nvSpPr>
@@ -20467,7 +21675,7 @@
       </p:sp>
       <p:sp>
         <p:nvSpPr>
-          <p:cNvPr id="28" name="s10_shp_191"/>
+          <p:cNvPr id="28" name="s11_shp_217"/>
           <p:cNvSpPr/>
           <p:nvPr/>
         </p:nvSpPr>
@@ -20496,7 +21704,7 @@
       </p:sp>
       <p:sp>
         <p:nvSpPr>
-          <p:cNvPr id="29" name="s10_txt_192"/>
+          <p:cNvPr id="29" name="s11_txt_218"/>
           <p:cNvSpPr txBox="1"/>
           <p:nvPr/>
         </p:nvSpPr>
@@ -21497,9 +22705,9 @@
 </p:sld>
 </file>
 
-<file path=ppt/slides/slide11.xml><?xml version="1.0" encoding="utf-8"?>
+<file path=ppt/slides/slide12.xml><?xml version="1.0" encoding="utf-8"?>
 <p:sld xmlns:a="http://schemas.openxmlformats.org/drawingml/2006/main" xmlns:r="http://schemas.openxmlformats.org/officeDocument/2006/relationships" xmlns:p="http://schemas.openxmlformats.org/presentationml/2006/main">
-  <p:cSld name="Slide 11">
+  <p:cSld name="Slide 12">
     <p:bg>
       <p:bgPr>
         <a:solidFill>
@@ -21616,7 +22824,7 @@
       </p:sp>
       <p:sp>
         <p:nvSpPr>
-          <p:cNvPr id="5" name="s11_txt_193"/>
+          <p:cNvPr id="5" name="s12_txt_219"/>
           <p:cNvSpPr txBox="1"/>
           <p:nvPr/>
         </p:nvSpPr>
@@ -21655,7 +22863,7 @@
       </p:sp>
       <p:sp>
         <p:nvSpPr>
-          <p:cNvPr id="6" name="s11_txt_194"/>
+          <p:cNvPr id="6" name="s12_txt_220"/>
           <p:cNvSpPr txBox="1"/>
           <p:nvPr/>
         </p:nvSpPr>
@@ -21694,7 +22902,7 @@
       </p:sp>
       <p:sp>
         <p:nvSpPr>
-          <p:cNvPr id="7" name="s11_shp_195"/>
+          <p:cNvPr id="7" name="s12_shp_221"/>
           <p:cNvSpPr/>
           <p:nvPr/>
         </p:nvSpPr>
@@ -21723,7 +22931,7 @@
       </p:sp>
       <p:sp>
         <p:nvSpPr>
-          <p:cNvPr id="8" name="s11_shp_196"/>
+          <p:cNvPr id="8" name="s12_shp_222"/>
           <p:cNvSpPr/>
           <p:nvPr/>
         </p:nvSpPr>
@@ -21752,7 +22960,7 @@
       </p:sp>
       <p:sp>
         <p:nvSpPr>
-          <p:cNvPr id="9" name="s11_shp_197"/>
+          <p:cNvPr id="9" name="s12_shp_223"/>
           <p:cNvSpPr/>
           <p:nvPr/>
         </p:nvSpPr>
@@ -21779,7 +22987,7 @@
       </p:sp>
       <p:sp>
         <p:nvSpPr>
-          <p:cNvPr id="10" name="s11_txt_198"/>
+          <p:cNvPr id="10" name="s12_txt_224"/>
           <p:cNvSpPr txBox="1"/>
           <p:nvPr/>
         </p:nvSpPr>
@@ -21818,7 +23026,7 @@
       </p:sp>
       <p:sp>
         <p:nvSpPr>
-          <p:cNvPr id="11" name="s11_txt_199"/>
+          <p:cNvPr id="11" name="s12_txt_225"/>
           <p:cNvSpPr txBox="1"/>
           <p:nvPr/>
         </p:nvSpPr>
@@ -21857,7 +23065,7 @@
       </p:sp>
       <p:sp>
         <p:nvSpPr>
-          <p:cNvPr id="12" name="s11_txt_200"/>
+          <p:cNvPr id="12" name="s12_txt_226"/>
           <p:cNvSpPr txBox="1"/>
           <p:nvPr/>
         </p:nvSpPr>
@@ -21896,7 +23104,7 @@
       </p:sp>
       <p:sp>
         <p:nvSpPr>
-          <p:cNvPr id="13" name="s11_shp_201"/>
+          <p:cNvPr id="13" name="s12_shp_227"/>
           <p:cNvSpPr/>
           <p:nvPr/>
         </p:nvSpPr>
@@ -21925,7 +23133,7 @@
       </p:sp>
       <p:sp>
         <p:nvSpPr>
-          <p:cNvPr id="14" name="s11_shp_202"/>
+          <p:cNvPr id="14" name="s12_shp_228"/>
           <p:cNvSpPr/>
           <p:nvPr/>
         </p:nvSpPr>
@@ -21954,7 +23162,7 @@
       </p:sp>
       <p:sp>
         <p:nvSpPr>
-          <p:cNvPr id="15" name="s11_shp_203"/>
+          <p:cNvPr id="15" name="s12_shp_229"/>
           <p:cNvSpPr/>
           <p:nvPr/>
         </p:nvSpPr>
@@ -21981,7 +23189,7 @@
       </p:sp>
       <p:sp>
         <p:nvSpPr>
-          <p:cNvPr id="16" name="s11_txt_204"/>
+          <p:cNvPr id="16" name="s12_txt_230"/>
           <p:cNvSpPr txBox="1"/>
           <p:nvPr/>
         </p:nvSpPr>
@@ -22020,7 +23228,7 @@
       </p:sp>
       <p:sp>
         <p:nvSpPr>
-          <p:cNvPr id="17" name="s11_txt_205"/>
+          <p:cNvPr id="17" name="s12_txt_231"/>
           <p:cNvSpPr txBox="1"/>
           <p:nvPr/>
         </p:nvSpPr>
@@ -22059,7 +23267,7 @@
       </p:sp>
       <p:sp>
         <p:nvSpPr>
-          <p:cNvPr id="18" name="s11_txt_206"/>
+          <p:cNvPr id="18" name="s12_txt_232"/>
           <p:cNvSpPr txBox="1"/>
           <p:nvPr/>
         </p:nvSpPr>
@@ -22098,7 +23306,7 @@
       </p:sp>
       <p:sp>
         <p:nvSpPr>
-          <p:cNvPr id="19" name="s11_shp_207"/>
+          <p:cNvPr id="19" name="s12_shp_233"/>
           <p:cNvSpPr/>
           <p:nvPr/>
         </p:nvSpPr>
@@ -22127,7 +23335,7 @@
       </p:sp>
       <p:sp>
         <p:nvSpPr>
-          <p:cNvPr id="20" name="s11_shp_208"/>
+          <p:cNvPr id="20" name="s12_shp_234"/>
           <p:cNvSpPr/>
           <p:nvPr/>
         </p:nvSpPr>
@@ -22156,7 +23364,7 @@
       </p:sp>
       <p:sp>
         <p:nvSpPr>
-          <p:cNvPr id="21" name="s11_shp_209"/>
+          <p:cNvPr id="21" name="s12_shp_235"/>
           <p:cNvSpPr/>
           <p:nvPr/>
         </p:nvSpPr>
@@ -22183,7 +23391,7 @@
       </p:sp>
       <p:sp>
         <p:nvSpPr>
-          <p:cNvPr id="22" name="s11_txt_210"/>
+          <p:cNvPr id="22" name="s12_txt_236"/>
           <p:cNvSpPr txBox="1"/>
           <p:nvPr/>
         </p:nvSpPr>
@@ -22222,7 +23430,7 @@
       </p:sp>
       <p:sp>
         <p:nvSpPr>
-          <p:cNvPr id="23" name="s11_txt_211"/>
+          <p:cNvPr id="23" name="s12_txt_237"/>
           <p:cNvSpPr txBox="1"/>
           <p:nvPr/>
         </p:nvSpPr>
@@ -22261,7 +23469,7 @@
       </p:sp>
       <p:sp>
         <p:nvSpPr>
-          <p:cNvPr id="24" name="s11_txt_212"/>
+          <p:cNvPr id="24" name="s12_txt_238"/>
           <p:cNvSpPr txBox="1"/>
           <p:nvPr/>
         </p:nvSpPr>
@@ -22300,7 +23508,7 @@
       </p:sp>
       <p:sp>
         <p:nvSpPr>
-          <p:cNvPr id="25" name="s11_shp_213"/>
+          <p:cNvPr id="25" name="s12_shp_239"/>
           <p:cNvSpPr/>
           <p:nvPr/>
         </p:nvSpPr>
@@ -22329,7 +23537,7 @@
       </p:sp>
       <p:sp>
         <p:nvSpPr>
-          <p:cNvPr id="26" name="s11_shp_214"/>
+          <p:cNvPr id="26" name="s12_shp_240"/>
           <p:cNvSpPr/>
           <p:nvPr/>
         </p:nvSpPr>
@@ -22358,7 +23566,7 @@
       </p:sp>
       <p:sp>
         <p:nvSpPr>
-          <p:cNvPr id="27" name="s11_shp_215"/>
+          <p:cNvPr id="27" name="s12_shp_241"/>
           <p:cNvSpPr/>
           <p:nvPr/>
         </p:nvSpPr>
@@ -22385,7 +23593,7 @@
       </p:sp>
       <p:sp>
         <p:nvSpPr>
-          <p:cNvPr id="28" name="s11_txt_216"/>
+          <p:cNvPr id="28" name="s12_txt_242"/>
           <p:cNvSpPr txBox="1"/>
           <p:nvPr/>
         </p:nvSpPr>
@@ -22424,7 +23632,7 @@
       </p:sp>
       <p:sp>
         <p:nvSpPr>
-          <p:cNvPr id="29" name="s11_txt_217"/>
+          <p:cNvPr id="29" name="s12_txt_243"/>
           <p:cNvSpPr txBox="1"/>
           <p:nvPr/>
         </p:nvSpPr>
@@ -22463,7 +23671,7 @@
       </p:sp>
       <p:sp>
         <p:nvSpPr>
-          <p:cNvPr id="30" name="s11_txt_218"/>
+          <p:cNvPr id="30" name="s12_txt_244"/>
           <p:cNvSpPr txBox="1"/>
           <p:nvPr/>
         </p:nvSpPr>
@@ -22502,7 +23710,7 @@
       </p:sp>
       <p:sp>
         <p:nvSpPr>
-          <p:cNvPr id="31" name="s11_shp_219"/>
+          <p:cNvPr id="31" name="s12_shp_245"/>
           <p:cNvSpPr/>
           <p:nvPr/>
         </p:nvSpPr>
@@ -22531,7 +23739,7 @@
       </p:sp>
       <p:sp>
         <p:nvSpPr>
-          <p:cNvPr id="32" name="s11_txt_220"/>
+          <p:cNvPr id="32" name="s12_txt_246"/>
           <p:cNvSpPr txBox="1"/>
           <p:nvPr/>
         </p:nvSpPr>
@@ -23613,9 +24821,9 @@
 </p:sld>
 </file>
 
-<file path=ppt/slides/slide12.xml><?xml version="1.0" encoding="utf-8"?>
+<file path=ppt/slides/slide13.xml><?xml version="1.0" encoding="utf-8"?>
 <p:sld xmlns:a="http://schemas.openxmlformats.org/drawingml/2006/main" xmlns:r="http://schemas.openxmlformats.org/officeDocument/2006/relationships" xmlns:p="http://schemas.openxmlformats.org/presentationml/2006/main">
-  <p:cSld name="Slide 12">
+  <p:cSld name="Slide 13">
     <p:bg>
       <p:bgPr>
         <a:solidFill>
@@ -23759,7 +24967,7 @@
       </p:sp>
       <p:sp>
         <p:nvSpPr>
-          <p:cNvPr id="6" name="s12_txt_221"/>
+          <p:cNvPr id="6" name="s13_txt_247"/>
           <p:cNvSpPr txBox="1"/>
           <p:nvPr/>
         </p:nvSpPr>
@@ -23798,7 +25006,7 @@
       </p:sp>
       <p:sp>
         <p:nvSpPr>
-          <p:cNvPr id="7" name="s12_txt_222"/>
+          <p:cNvPr id="7" name="s13_txt_248"/>
           <p:cNvSpPr txBox="1"/>
           <p:nvPr/>
         </p:nvSpPr>
@@ -23837,7 +25045,7 @@
       </p:sp>
       <p:sp>
         <p:nvSpPr>
-          <p:cNvPr id="8" name="s12_shp_223"/>
+          <p:cNvPr id="8" name="s13_shp_249"/>
           <p:cNvSpPr/>
           <p:nvPr/>
         </p:nvSpPr>
@@ -23864,7 +25072,7 @@
       </p:sp>
       <p:sp>
         <p:nvSpPr>
-          <p:cNvPr id="9" name="s12_shp_224"/>
+          <p:cNvPr id="9" name="s13_shp_250"/>
           <p:cNvSpPr/>
           <p:nvPr/>
         </p:nvSpPr>
@@ -23891,7 +25099,7 @@
       </p:sp>
       <p:sp>
         <p:nvSpPr>
-          <p:cNvPr id="10" name="s12_shp_225"/>
+          <p:cNvPr id="10" name="s13_shp_251"/>
           <p:cNvSpPr/>
           <p:nvPr/>
         </p:nvSpPr>
@@ -23918,7 +25126,7 @@
       </p:sp>
       <p:sp>
         <p:nvSpPr>
-          <p:cNvPr id="11" name="s12_shp_226"/>
+          <p:cNvPr id="11" name="s13_shp_252"/>
           <p:cNvSpPr/>
           <p:nvPr/>
         </p:nvSpPr>
@@ -23963,9 +25171,9 @@
 </p:sld>
 </file>
 
-<file path=ppt/slides/slide13.xml><?xml version="1.0" encoding="utf-8"?>
+<file path=ppt/slides/slide14.xml><?xml version="1.0" encoding="utf-8"?>
 <p:sld xmlns:a="http://schemas.openxmlformats.org/drawingml/2006/main" xmlns:r="http://schemas.openxmlformats.org/officeDocument/2006/relationships" xmlns:p="http://schemas.openxmlformats.org/presentationml/2006/main">
-  <p:cSld name="Slide 13">
+  <p:cSld name="Slide 14">
     <p:bg>
       <p:bgPr>
         <a:solidFill>
@@ -24082,7 +25290,7 @@
       </p:sp>
       <p:sp>
         <p:nvSpPr>
-          <p:cNvPr id="5" name="s13_txt_227"/>
+          <p:cNvPr id="5" name="s14_txt_253"/>
           <p:cNvSpPr txBox="1"/>
           <p:nvPr/>
         </p:nvSpPr>
@@ -24121,7 +25329,7 @@
       </p:sp>
       <p:sp>
         <p:nvSpPr>
-          <p:cNvPr id="6" name="s13_txt_228"/>
+          <p:cNvPr id="6" name="s14_txt_254"/>
           <p:cNvSpPr txBox="1"/>
           <p:nvPr/>
         </p:nvSpPr>
@@ -24160,7 +25368,7 @@
       </p:sp>
       <p:sp>
         <p:nvSpPr>
-          <p:cNvPr id="7" name="s13_shp_229"/>
+          <p:cNvPr id="7" name="s14_shp_255"/>
           <p:cNvSpPr/>
           <p:nvPr/>
         </p:nvSpPr>
@@ -24189,7 +25397,7 @@
       </p:sp>
       <p:sp>
         <p:nvSpPr>
-          <p:cNvPr id="8" name="s13_shp_230"/>
+          <p:cNvPr id="8" name="s14_shp_256"/>
           <p:cNvSpPr/>
           <p:nvPr/>
         </p:nvSpPr>
@@ -24218,7 +25426,7 @@
       </p:sp>
       <p:sp>
         <p:nvSpPr>
-          <p:cNvPr id="9" name="s13_txt_231"/>
+          <p:cNvPr id="9" name="s14_txt_257"/>
           <p:cNvSpPr txBox="1"/>
           <p:nvPr/>
         </p:nvSpPr>
@@ -24257,7 +25465,7 @@
       </p:sp>
       <p:sp>
         <p:nvSpPr>
-          <p:cNvPr id="10" name="s13_shp_232"/>
+          <p:cNvPr id="10" name="s14_shp_258"/>
           <p:cNvSpPr/>
           <p:nvPr/>
         </p:nvSpPr>
@@ -24286,7 +25494,7 @@
       </p:sp>
       <p:sp>
         <p:nvSpPr>
-          <p:cNvPr id="11" name="s13_shp_233"/>
+          <p:cNvPr id="11" name="s14_shp_259"/>
           <p:cNvSpPr/>
           <p:nvPr/>
         </p:nvSpPr>
@@ -24308,7 +25516,7 @@
       </p:sp>
       <p:sp>
         <p:nvSpPr>
-          <p:cNvPr id="12" name="s13_txt_234"/>
+          <p:cNvPr id="12" name="s14_txt_260"/>
           <p:cNvSpPr txBox="1"/>
           <p:nvPr/>
         </p:nvSpPr>
@@ -24347,7 +25555,7 @@
       </p:sp>
       <p:sp>
         <p:nvSpPr>
-          <p:cNvPr id="13" name="s13_txt_235"/>
+          <p:cNvPr id="13" name="s14_txt_261"/>
           <p:cNvSpPr txBox="1"/>
           <p:nvPr/>
         </p:nvSpPr>
@@ -24386,7 +25594,7 @@
       </p:sp>
       <p:sp>
         <p:nvSpPr>
-          <p:cNvPr id="14" name="s13_shp_236"/>
+          <p:cNvPr id="14" name="s14_shp_262"/>
           <p:cNvSpPr/>
           <p:nvPr/>
         </p:nvSpPr>
@@ -24415,7 +25623,7 @@
       </p:sp>
       <p:sp>
         <p:nvSpPr>
-          <p:cNvPr id="15" name="s13_shp_237"/>
+          <p:cNvPr id="15" name="s14_shp_263"/>
           <p:cNvSpPr/>
           <p:nvPr/>
         </p:nvSpPr>
@@ -24437,7 +25645,7 @@
       </p:sp>
       <p:sp>
         <p:nvSpPr>
-          <p:cNvPr id="16" name="s13_txt_238"/>
+          <p:cNvPr id="16" name="s14_txt_264"/>
           <p:cNvSpPr txBox="1"/>
           <p:nvPr/>
         </p:nvSpPr>
@@ -24476,7 +25684,7 @@
       </p:sp>
       <p:sp>
         <p:nvSpPr>
-          <p:cNvPr id="17" name="s13_txt_239"/>
+          <p:cNvPr id="17" name="s14_txt_265"/>
           <p:cNvSpPr txBox="1"/>
           <p:nvPr/>
         </p:nvSpPr>
@@ -24515,7 +25723,7 @@
       </p:sp>
       <p:sp>
         <p:nvSpPr>
-          <p:cNvPr id="18" name="s13_shp_240"/>
+          <p:cNvPr id="18" name="s14_shp_266"/>
           <p:cNvSpPr/>
           <p:nvPr/>
         </p:nvSpPr>
@@ -24544,7 +25752,7 @@
       </p:sp>
       <p:sp>
         <p:nvSpPr>
-          <p:cNvPr id="19" name="s13_shp_241"/>
+          <p:cNvPr id="19" name="s14_shp_267"/>
           <p:cNvSpPr/>
           <p:nvPr/>
         </p:nvSpPr>
@@ -24566,7 +25774,7 @@
       </p:sp>
       <p:sp>
         <p:nvSpPr>
-          <p:cNvPr id="20" name="s13_txt_242"/>
+          <p:cNvPr id="20" name="s14_txt_268"/>
           <p:cNvSpPr txBox="1"/>
           <p:nvPr/>
         </p:nvSpPr>
@@ -24605,7 +25813,7 @@
       </p:sp>
       <p:sp>
         <p:nvSpPr>
-          <p:cNvPr id="21" name="s13_txt_243"/>
+          <p:cNvPr id="21" name="s14_txt_269"/>
           <p:cNvSpPr txBox="1"/>
           <p:nvPr/>
         </p:nvSpPr>
@@ -24644,7 +25852,7 @@
       </p:sp>
       <p:sp>
         <p:nvSpPr>
-          <p:cNvPr id="22" name="s13_shp_244"/>
+          <p:cNvPr id="22" name="s14_shp_270"/>
           <p:cNvSpPr/>
           <p:nvPr/>
         </p:nvSpPr>
@@ -24673,7 +25881,7 @@
       </p:sp>
       <p:sp>
         <p:nvSpPr>
-          <p:cNvPr id="23" name="s13_shp_245"/>
+          <p:cNvPr id="23" name="s14_shp_271"/>
           <p:cNvSpPr/>
           <p:nvPr/>
         </p:nvSpPr>
@@ -24695,7 +25903,7 @@
       </p:sp>
       <p:sp>
         <p:nvSpPr>
-          <p:cNvPr id="24" name="s13_txt_246"/>
+          <p:cNvPr id="24" name="s14_txt_272"/>
           <p:cNvSpPr txBox="1"/>
           <p:nvPr/>
         </p:nvSpPr>
@@ -24734,7 +25942,7 @@
       </p:sp>
       <p:sp>
         <p:nvSpPr>
-          <p:cNvPr id="25" name="s13_txt_247"/>
+          <p:cNvPr id="25" name="s14_txt_273"/>
           <p:cNvSpPr txBox="1"/>
           <p:nvPr/>
         </p:nvSpPr>
@@ -24773,7 +25981,7 @@
       </p:sp>
       <p:sp>
         <p:nvSpPr>
-          <p:cNvPr id="26" name="s13_shp_248"/>
+          <p:cNvPr id="26" name="s14_shp_274"/>
           <p:cNvSpPr/>
           <p:nvPr/>
         </p:nvSpPr>
@@ -24802,7 +26010,7 @@
       </p:sp>
       <p:sp>
         <p:nvSpPr>
-          <p:cNvPr id="27" name="s13_shp_249"/>
+          <p:cNvPr id="27" name="s14_shp_275"/>
           <p:cNvSpPr/>
           <p:nvPr/>
         </p:nvSpPr>
@@ -24824,7 +26032,7 @@
       </p:sp>
       <p:sp>
         <p:nvSpPr>
-          <p:cNvPr id="28" name="s13_txt_250"/>
+          <p:cNvPr id="28" name="s14_txt_276"/>
           <p:cNvSpPr txBox="1"/>
           <p:nvPr/>
         </p:nvSpPr>
@@ -24863,7 +26071,7 @@
       </p:sp>
       <p:sp>
         <p:nvSpPr>
-          <p:cNvPr id="29" name="s13_shp_251"/>
+          <p:cNvPr id="29" name="s14_shp_277"/>
           <p:cNvSpPr/>
           <p:nvPr/>
         </p:nvSpPr>
@@ -24892,7 +26100,7 @@
       </p:sp>
       <p:sp>
         <p:nvSpPr>
-          <p:cNvPr id="30" name="s13_shp_252"/>
+          <p:cNvPr id="30" name="s14_shp_278"/>
           <p:cNvSpPr/>
           <p:nvPr/>
         </p:nvSpPr>
@@ -24921,7 +26129,7 @@
       </p:sp>
       <p:sp>
         <p:nvSpPr>
-          <p:cNvPr id="31" name="s13_txt_253"/>
+          <p:cNvPr id="31" name="s14_txt_279"/>
           <p:cNvSpPr txBox="1"/>
           <p:nvPr/>
         </p:nvSpPr>
@@ -24960,7 +26168,7 @@
       </p:sp>
       <p:sp>
         <p:nvSpPr>
-          <p:cNvPr id="32" name="s13_txt_254"/>
+          <p:cNvPr id="32" name="s14_txt_280"/>
           <p:cNvSpPr txBox="1"/>
           <p:nvPr/>
         </p:nvSpPr>
@@ -24999,7 +26207,7 @@
       </p:sp>
       <p:sp>
         <p:nvSpPr>
-          <p:cNvPr id="33" name="s13_shp_255"/>
+          <p:cNvPr id="33" name="s14_shp_281"/>
           <p:cNvSpPr/>
           <p:nvPr/>
         </p:nvSpPr>
@@ -25028,7 +26236,7 @@
       </p:sp>
       <p:sp>
         <p:nvSpPr>
-          <p:cNvPr id="34" name="s13_shp_256"/>
+          <p:cNvPr id="34" name="s14_shp_282"/>
           <p:cNvSpPr/>
           <p:nvPr/>
         </p:nvSpPr>
@@ -25057,7 +26265,7 @@
       </p:sp>
       <p:sp>
         <p:nvSpPr>
-          <p:cNvPr id="35" name="s13_txt_257"/>
+          <p:cNvPr id="35" name="s14_txt_283"/>
           <p:cNvSpPr txBox="1"/>
           <p:nvPr/>
         </p:nvSpPr>
@@ -25096,7 +26304,7 @@
       </p:sp>
       <p:sp>
         <p:nvSpPr>
-          <p:cNvPr id="36" name="s13_txt_258"/>
+          <p:cNvPr id="36" name="s14_txt_284"/>
           <p:cNvSpPr txBox="1"/>
           <p:nvPr/>
         </p:nvSpPr>
@@ -25135,7 +26343,7 @@
       </p:sp>
       <p:sp>
         <p:nvSpPr>
-          <p:cNvPr id="37" name="s13_shp_259"/>
+          <p:cNvPr id="37" name="s14_shp_285"/>
           <p:cNvSpPr/>
           <p:nvPr/>
         </p:nvSpPr>
@@ -25164,7 +26372,7 @@
       </p:sp>
       <p:sp>
         <p:nvSpPr>
-          <p:cNvPr id="38" name="s13_shp_260"/>
+          <p:cNvPr id="38" name="s14_shp_286"/>
           <p:cNvSpPr/>
           <p:nvPr/>
         </p:nvSpPr>
@@ -25193,7 +26401,7 @@
       </p:sp>
       <p:sp>
         <p:nvSpPr>
-          <p:cNvPr id="39" name="s13_txt_261"/>
+          <p:cNvPr id="39" name="s14_txt_287"/>
           <p:cNvSpPr txBox="1"/>
           <p:nvPr/>
         </p:nvSpPr>
@@ -25232,7 +26440,7 @@
       </p:sp>
       <p:sp>
         <p:nvSpPr>
-          <p:cNvPr id="40" name="s13_txt_262"/>
+          <p:cNvPr id="40" name="s14_txt_288"/>
           <p:cNvSpPr txBox="1"/>
           <p:nvPr/>
         </p:nvSpPr>
@@ -26638,9 +27846,9 @@
 </p:sld>
 </file>
 
-<file path=ppt/slides/slide14.xml><?xml version="1.0" encoding="utf-8"?>
+<file path=ppt/slides/slide15.xml><?xml version="1.0" encoding="utf-8"?>
 <p:sld xmlns:a="http://schemas.openxmlformats.org/drawingml/2006/main" xmlns:r="http://schemas.openxmlformats.org/officeDocument/2006/relationships" xmlns:p="http://schemas.openxmlformats.org/presentationml/2006/main">
-  <p:cSld name="Slide 14">
+  <p:cSld name="Slide 15">
     <p:bg>
       <p:bgPr>
         <a:solidFill>
@@ -26757,7 +27965,7 @@
       </p:sp>
       <p:sp>
         <p:nvSpPr>
-          <p:cNvPr id="5" name="s14_txt_263"/>
+          <p:cNvPr id="5" name="s15_txt_289"/>
           <p:cNvSpPr txBox="1"/>
           <p:nvPr/>
         </p:nvSpPr>
@@ -26796,7 +28004,7 @@
       </p:sp>
       <p:sp>
         <p:nvSpPr>
-          <p:cNvPr id="6" name="s14_txt_264"/>
+          <p:cNvPr id="6" name="s15_txt_290"/>
           <p:cNvSpPr txBox="1"/>
           <p:nvPr/>
         </p:nvSpPr>
@@ -26835,7 +28043,7 @@
       </p:sp>
       <p:sp>
         <p:nvSpPr>
-          <p:cNvPr id="7" name="s14_shp_265"/>
+          <p:cNvPr id="7" name="s15_shp_291"/>
           <p:cNvSpPr/>
           <p:nvPr/>
         </p:nvSpPr>
@@ -26864,7 +28072,7 @@
       </p:sp>
       <p:sp>
         <p:nvSpPr>
-          <p:cNvPr id="8" name="s14_shp_266"/>
+          <p:cNvPr id="8" name="s15_shp_292"/>
           <p:cNvSpPr/>
           <p:nvPr/>
         </p:nvSpPr>
@@ -26893,7 +28101,7 @@
       </p:sp>
       <p:graphicFrame>
         <p:nvGraphicFramePr>
-          <p:cNvPr id="9" name="s14_chart_267" descr=""/>
+          <p:cNvPr id="9" name="s15_chart_293" descr=""/>
           <p:cNvGraphicFramePr/>
           <p:nvPr/>
         </p:nvGraphicFramePr>
@@ -26909,7 +28117,7 @@
       </p:graphicFrame>
       <p:sp>
         <p:nvSpPr>
-          <p:cNvPr id="10" name="s14_txt_268"/>
+          <p:cNvPr id="10" name="s15_txt_294"/>
           <p:cNvSpPr txBox="1"/>
           <p:nvPr/>
         </p:nvSpPr>
@@ -26948,7 +28156,7 @@
       </p:sp>
       <p:sp>
         <p:nvSpPr>
-          <p:cNvPr id="11" name="s14_txt_269"/>
+          <p:cNvPr id="11" name="s15_txt_295"/>
           <p:cNvSpPr txBox="1"/>
           <p:nvPr/>
         </p:nvSpPr>
@@ -26987,7 +28195,7 @@
       </p:sp>
       <p:sp>
         <p:nvSpPr>
-          <p:cNvPr id="12" name="s14_txt_270"/>
+          <p:cNvPr id="12" name="s15_txt_296"/>
           <p:cNvSpPr txBox="1"/>
           <p:nvPr/>
         </p:nvSpPr>
@@ -27026,7 +28234,7 @@
       </p:sp>
       <p:sp>
         <p:nvSpPr>
-          <p:cNvPr id="13" name="s14_txt_271"/>
+          <p:cNvPr id="13" name="s15_txt_297"/>
           <p:cNvSpPr txBox="1"/>
           <p:nvPr/>
         </p:nvSpPr>
@@ -27065,7 +28273,7 @@
       </p:sp>
       <p:sp>
         <p:nvSpPr>
-          <p:cNvPr id="14" name="s14_txt_272"/>
+          <p:cNvPr id="14" name="s15_txt_298"/>
           <p:cNvSpPr txBox="1"/>
           <p:nvPr/>
         </p:nvSpPr>
@@ -27104,7 +28312,7 @@
       </p:sp>
       <p:sp>
         <p:nvSpPr>
-          <p:cNvPr id="15" name="s14_txt_273"/>
+          <p:cNvPr id="15" name="s15_txt_299"/>
           <p:cNvSpPr txBox="1"/>
           <p:nvPr/>
         </p:nvSpPr>
@@ -27143,7 +28351,7 @@
       </p:sp>
       <p:sp>
         <p:nvSpPr>
-          <p:cNvPr id="16" name="s14_txt_274"/>
+          <p:cNvPr id="16" name="s15_txt_300"/>
           <p:cNvSpPr txBox="1"/>
           <p:nvPr/>
         </p:nvSpPr>
@@ -27182,7 +28390,7 @@
       </p:sp>
       <p:sp>
         <p:nvSpPr>
-          <p:cNvPr id="17" name="s14_shp_275"/>
+          <p:cNvPr id="17" name="s15_shp_301"/>
           <p:cNvSpPr/>
           <p:nvPr/>
         </p:nvSpPr>
@@ -27211,7 +28419,7 @@
       </p:sp>
       <p:sp>
         <p:nvSpPr>
-          <p:cNvPr id="18" name="s14_shp_276"/>
+          <p:cNvPr id="18" name="s15_shp_302"/>
           <p:cNvSpPr/>
           <p:nvPr/>
         </p:nvSpPr>
@@ -27240,7 +28448,7 @@
       </p:sp>
       <p:sp>
         <p:nvSpPr>
-          <p:cNvPr id="19" name="s14_txt_277"/>
+          <p:cNvPr id="19" name="s15_txt_303"/>
           <p:cNvSpPr txBox="1"/>
           <p:nvPr/>
         </p:nvSpPr>
@@ -27279,7 +28487,7 @@
       </p:sp>
       <p:sp>
         <p:nvSpPr>
-          <p:cNvPr id="20" name="s14_txt_278"/>
+          <p:cNvPr id="20" name="s15_txt_304"/>
           <p:cNvSpPr txBox="1"/>
           <p:nvPr/>
         </p:nvSpPr>
@@ -27318,7 +28526,7 @@
       </p:sp>
       <p:sp>
         <p:nvSpPr>
-          <p:cNvPr id="21" name="s14_shp_279"/>
+          <p:cNvPr id="21" name="s15_shp_305"/>
           <p:cNvSpPr/>
           <p:nvPr/>
         </p:nvSpPr>
@@ -27347,7 +28555,7 @@
       </p:sp>
       <p:sp>
         <p:nvSpPr>
-          <p:cNvPr id="22" name="s14_shp_280"/>
+          <p:cNvPr id="22" name="s15_shp_306"/>
           <p:cNvSpPr/>
           <p:nvPr/>
         </p:nvSpPr>
@@ -27376,7 +28584,7 @@
       </p:sp>
       <p:sp>
         <p:nvSpPr>
-          <p:cNvPr id="23" name="s14_txt_281"/>
+          <p:cNvPr id="23" name="s15_txt_307"/>
           <p:cNvSpPr txBox="1"/>
           <p:nvPr/>
         </p:nvSpPr>
@@ -27415,7 +28623,7 @@
       </p:sp>
       <p:sp>
         <p:nvSpPr>
-          <p:cNvPr id="24" name="s14_txt_282"/>
+          <p:cNvPr id="24" name="s15_txt_308"/>
           <p:cNvSpPr txBox="1"/>
           <p:nvPr/>
         </p:nvSpPr>
@@ -27454,7 +28662,7 @@
       </p:sp>
       <p:sp>
         <p:nvSpPr>
-          <p:cNvPr id="25" name="s14_shp_283"/>
+          <p:cNvPr id="25" name="s15_shp_309"/>
           <p:cNvSpPr/>
           <p:nvPr/>
         </p:nvSpPr>
@@ -27483,7 +28691,7 @@
       </p:sp>
       <p:sp>
         <p:nvSpPr>
-          <p:cNvPr id="26" name="s14_shp_284"/>
+          <p:cNvPr id="26" name="s15_shp_310"/>
           <p:cNvSpPr/>
           <p:nvPr/>
         </p:nvSpPr>
@@ -27512,7 +28720,7 @@
       </p:sp>
       <p:sp>
         <p:nvSpPr>
-          <p:cNvPr id="27" name="s14_txt_285"/>
+          <p:cNvPr id="27" name="s15_txt_311"/>
           <p:cNvSpPr txBox="1"/>
           <p:nvPr/>
         </p:nvSpPr>
@@ -27551,7 +28759,7 @@
       </p:sp>
       <p:sp>
         <p:nvSpPr>
-          <p:cNvPr id="28" name="s14_txt_286"/>
+          <p:cNvPr id="28" name="s15_txt_312"/>
           <p:cNvSpPr txBox="1"/>
           <p:nvPr/>
         </p:nvSpPr>
@@ -28482,9 +29690,9 @@
 </p:sld>
 </file>
 
-<file path=ppt/slides/slide15.xml><?xml version="1.0" encoding="utf-8"?>
+<file path=ppt/slides/slide16.xml><?xml version="1.0" encoding="utf-8"?>
 <p:sld xmlns:a="http://schemas.openxmlformats.org/drawingml/2006/main" xmlns:r="http://schemas.openxmlformats.org/officeDocument/2006/relationships" xmlns:p="http://schemas.openxmlformats.org/presentationml/2006/main">
-  <p:cSld name="Slide 15">
+  <p:cSld name="Slide 16">
     <p:bg>
       <p:bgPr>
         <a:solidFill>
@@ -28601,7 +29809,7 @@
       </p:sp>
       <p:sp>
         <p:nvSpPr>
-          <p:cNvPr id="5" name="s15_txt_287"/>
+          <p:cNvPr id="5" name="s16_txt_313"/>
           <p:cNvSpPr txBox="1"/>
           <p:nvPr/>
         </p:nvSpPr>
@@ -28640,7 +29848,7 @@
       </p:sp>
       <p:sp>
         <p:nvSpPr>
-          <p:cNvPr id="6" name="s15_txt_288"/>
+          <p:cNvPr id="6" name="s16_txt_314"/>
           <p:cNvSpPr txBox="1"/>
           <p:nvPr/>
         </p:nvSpPr>
@@ -28679,7 +29887,7 @@
       </p:sp>
       <p:sp>
         <p:nvSpPr>
-          <p:cNvPr id="7" name="s15_shp_289"/>
+          <p:cNvPr id="7" name="s16_shp_315"/>
           <p:cNvSpPr/>
           <p:nvPr/>
         </p:nvSpPr>
@@ -28708,7 +29916,7 @@
       </p:sp>
       <p:sp>
         <p:nvSpPr>
-          <p:cNvPr id="8" name="s15_shp_290"/>
+          <p:cNvPr id="8" name="s16_shp_316"/>
           <p:cNvSpPr/>
           <p:nvPr/>
         </p:nvSpPr>
@@ -28737,7 +29945,7 @@
       </p:sp>
       <p:graphicFrame>
         <p:nvGraphicFramePr>
-          <p:cNvPr id="9" name="s15_chart_291" descr=""/>
+          <p:cNvPr id="9" name="s16_chart_317" descr=""/>
           <p:cNvGraphicFramePr/>
           <p:nvPr/>
         </p:nvGraphicFramePr>
@@ -28753,7 +29961,7 @@
       </p:graphicFrame>
       <p:sp>
         <p:nvSpPr>
-          <p:cNvPr id="10" name="s15_shp_292"/>
+          <p:cNvPr id="10" name="s16_shp_318"/>
           <p:cNvSpPr/>
           <p:nvPr/>
         </p:nvSpPr>
@@ -28782,7 +29990,7 @@
       </p:sp>
       <p:sp>
         <p:nvSpPr>
-          <p:cNvPr id="11" name="s15_shp_293"/>
+          <p:cNvPr id="11" name="s16_shp_319"/>
           <p:cNvSpPr/>
           <p:nvPr/>
         </p:nvSpPr>
@@ -28811,7 +30019,7 @@
       </p:sp>
       <p:sp>
         <p:nvSpPr>
-          <p:cNvPr id="12" name="s15_txt_294"/>
+          <p:cNvPr id="12" name="s16_txt_320"/>
           <p:cNvSpPr txBox="1"/>
           <p:nvPr/>
         </p:nvSpPr>
@@ -28850,7 +30058,7 @@
       </p:sp>
       <p:sp>
         <p:nvSpPr>
-          <p:cNvPr id="13" name="s15_txt_295"/>
+          <p:cNvPr id="13" name="s16_txt_321"/>
           <p:cNvSpPr txBox="1"/>
           <p:nvPr/>
         </p:nvSpPr>
@@ -28889,7 +30097,7 @@
       </p:sp>
       <p:sp>
         <p:nvSpPr>
-          <p:cNvPr id="14" name="s15_shp_296"/>
+          <p:cNvPr id="14" name="s16_shp_322"/>
           <p:cNvSpPr/>
           <p:nvPr/>
         </p:nvSpPr>
@@ -28918,7 +30126,7 @@
       </p:sp>
       <p:sp>
         <p:nvSpPr>
-          <p:cNvPr id="15" name="s15_shp_297"/>
+          <p:cNvPr id="15" name="s16_shp_323"/>
           <p:cNvSpPr/>
           <p:nvPr/>
         </p:nvSpPr>
@@ -28947,7 +30155,7 @@
       </p:sp>
       <p:sp>
         <p:nvSpPr>
-          <p:cNvPr id="16" name="s15_txt_298"/>
+          <p:cNvPr id="16" name="s16_txt_324"/>
           <p:cNvSpPr txBox="1"/>
           <p:nvPr/>
         </p:nvSpPr>
@@ -28986,7 +30194,7 @@
       </p:sp>
       <p:sp>
         <p:nvSpPr>
-          <p:cNvPr id="17" name="s15_txt_299"/>
+          <p:cNvPr id="17" name="s16_txt_325"/>
           <p:cNvSpPr txBox="1"/>
           <p:nvPr/>
         </p:nvSpPr>
@@ -29512,9 +30720,9 @@
 </p:sld>
 </file>
 
-<file path=ppt/slides/slide16.xml><?xml version="1.0" encoding="utf-8"?>
+<file path=ppt/slides/slide17.xml><?xml version="1.0" encoding="utf-8"?>
 <p:sld xmlns:a="http://schemas.openxmlformats.org/drawingml/2006/main" xmlns:r="http://schemas.openxmlformats.org/officeDocument/2006/relationships" xmlns:p="http://schemas.openxmlformats.org/presentationml/2006/main">
-  <p:cSld name="Slide 16">
+  <p:cSld name="Slide 17">
     <p:bg>
       <p:bgPr>
         <a:solidFill>
@@ -29631,7 +30839,7 @@
       </p:sp>
       <p:sp>
         <p:nvSpPr>
-          <p:cNvPr id="5" name="s16_txt_300"/>
+          <p:cNvPr id="5" name="s17_txt_326"/>
           <p:cNvSpPr txBox="1"/>
           <p:nvPr/>
         </p:nvSpPr>
@@ -29670,7 +30878,7 @@
       </p:sp>
       <p:sp>
         <p:nvSpPr>
-          <p:cNvPr id="6" name="s16_shp_301"/>
+          <p:cNvPr id="6" name="s17_shp_327"/>
           <p:cNvSpPr/>
           <p:nvPr/>
         </p:nvSpPr>
@@ -29699,7 +30907,7 @@
       </p:sp>
       <p:sp>
         <p:nvSpPr>
-          <p:cNvPr id="7" name="s16_shp_302"/>
+          <p:cNvPr id="7" name="s17_shp_328"/>
           <p:cNvSpPr/>
           <p:nvPr/>
         </p:nvSpPr>
@@ -29728,7 +30936,7 @@
       </p:sp>
       <p:sp>
         <p:nvSpPr>
-          <p:cNvPr id="8" name="s16_shp_303"/>
+          <p:cNvPr id="8" name="s17_shp_329"/>
           <p:cNvSpPr/>
           <p:nvPr/>
         </p:nvSpPr>
@@ -29755,7 +30963,7 @@
       </p:sp>
       <p:sp>
         <p:nvSpPr>
-          <p:cNvPr id="9" name="s16_shp_304"/>
+          <p:cNvPr id="9" name="s17_shp_330"/>
           <p:cNvSpPr/>
           <p:nvPr/>
         </p:nvSpPr>
@@ -29782,7 +30990,7 @@
       </p:sp>
       <p:sp>
         <p:nvSpPr>
-          <p:cNvPr id="10" name="s16_shp_305"/>
+          <p:cNvPr id="10" name="s17_shp_331"/>
           <p:cNvSpPr/>
           <p:nvPr/>
         </p:nvSpPr>
@@ -29802,7 +31010,7 @@
       </p:sp>
       <p:sp>
         <p:nvSpPr>
-          <p:cNvPr id="11" name="s16_shp_306"/>
+          <p:cNvPr id="11" name="s17_shp_332"/>
           <p:cNvSpPr/>
           <p:nvPr/>
         </p:nvSpPr>
@@ -29822,7 +31030,7 @@
       </p:sp>
       <p:sp>
         <p:nvSpPr>
-          <p:cNvPr id="12" name="s16_txt_307"/>
+          <p:cNvPr id="12" name="s17_txt_333"/>
           <p:cNvSpPr txBox="1"/>
           <p:nvPr/>
         </p:nvSpPr>
@@ -29861,7 +31069,7 @@
       </p:sp>
       <p:sp>
         <p:nvSpPr>
-          <p:cNvPr id="13" name="s16_txt_308"/>
+          <p:cNvPr id="13" name="s17_txt_334"/>
           <p:cNvSpPr txBox="1"/>
           <p:nvPr/>
         </p:nvSpPr>
@@ -29900,7 +31108,7 @@
       </p:sp>
       <p:sp>
         <p:nvSpPr>
-          <p:cNvPr id="14" name="s16_txt_309"/>
+          <p:cNvPr id="14" name="s17_txt_335"/>
           <p:cNvSpPr txBox="1"/>
           <p:nvPr/>
         </p:nvSpPr>
@@ -29939,7 +31147,7 @@
       </p:sp>
       <p:sp>
         <p:nvSpPr>
-          <p:cNvPr id="15" name="s16_shp_310"/>
+          <p:cNvPr id="15" name="s17_shp_336"/>
           <p:cNvSpPr/>
           <p:nvPr/>
         </p:nvSpPr>
@@ -29968,7 +31176,7 @@
       </p:sp>
       <p:sp>
         <p:nvSpPr>
-          <p:cNvPr id="16" name="s16_shp_311"/>
+          <p:cNvPr id="16" name="s17_shp_337"/>
           <p:cNvSpPr/>
           <p:nvPr/>
         </p:nvSpPr>
@@ -29997,7 +31205,7 @@
       </p:sp>
       <p:sp>
         <p:nvSpPr>
-          <p:cNvPr id="17" name="s16_shp_312"/>
+          <p:cNvPr id="17" name="s17_shp_338"/>
           <p:cNvSpPr/>
           <p:nvPr/>
         </p:nvSpPr>
@@ -30024,7 +31232,7 @@
       </p:sp>
       <p:sp>
         <p:nvSpPr>
-          <p:cNvPr id="18" name="s16_shp_313"/>
+          <p:cNvPr id="18" name="s17_shp_339"/>
           <p:cNvSpPr/>
           <p:nvPr/>
         </p:nvSpPr>
@@ -30051,7 +31259,7 @@
       </p:sp>
       <p:sp>
         <p:nvSpPr>
-          <p:cNvPr id="19" name="s16_shp_314"/>
+          <p:cNvPr id="19" name="s17_shp_340"/>
           <p:cNvSpPr/>
           <p:nvPr/>
         </p:nvSpPr>
@@ -30071,7 +31279,7 @@
       </p:sp>
       <p:sp>
         <p:nvSpPr>
-          <p:cNvPr id="20" name="s16_txt_315"/>
+          <p:cNvPr id="20" name="s17_txt_341"/>
           <p:cNvSpPr txBox="1"/>
           <p:nvPr/>
         </p:nvSpPr>
@@ -30110,7 +31318,7 @@
       </p:sp>
       <p:sp>
         <p:nvSpPr>
-          <p:cNvPr id="21" name="s16_txt_316"/>
+          <p:cNvPr id="21" name="s17_txt_342"/>
           <p:cNvSpPr txBox="1"/>
           <p:nvPr/>
         </p:nvSpPr>
@@ -30149,7 +31357,7 @@
       </p:sp>
       <p:sp>
         <p:nvSpPr>
-          <p:cNvPr id="22" name="s16_txt_317"/>
+          <p:cNvPr id="22" name="s17_txt_343"/>
           <p:cNvSpPr txBox="1"/>
           <p:nvPr/>
         </p:nvSpPr>
@@ -30188,7 +31396,7 @@
       </p:sp>
       <p:sp>
         <p:nvSpPr>
-          <p:cNvPr id="23" name="s16_shp_318"/>
+          <p:cNvPr id="23" name="s17_shp_344"/>
           <p:cNvSpPr/>
           <p:nvPr/>
         </p:nvSpPr>
@@ -30217,7 +31425,7 @@
       </p:sp>
       <p:sp>
         <p:nvSpPr>
-          <p:cNvPr id="24" name="s16_shp_319"/>
+          <p:cNvPr id="24" name="s17_shp_345"/>
           <p:cNvSpPr/>
           <p:nvPr/>
         </p:nvSpPr>
@@ -30246,7 +31454,7 @@
       </p:sp>
       <p:sp>
         <p:nvSpPr>
-          <p:cNvPr id="25" name="s16_shp_320"/>
+          <p:cNvPr id="25" name="s17_shp_346"/>
           <p:cNvSpPr/>
           <p:nvPr/>
         </p:nvSpPr>
@@ -30273,7 +31481,7 @@
       </p:sp>
       <p:sp>
         <p:nvSpPr>
-          <p:cNvPr id="26" name="s16_shp_321"/>
+          <p:cNvPr id="26" name="s17_shp_347"/>
           <p:cNvSpPr/>
           <p:nvPr/>
         </p:nvSpPr>
@@ -30300,7 +31508,7 @@
       </p:sp>
       <p:sp>
         <p:nvSpPr>
-          <p:cNvPr id="27" name="s16_shp_322"/>
+          <p:cNvPr id="27" name="s17_shp_348"/>
           <p:cNvSpPr/>
           <p:nvPr/>
         </p:nvSpPr>
@@ -30320,7 +31528,7 @@
       </p:sp>
       <p:sp>
         <p:nvSpPr>
-          <p:cNvPr id="28" name="s16_txt_323"/>
+          <p:cNvPr id="28" name="s17_txt_349"/>
           <p:cNvSpPr txBox="1"/>
           <p:nvPr/>
         </p:nvSpPr>
@@ -30359,7 +31567,7 @@
       </p:sp>
       <p:sp>
         <p:nvSpPr>
-          <p:cNvPr id="29" name="s16_txt_324"/>
+          <p:cNvPr id="29" name="s17_txt_350"/>
           <p:cNvSpPr txBox="1"/>
           <p:nvPr/>
         </p:nvSpPr>
@@ -30398,7 +31606,7 @@
       </p:sp>
       <p:sp>
         <p:nvSpPr>
-          <p:cNvPr id="30" name="s16_txt_325"/>
+          <p:cNvPr id="30" name="s17_txt_351"/>
           <p:cNvSpPr txBox="1"/>
           <p:nvPr/>
         </p:nvSpPr>
@@ -30437,7 +31645,7 @@
       </p:sp>
       <p:sp>
         <p:nvSpPr>
-          <p:cNvPr id="31" name="s16_shp_326"/>
+          <p:cNvPr id="31" name="s17_shp_352"/>
           <p:cNvSpPr/>
           <p:nvPr/>
         </p:nvSpPr>
@@ -30466,7 +31674,7 @@
       </p:sp>
       <p:sp>
         <p:nvSpPr>
-          <p:cNvPr id="32" name="s16_txt_327"/>
+          <p:cNvPr id="32" name="s17_txt_353"/>
           <p:cNvSpPr txBox="1"/>
           <p:nvPr/>
         </p:nvSpPr>
@@ -31575,9 +32783,9 @@
 </p:sld>
 </file>
 
-<file path=ppt/slides/slide17.xml><?xml version="1.0" encoding="utf-8"?>
+<file path=ppt/slides/slide18.xml><?xml version="1.0" encoding="utf-8"?>
 <p:sld xmlns:a="http://schemas.openxmlformats.org/drawingml/2006/main" xmlns:r="http://schemas.openxmlformats.org/officeDocument/2006/relationships" xmlns:p="http://schemas.openxmlformats.org/presentationml/2006/main">
-  <p:cSld name="Slide 17">
+  <p:cSld name="Slide 18">
     <p:bg>
       <p:bgPr>
         <a:solidFill>
@@ -31694,7 +32902,7 @@
       </p:sp>
       <p:sp>
         <p:nvSpPr>
-          <p:cNvPr id="5" name="s17_txt_328"/>
+          <p:cNvPr id="5" name="s18_txt_354"/>
           <p:cNvSpPr txBox="1"/>
           <p:nvPr/>
         </p:nvSpPr>
@@ -31733,7 +32941,7 @@
       </p:sp>
       <p:sp>
         <p:nvSpPr>
-          <p:cNvPr id="6" name="s17_txt_329"/>
+          <p:cNvPr id="6" name="s18_txt_355"/>
           <p:cNvSpPr txBox="1"/>
           <p:nvPr/>
         </p:nvSpPr>
@@ -31772,7 +32980,7 @@
       </p:sp>
       <p:sp>
         <p:nvSpPr>
-          <p:cNvPr id="7" name="s17_shp_330"/>
+          <p:cNvPr id="7" name="s18_shp_356"/>
           <p:cNvSpPr/>
           <p:nvPr/>
         </p:nvSpPr>
@@ -31801,7 +33009,7 @@
       </p:sp>
       <p:sp>
         <p:nvSpPr>
-          <p:cNvPr id="8" name="s17_shp_331"/>
+          <p:cNvPr id="8" name="s18_shp_357"/>
           <p:cNvSpPr/>
           <p:nvPr/>
         </p:nvSpPr>
@@ -31830,7 +33038,7 @@
       </p:sp>
       <p:pic>
         <p:nvPicPr>
-          <p:cNvPr id="9" name="s17_img_332" descr="/Users/mukhammadzahidnematzhanov/claude code/so-ups-gen-consump/deck/img/app.jpg">    </p:cNvPr>
+          <p:cNvPr id="9" name="s18_img_358" descr="/Users/mukhammadzahidnematzhanov/claude code/so-ups-gen-consump/deck/img/app.jpg">    </p:cNvPr>
           <p:cNvPicPr>
             <a:picLocks noChangeAspect="1"/>
           </p:cNvPicPr>
@@ -31854,7 +33062,7 @@
       </p:pic>
       <p:sp>
         <p:nvSpPr>
-          <p:cNvPr id="10" name="s17_shp_333"/>
+          <p:cNvPr id="10" name="s18_shp_359"/>
           <p:cNvSpPr/>
           <p:nvPr/>
         </p:nvSpPr>
@@ -31883,7 +33091,7 @@
       </p:sp>
       <p:sp>
         <p:nvSpPr>
-          <p:cNvPr id="11" name="s17_shp_334"/>
+          <p:cNvPr id="11" name="s18_shp_360"/>
           <p:cNvSpPr/>
           <p:nvPr/>
         </p:nvSpPr>
@@ -31912,7 +33120,7 @@
       </p:sp>
       <p:sp>
         <p:nvSpPr>
-          <p:cNvPr id="12" name="s17_txt_335"/>
+          <p:cNvPr id="12" name="s18_txt_361"/>
           <p:cNvSpPr txBox="1"/>
           <p:nvPr/>
         </p:nvSpPr>
@@ -31951,7 +33159,7 @@
       </p:sp>
       <p:sp>
         <p:nvSpPr>
-          <p:cNvPr id="13" name="s17_txt_336"/>
+          <p:cNvPr id="13" name="s18_txt_362"/>
           <p:cNvSpPr txBox="1"/>
           <p:nvPr/>
         </p:nvSpPr>
@@ -31990,7 +33198,7 @@
       </p:sp>
       <p:sp>
         <p:nvSpPr>
-          <p:cNvPr id="14" name="s17_shp_337"/>
+          <p:cNvPr id="14" name="s18_shp_363"/>
           <p:cNvSpPr/>
           <p:nvPr/>
         </p:nvSpPr>
@@ -32019,7 +33227,7 @@
       </p:sp>
       <p:sp>
         <p:nvSpPr>
-          <p:cNvPr id="15" name="s17_shp_338"/>
+          <p:cNvPr id="15" name="s18_shp_364"/>
           <p:cNvSpPr/>
           <p:nvPr/>
         </p:nvSpPr>
@@ -32048,7 +33256,7 @@
       </p:sp>
       <p:sp>
         <p:nvSpPr>
-          <p:cNvPr id="16" name="s17_txt_339"/>
+          <p:cNvPr id="16" name="s18_txt_365"/>
           <p:cNvSpPr txBox="1"/>
           <p:nvPr/>
         </p:nvSpPr>
@@ -32087,7 +33295,7 @@
       </p:sp>
       <p:sp>
         <p:nvSpPr>
-          <p:cNvPr id="17" name="s17_txt_340"/>
+          <p:cNvPr id="17" name="s18_txt_366"/>
           <p:cNvSpPr txBox="1"/>
           <p:nvPr/>
         </p:nvSpPr>
@@ -32126,7 +33334,7 @@
       </p:sp>
       <p:sp>
         <p:nvSpPr>
-          <p:cNvPr id="18" name="s17_shp_341"/>
+          <p:cNvPr id="18" name="s18_shp_367"/>
           <p:cNvSpPr/>
           <p:nvPr/>
         </p:nvSpPr>
@@ -32155,7 +33363,7 @@
       </p:sp>
       <p:sp>
         <p:nvSpPr>
-          <p:cNvPr id="19" name="s17_shp_342"/>
+          <p:cNvPr id="19" name="s18_shp_368"/>
           <p:cNvSpPr/>
           <p:nvPr/>
         </p:nvSpPr>
@@ -32184,7 +33392,7 @@
       </p:sp>
       <p:sp>
         <p:nvSpPr>
-          <p:cNvPr id="20" name="s17_txt_343"/>
+          <p:cNvPr id="20" name="s18_txt_369"/>
           <p:cNvSpPr txBox="1"/>
           <p:nvPr/>
         </p:nvSpPr>
@@ -32223,7 +33431,7 @@
       </p:sp>
       <p:sp>
         <p:nvSpPr>
-          <p:cNvPr id="21" name="s17_txt_344"/>
+          <p:cNvPr id="21" name="s18_txt_370"/>
           <p:cNvSpPr txBox="1"/>
           <p:nvPr/>
         </p:nvSpPr>
@@ -32899,9 +34107,9 @@
 </p:sld>
 </file>
 
-<file path=ppt/slides/slide18.xml><?xml version="1.0" encoding="utf-8"?>
+<file path=ppt/slides/slide19.xml><?xml version="1.0" encoding="utf-8"?>
 <p:sld xmlns:a="http://schemas.openxmlformats.org/drawingml/2006/main" xmlns:r="http://schemas.openxmlformats.org/officeDocument/2006/relationships" xmlns:p="http://schemas.openxmlformats.org/presentationml/2006/main">
-  <p:cSld name="Slide 18">
+  <p:cSld name="Slide 19">
     <p:bg>
       <p:bgPr>
         <a:solidFill>
@@ -33045,7 +34253,7 @@
       </p:sp>
       <p:sp>
         <p:nvSpPr>
-          <p:cNvPr id="6" name="s18_txt_345"/>
+          <p:cNvPr id="6" name="s19_txt_371"/>
           <p:cNvSpPr txBox="1"/>
           <p:nvPr/>
         </p:nvSpPr>
@@ -33084,7 +34292,7 @@
       </p:sp>
       <p:sp>
         <p:nvSpPr>
-          <p:cNvPr id="7" name="s18_txt_346"/>
+          <p:cNvPr id="7" name="s19_txt_372"/>
           <p:cNvSpPr txBox="1"/>
           <p:nvPr/>
         </p:nvSpPr>
@@ -33123,7 +34331,7 @@
       </p:sp>
       <p:sp>
         <p:nvSpPr>
-          <p:cNvPr id="8" name="s18_shp_347"/>
+          <p:cNvPr id="8" name="s19_shp_373"/>
           <p:cNvSpPr/>
           <p:nvPr/>
         </p:nvSpPr>
@@ -33152,7 +34360,7 @@
       </p:sp>
       <p:sp>
         <p:nvSpPr>
-          <p:cNvPr id="9" name="s18_shp_348"/>
+          <p:cNvPr id="9" name="s19_shp_374"/>
           <p:cNvSpPr/>
           <p:nvPr/>
         </p:nvSpPr>
@@ -33181,7 +34389,7 @@
       </p:sp>
       <p:sp>
         <p:nvSpPr>
-          <p:cNvPr id="10" name="s18_txt_349"/>
+          <p:cNvPr id="10" name="s19_txt_375"/>
           <p:cNvSpPr txBox="1"/>
           <p:nvPr/>
         </p:nvSpPr>
@@ -33220,7 +34428,7 @@
       </p:sp>
       <p:sp>
         <p:nvSpPr>
-          <p:cNvPr id="11" name="s18_txt_350"/>
+          <p:cNvPr id="11" name="s19_txt_376"/>
           <p:cNvSpPr txBox="1"/>
           <p:nvPr/>
         </p:nvSpPr>
@@ -33259,7 +34467,7 @@
       </p:sp>
       <p:sp>
         <p:nvSpPr>
-          <p:cNvPr id="12" name="s18_shp_351"/>
+          <p:cNvPr id="12" name="s19_shp_377"/>
           <p:cNvSpPr/>
           <p:nvPr/>
         </p:nvSpPr>
@@ -33288,7 +34496,7 @@
       </p:sp>
       <p:sp>
         <p:nvSpPr>
-          <p:cNvPr id="13" name="s18_shp_352"/>
+          <p:cNvPr id="13" name="s19_shp_378"/>
           <p:cNvSpPr/>
           <p:nvPr/>
         </p:nvSpPr>
@@ -33317,7 +34525,7 @@
       </p:sp>
       <p:sp>
         <p:nvSpPr>
-          <p:cNvPr id="14" name="s18_txt_353"/>
+          <p:cNvPr id="14" name="s19_txt_379"/>
           <p:cNvSpPr txBox="1"/>
           <p:nvPr/>
         </p:nvSpPr>
@@ -33356,7 +34564,7 @@
       </p:sp>
       <p:sp>
         <p:nvSpPr>
-          <p:cNvPr id="15" name="s18_txt_354"/>
+          <p:cNvPr id="15" name="s19_txt_380"/>
           <p:cNvSpPr txBox="1"/>
           <p:nvPr/>
         </p:nvSpPr>
@@ -33395,7 +34603,7 @@
       </p:sp>
       <p:sp>
         <p:nvSpPr>
-          <p:cNvPr id="16" name="s18_shp_355"/>
+          <p:cNvPr id="16" name="s19_shp_381"/>
           <p:cNvSpPr/>
           <p:nvPr/>
         </p:nvSpPr>
@@ -33424,7 +34632,7 @@
       </p:sp>
       <p:sp>
         <p:nvSpPr>
-          <p:cNvPr id="17" name="s18_shp_356"/>
+          <p:cNvPr id="17" name="s19_shp_382"/>
           <p:cNvSpPr/>
           <p:nvPr/>
         </p:nvSpPr>
@@ -33453,7 +34661,7 @@
       </p:sp>
       <p:sp>
         <p:nvSpPr>
-          <p:cNvPr id="18" name="s18_txt_357"/>
+          <p:cNvPr id="18" name="s19_txt_383"/>
           <p:cNvSpPr txBox="1"/>
           <p:nvPr/>
         </p:nvSpPr>
@@ -33492,7 +34700,7 @@
       </p:sp>
       <p:sp>
         <p:nvSpPr>
-          <p:cNvPr id="19" name="s18_txt_358"/>
+          <p:cNvPr id="19" name="s19_txt_384"/>
           <p:cNvSpPr txBox="1"/>
           <p:nvPr/>
         </p:nvSpPr>
@@ -33531,7 +34739,7 @@
       </p:sp>
       <p:sp>
         <p:nvSpPr>
-          <p:cNvPr id="20" name="s18_shp_359"/>
+          <p:cNvPr id="20" name="s19_shp_385"/>
           <p:cNvSpPr/>
           <p:nvPr/>
         </p:nvSpPr>
@@ -33560,7 +34768,7 @@
       </p:sp>
       <p:sp>
         <p:nvSpPr>
-          <p:cNvPr id="21" name="s18_shp_360"/>
+          <p:cNvPr id="21" name="s19_shp_386"/>
           <p:cNvSpPr/>
           <p:nvPr/>
         </p:nvSpPr>
@@ -33589,7 +34797,7 @@
       </p:sp>
       <p:sp>
         <p:nvSpPr>
-          <p:cNvPr id="22" name="s18_txt_361"/>
+          <p:cNvPr id="22" name="s19_txt_387"/>
           <p:cNvSpPr txBox="1"/>
           <p:nvPr/>
         </p:nvSpPr>
@@ -33628,7 +34836,7 @@
       </p:sp>
       <p:sp>
         <p:nvSpPr>
-          <p:cNvPr id="23" name="s18_txt_362"/>
+          <p:cNvPr id="23" name="s19_txt_388"/>
           <p:cNvSpPr txBox="1"/>
           <p:nvPr/>
         </p:nvSpPr>
@@ -34373,6 +35581,2583 @@
         </p:nvSpPr>
         <p:spPr>
           <a:xfrm>
+            <a:off x="502920" y="384048"/>
+            <a:ext cx="713232" cy="713232"/>
+          </a:xfrm>
+          <a:prstGeom prst="ellipse">
+            <a:avLst/>
+          </a:prstGeom>
+          <a:solidFill>
+            <a:srgbClr val="E6EBF1"/>
+          </a:solidFill>
+          <a:ln/>
+          <a:effectLst>
+            <a:outerShdw sx="100000" sy="100000" kx="0" ky="0" algn="bl" rotWithShape="0" blurRad="83820" dist="38100" dir="13500000">
+              <a:srgbClr val="FFFFFF">
+                <a:alpha val="95000"/>
+              </a:srgbClr>
+            </a:outerShdw>
+          </a:effectLst>
+        </p:spPr>
+      </p:sp>
+      <p:sp>
+        <p:nvSpPr>
+          <p:cNvPr id="3" name="!!orbD"/>
+          <p:cNvSpPr/>
+          <p:nvPr/>
+        </p:nvSpPr>
+        <p:spPr>
+          <a:xfrm>
+            <a:off x="502920" y="384048"/>
+            <a:ext cx="713232" cy="713232"/>
+          </a:xfrm>
+          <a:prstGeom prst="ellipse">
+            <a:avLst/>
+          </a:prstGeom>
+          <a:solidFill>
+            <a:srgbClr val="E6EBF1"/>
+          </a:solidFill>
+          <a:ln/>
+          <a:effectLst>
+            <a:outerShdw sx="100000" sy="100000" kx="0" ky="0" algn="bl" rotWithShape="0" blurRad="83820" dist="38100" dir="2700000">
+              <a:srgbClr val="A3B1C6">
+                <a:alpha val="60000"/>
+              </a:srgbClr>
+            </a:outerShdw>
+          </a:effectLst>
+        </p:spPr>
+      </p:sp>
+      <p:sp>
+        <p:nvSpPr>
+          <p:cNvPr id="4" name="!!num"/>
+          <p:cNvSpPr txBox="1"/>
+          <p:nvPr/>
+        </p:nvSpPr>
+        <p:spPr>
+          <a:xfrm>
+            <a:off x="502920" y="384048"/>
+            <a:ext cx="713232" cy="713232"/>
+          </a:xfrm>
+          <a:prstGeom prst="rect">
+            <a:avLst/>
+          </a:prstGeom>
+          <a:noFill/>
+          <a:ln/>
+        </p:spPr>
+        <p:txBody>
+          <a:bodyPr wrap="square" lIns="0" tIns="0" rIns="0" bIns="0" rtlCol="0" anchor="ctr"/>
+          <a:lstStyle/>
+          <a:p>
+            <a:pPr algn="ctr" indent="0" marL="0">
+              <a:buNone/>
+            </a:pPr>
+            <a:r>
+              <a:rPr lang="en-US" sz="2000" b="1" dirty="0">
+                <a:solidFill>
+                  <a:srgbClr val="2563C9"/>
+                </a:solidFill>
+                <a:latin typeface="Calibri" pitchFamily="34" charset="0"/>
+                <a:ea typeface="Calibri" pitchFamily="34" charset="-122"/>
+                <a:cs typeface="Calibri" pitchFamily="34" charset="-120"/>
+              </a:rPr>
+              <a:t>00</a:t>
+            </a:r>
+            <a:endParaRPr lang="en-US" sz="2000" dirty="0"/>
+          </a:p>
+        </p:txBody>
+      </p:sp>
+      <p:sp>
+        <p:nvSpPr>
+          <p:cNvPr id="5" name="s2_txt_10"/>
+          <p:cNvSpPr txBox="1"/>
+          <p:nvPr/>
+        </p:nvSpPr>
+        <p:spPr>
+          <a:xfrm>
+            <a:off x="1463040" y="384048"/>
+            <a:ext cx="10149840" cy="713232"/>
+          </a:xfrm>
+          <a:prstGeom prst="rect">
+            <a:avLst/>
+          </a:prstGeom>
+          <a:noFill/>
+          <a:ln/>
+        </p:spPr>
+        <p:txBody>
+          <a:bodyPr wrap="square" lIns="0" tIns="0" rIns="0" bIns="0" rtlCol="0" anchor="ctr"/>
+          <a:lstStyle/>
+          <a:p>
+            <a:pPr indent="0" marL="0">
+              <a:buNone/>
+            </a:pPr>
+            <a:r>
+              <a:rPr lang="en-US" sz="3200" b="1" dirty="0">
+                <a:solidFill>
+                  <a:srgbClr val="2D3748"/>
+                </a:solidFill>
+                <a:latin typeface="Calibri" pitchFamily="34" charset="0"/>
+                <a:ea typeface="Calibri" pitchFamily="34" charset="-122"/>
+                <a:cs typeface="Calibri" pitchFamily="34" charset="-120"/>
+              </a:rPr>
+              <a:t>История: чайники после матча</a:t>
+            </a:r>
+            <a:endParaRPr lang="en-US" sz="3200" dirty="0"/>
+          </a:p>
+        </p:txBody>
+      </p:sp>
+      <p:sp>
+        <p:nvSpPr>
+          <p:cNvPr id="6" name="s2_txt_11"/>
+          <p:cNvSpPr txBox="1"/>
+          <p:nvPr/>
+        </p:nvSpPr>
+        <p:spPr>
+          <a:xfrm>
+            <a:off x="1463040" y="1060704"/>
+            <a:ext cx="10149840" cy="329184"/>
+          </a:xfrm>
+          <a:prstGeom prst="rect">
+            <a:avLst/>
+          </a:prstGeom>
+          <a:noFill/>
+          <a:ln/>
+        </p:spPr>
+        <p:txBody>
+          <a:bodyPr wrap="square" lIns="0" tIns="0" rIns="0" bIns="0" rtlCol="0" anchor="ctr"/>
+          <a:lstStyle/>
+          <a:p>
+            <a:pPr indent="0" marL="0">
+              <a:buNone/>
+            </a:pPr>
+            <a:r>
+              <a:rPr lang="en-US" sz="1500" dirty="0">
+                <a:solidFill>
+                  <a:srgbClr val="66768C"/>
+                </a:solidFill>
+                <a:latin typeface="Calibri" pitchFamily="34" charset="0"/>
+                <a:ea typeface="Calibri" pitchFamily="34" charset="-122"/>
+                <a:cs typeface="Calibri" pitchFamily="34" charset="-120"/>
+              </a:rPr>
+              <a:t>Почему вопрос «сколько электроэнергии понадобится в этот час?» так важен</a:t>
+            </a:r>
+            <a:endParaRPr lang="en-US" sz="1500" dirty="0"/>
+          </a:p>
+        </p:txBody>
+      </p:sp>
+      <p:sp>
+        <p:nvSpPr>
+          <p:cNvPr id="7" name="s2_shp_12"/>
+          <p:cNvSpPr/>
+          <p:nvPr/>
+        </p:nvSpPr>
+        <p:spPr>
+          <a:xfrm>
+            <a:off x="548640" y="1600200"/>
+            <a:ext cx="4114800" cy="4572000"/>
+          </a:xfrm>
+          <a:prstGeom prst="roundRect">
+            <a:avLst>
+              <a:gd name="adj" fmla="val 4889"/>
+            </a:avLst>
+          </a:prstGeom>
+          <a:solidFill>
+            <a:srgbClr val="2563C9"/>
+          </a:solidFill>
+          <a:ln/>
+          <a:effectLst>
+            <a:outerShdw sx="100000" sy="100000" kx="0" ky="0" algn="bl" rotWithShape="0" blurRad="139700" dist="63500" dir="13500000">
+              <a:srgbClr val="FFFFFF">
+                <a:alpha val="95000"/>
+              </a:srgbClr>
+            </a:outerShdw>
+          </a:effectLst>
+        </p:spPr>
+      </p:sp>
+      <p:sp>
+        <p:nvSpPr>
+          <p:cNvPr id="8" name="s2_shp_13"/>
+          <p:cNvSpPr/>
+          <p:nvPr/>
+        </p:nvSpPr>
+        <p:spPr>
+          <a:xfrm>
+            <a:off x="548640" y="1600200"/>
+            <a:ext cx="4114800" cy="4572000"/>
+          </a:xfrm>
+          <a:prstGeom prst="roundRect">
+            <a:avLst>
+              <a:gd name="adj" fmla="val 4889"/>
+            </a:avLst>
+          </a:prstGeom>
+          <a:solidFill>
+            <a:srgbClr val="2563C9"/>
+          </a:solidFill>
+          <a:ln/>
+          <a:effectLst>
+            <a:outerShdw sx="100000" sy="100000" kx="0" ky="0" algn="bl" rotWithShape="0" blurRad="139700" dist="63500" dir="2700000">
+              <a:srgbClr val="A3B1C6">
+                <a:alpha val="60000"/>
+              </a:srgbClr>
+            </a:outerShdw>
+          </a:effectLst>
+        </p:spPr>
+      </p:sp>
+      <p:sp>
+        <p:nvSpPr>
+          <p:cNvPr id="9" name="s2_txt_14"/>
+          <p:cNvSpPr txBox="1"/>
+          <p:nvPr/>
+        </p:nvSpPr>
+        <p:spPr>
+          <a:xfrm>
+            <a:off x="868680" y="1874520"/>
+            <a:ext cx="3474720" cy="320040"/>
+          </a:xfrm>
+          <a:prstGeom prst="rect">
+            <a:avLst/>
+          </a:prstGeom>
+          <a:noFill/>
+          <a:ln/>
+        </p:spPr>
+        <p:txBody>
+          <a:bodyPr wrap="square" lIns="0" tIns="0" rIns="0" bIns="0" rtlCol="0" anchor="ctr"/>
+          <a:lstStyle/>
+          <a:p>
+            <a:pPr indent="0" marL="0">
+              <a:buNone/>
+            </a:pPr>
+            <a:r>
+              <a:rPr lang="en-US" sz="1300" b="1" spc="200" kern="0" dirty="0">
+                <a:solidFill>
+                  <a:srgbClr val="DCE7FA"/>
+                </a:solidFill>
+                <a:latin typeface="Calibri" pitchFamily="34" charset="0"/>
+                <a:ea typeface="Calibri" pitchFamily="34" charset="-122"/>
+                <a:cs typeface="Calibri" pitchFamily="34" charset="-120"/>
+              </a:rPr>
+              <a:t>4 июля 1990</a:t>
+            </a:r>
+            <a:endParaRPr lang="en-US" sz="1300" dirty="0"/>
+          </a:p>
+        </p:txBody>
+      </p:sp>
+      <p:sp>
+        <p:nvSpPr>
+          <p:cNvPr id="10" name="s2_txt_15"/>
+          <p:cNvSpPr txBox="1"/>
+          <p:nvPr/>
+        </p:nvSpPr>
+        <p:spPr>
+          <a:xfrm>
+            <a:off x="868680" y="2286000"/>
+            <a:ext cx="3474720" cy="914400"/>
+          </a:xfrm>
+          <a:prstGeom prst="rect">
+            <a:avLst/>
+          </a:prstGeom>
+          <a:noFill/>
+          <a:ln/>
+        </p:spPr>
+        <p:txBody>
+          <a:bodyPr wrap="square" lIns="0" tIns="0" rIns="0" bIns="0" rtlCol="0" anchor="b"/>
+          <a:lstStyle/>
+          <a:p>
+            <a:pPr indent="0" marL="0">
+              <a:buNone/>
+            </a:pPr>
+            <a:r>
+              <a:rPr lang="en-US" sz="5200" b="1" dirty="0">
+                <a:solidFill>
+                  <a:srgbClr val="FFFFFF"/>
+                </a:solidFill>
+                <a:latin typeface="Calibri" pitchFamily="34" charset="0"/>
+                <a:ea typeface="Calibri" pitchFamily="34" charset="-122"/>
+                <a:cs typeface="Calibri" pitchFamily="34" charset="-120"/>
+              </a:rPr>
+              <a:t>2 800 МВт</a:t>
+            </a:r>
+            <a:endParaRPr lang="en-US" sz="5200" dirty="0"/>
+          </a:p>
+        </p:txBody>
+      </p:sp>
+      <p:sp>
+        <p:nvSpPr>
+          <p:cNvPr id="11" name="s2_txt_16"/>
+          <p:cNvSpPr txBox="1"/>
+          <p:nvPr/>
+        </p:nvSpPr>
+        <p:spPr>
+          <a:xfrm>
+            <a:off x="868680" y="3337560"/>
+            <a:ext cx="3474720" cy="1371600"/>
+          </a:xfrm>
+          <a:prstGeom prst="rect">
+            <a:avLst/>
+          </a:prstGeom>
+          <a:noFill/>
+          <a:ln/>
+        </p:spPr>
+        <p:txBody>
+          <a:bodyPr wrap="square" lIns="0" tIns="0" rIns="0" bIns="0" rtlCol="0" anchor="t"/>
+          <a:lstStyle/>
+          <a:p>
+            <a:pPr indent="0" marL="0">
+              <a:buNone/>
+            </a:pPr>
+            <a:r>
+              <a:rPr lang="en-US" sz="1450" dirty="0">
+                <a:solidFill>
+                  <a:srgbClr val="E6EEFB"/>
+                </a:solidFill>
+                <a:latin typeface="Calibri" pitchFamily="34" charset="0"/>
+                <a:ea typeface="Calibri" pitchFamily="34" charset="-122"/>
+                <a:cs typeface="Calibri" pitchFamily="34" charset="-120"/>
+              </a:rPr>
+              <a:t>скачок потребления в Великобритании за считанные минуты после серии пенальти в полуфинале чемпионата мира Англия — ФРГ</a:t>
+            </a:r>
+            <a:endParaRPr lang="en-US" sz="1450" dirty="0"/>
+          </a:p>
+        </p:txBody>
+      </p:sp>
+      <p:sp>
+        <p:nvSpPr>
+          <p:cNvPr id="12" name="s2_txt_17"/>
+          <p:cNvSpPr txBox="1"/>
+          <p:nvPr/>
+        </p:nvSpPr>
+        <p:spPr>
+          <a:xfrm>
+            <a:off x="868680" y="5029200"/>
+            <a:ext cx="3474720" cy="822960"/>
+          </a:xfrm>
+          <a:prstGeom prst="rect">
+            <a:avLst/>
+          </a:prstGeom>
+          <a:noFill/>
+          <a:ln/>
+        </p:spPr>
+        <p:txBody>
+          <a:bodyPr wrap="square" lIns="0" tIns="0" rIns="0" bIns="0" rtlCol="0" anchor="t"/>
+          <a:lstStyle/>
+          <a:p>
+            <a:pPr indent="0" marL="0">
+              <a:buNone/>
+            </a:pPr>
+            <a:r>
+              <a:rPr lang="en-US" sz="1800" b="1" dirty="0">
+                <a:solidFill>
+                  <a:srgbClr val="FFFFFF"/>
+                </a:solidFill>
+                <a:latin typeface="Calibri" pitchFamily="34" charset="0"/>
+                <a:ea typeface="Calibri" pitchFamily="34" charset="-122"/>
+                <a:cs typeface="Calibri" pitchFamily="34" charset="-120"/>
+              </a:rPr>
+              <a:t>≈ 1,2 млн включённых чайников</a:t>
+            </a:r>
+            <a:endParaRPr lang="en-US" sz="1800" dirty="0"/>
+          </a:p>
+        </p:txBody>
+      </p:sp>
+      <p:sp>
+        <p:nvSpPr>
+          <p:cNvPr id="13" name="s2_shp_18"/>
+          <p:cNvSpPr/>
+          <p:nvPr/>
+        </p:nvSpPr>
+        <p:spPr>
+          <a:xfrm>
+            <a:off x="4983480" y="1600200"/>
+            <a:ext cx="6675120" cy="1325880"/>
+          </a:xfrm>
+          <a:prstGeom prst="roundRect">
+            <a:avLst>
+              <a:gd name="adj" fmla="val 15172"/>
+            </a:avLst>
+          </a:prstGeom>
+          <a:solidFill>
+            <a:srgbClr val="E6EBF1"/>
+          </a:solidFill>
+          <a:ln/>
+          <a:effectLst>
+            <a:outerShdw sx="100000" sy="100000" kx="0" ky="0" algn="bl" rotWithShape="0" blurRad="139700" dist="63500" dir="13500000">
+              <a:srgbClr val="FFFFFF">
+                <a:alpha val="95000"/>
+              </a:srgbClr>
+            </a:outerShdw>
+          </a:effectLst>
+        </p:spPr>
+      </p:sp>
+      <p:sp>
+        <p:nvSpPr>
+          <p:cNvPr id="14" name="s2_shp_19"/>
+          <p:cNvSpPr/>
+          <p:nvPr/>
+        </p:nvSpPr>
+        <p:spPr>
+          <a:xfrm>
+            <a:off x="4983480" y="1600200"/>
+            <a:ext cx="6675120" cy="1325880"/>
+          </a:xfrm>
+          <a:prstGeom prst="roundRect">
+            <a:avLst>
+              <a:gd name="adj" fmla="val 15172"/>
+            </a:avLst>
+          </a:prstGeom>
+          <a:solidFill>
+            <a:srgbClr val="E6EBF1"/>
+          </a:solidFill>
+          <a:ln/>
+          <a:effectLst>
+            <a:outerShdw sx="100000" sy="100000" kx="0" ky="0" algn="bl" rotWithShape="0" blurRad="139700" dist="63500" dir="2700000">
+              <a:srgbClr val="A3B1C6">
+                <a:alpha val="60000"/>
+              </a:srgbClr>
+            </a:outerShdw>
+          </a:effectLst>
+        </p:spPr>
+      </p:sp>
+      <p:sp>
+        <p:nvSpPr>
+          <p:cNvPr id="15" name="s2_shp_20"/>
+          <p:cNvSpPr/>
+          <p:nvPr/>
+        </p:nvSpPr>
+        <p:spPr>
+          <a:xfrm>
+            <a:off x="5303520" y="1938528"/>
+            <a:ext cx="640080" cy="640080"/>
+          </a:xfrm>
+          <a:prstGeom prst="ellipse">
+            <a:avLst/>
+          </a:prstGeom>
+          <a:solidFill>
+            <a:srgbClr val="E6EBF1"/>
+          </a:solidFill>
+          <a:ln/>
+          <a:effectLst>
+            <a:innerShdw blurRad="88900" dist="38100" dir="2700000">
+              <a:srgbClr val="A3B1C6">
+                <a:alpha val="75000"/>
+              </a:srgbClr>
+            </a:innerShdw>
+          </a:effectLst>
+        </p:spPr>
+      </p:sp>
+      <p:sp>
+        <p:nvSpPr>
+          <p:cNvPr id="16" name="s2_txt_21"/>
+          <p:cNvSpPr txBox="1"/>
+          <p:nvPr/>
+        </p:nvSpPr>
+        <p:spPr>
+          <a:xfrm>
+            <a:off x="5303520" y="1938528"/>
+            <a:ext cx="640080" cy="640080"/>
+          </a:xfrm>
+          <a:prstGeom prst="rect">
+            <a:avLst/>
+          </a:prstGeom>
+          <a:noFill/>
+          <a:ln/>
+        </p:spPr>
+        <p:txBody>
+          <a:bodyPr wrap="square" lIns="0" tIns="0" rIns="0" bIns="0" rtlCol="0" anchor="ctr"/>
+          <a:lstStyle/>
+          <a:p>
+            <a:pPr algn="ctr" indent="0" marL="0">
+              <a:buNone/>
+            </a:pPr>
+            <a:r>
+              <a:rPr lang="en-US" sz="2200" b="1" dirty="0">
+                <a:solidFill>
+                  <a:srgbClr val="2563C9"/>
+                </a:solidFill>
+                <a:latin typeface="Calibri" pitchFamily="34" charset="0"/>
+                <a:ea typeface="Calibri" pitchFamily="34" charset="-122"/>
+                <a:cs typeface="Calibri" pitchFamily="34" charset="-120"/>
+              </a:rPr>
+              <a:t>1</a:t>
+            </a:r>
+            <a:endParaRPr lang="en-US" sz="2200" dirty="0"/>
+          </a:p>
+        </p:txBody>
+      </p:sp>
+      <p:sp>
+        <p:nvSpPr>
+          <p:cNvPr id="17" name="s2_txt_22"/>
+          <p:cNvSpPr txBox="1"/>
+          <p:nvPr/>
+        </p:nvSpPr>
+        <p:spPr>
+          <a:xfrm>
+            <a:off x="6172200" y="1737360"/>
+            <a:ext cx="5303520" cy="365760"/>
+          </a:xfrm>
+          <a:prstGeom prst="rect">
+            <a:avLst/>
+          </a:prstGeom>
+          <a:noFill/>
+          <a:ln/>
+        </p:spPr>
+        <p:txBody>
+          <a:bodyPr wrap="square" lIns="0" tIns="0" rIns="0" bIns="0" rtlCol="0" anchor="ctr"/>
+          <a:lstStyle/>
+          <a:p>
+            <a:pPr indent="0" marL="0">
+              <a:buNone/>
+            </a:pPr>
+            <a:r>
+              <a:rPr lang="en-US" sz="1800" b="1" dirty="0">
+                <a:solidFill>
+                  <a:srgbClr val="2D3748"/>
+                </a:solidFill>
+                <a:latin typeface="Calibri" pitchFamily="34" charset="0"/>
+                <a:ea typeface="Calibri" pitchFamily="34" charset="-122"/>
+                <a:cs typeface="Calibri" pitchFamily="34" charset="-120"/>
+              </a:rPr>
+              <a:t>Что происходит</a:t>
+            </a:r>
+            <a:endParaRPr lang="en-US" sz="1800" dirty="0"/>
+          </a:p>
+        </p:txBody>
+      </p:sp>
+      <p:sp>
+        <p:nvSpPr>
+          <p:cNvPr id="18" name="s2_txt_23"/>
+          <p:cNvSpPr txBox="1"/>
+          <p:nvPr/>
+        </p:nvSpPr>
+        <p:spPr>
+          <a:xfrm>
+            <a:off x="6172200" y="2103120"/>
+            <a:ext cx="5303520" cy="777240"/>
+          </a:xfrm>
+          <a:prstGeom prst="rect">
+            <a:avLst/>
+          </a:prstGeom>
+          <a:noFill/>
+          <a:ln/>
+        </p:spPr>
+        <p:txBody>
+          <a:bodyPr wrap="square" lIns="0" tIns="0" rIns="0" bIns="0" rtlCol="0" anchor="t"/>
+          <a:lstStyle/>
+          <a:p>
+            <a:pPr indent="0" marL="0">
+              <a:buNone/>
+            </a:pPr>
+            <a:r>
+              <a:rPr lang="en-US" sz="1250" dirty="0">
+                <a:solidFill>
+                  <a:srgbClr val="66768C"/>
+                </a:solidFill>
+                <a:latin typeface="Calibri" pitchFamily="34" charset="0"/>
+                <a:ea typeface="Calibri" pitchFamily="34" charset="-122"/>
+                <a:cs typeface="Calibri" pitchFamily="34" charset="-120"/>
+              </a:rPr>
+              <a:t>В перерыве и после финального свистка миллионы людей одновременно ставят чайник. Нагрузка на сеть растёт на тысячи мегаватт за минуты.</a:t>
+            </a:r>
+            <a:endParaRPr lang="en-US" sz="1250" dirty="0"/>
+          </a:p>
+        </p:txBody>
+      </p:sp>
+      <p:sp>
+        <p:nvSpPr>
+          <p:cNvPr id="19" name="s2_shp_24"/>
+          <p:cNvSpPr/>
+          <p:nvPr/>
+        </p:nvSpPr>
+        <p:spPr>
+          <a:xfrm>
+            <a:off x="4983480" y="3154680"/>
+            <a:ext cx="6675120" cy="1325880"/>
+          </a:xfrm>
+          <a:prstGeom prst="roundRect">
+            <a:avLst>
+              <a:gd name="adj" fmla="val 15172"/>
+            </a:avLst>
+          </a:prstGeom>
+          <a:solidFill>
+            <a:srgbClr val="E6EBF1"/>
+          </a:solidFill>
+          <a:ln/>
+          <a:effectLst>
+            <a:outerShdw sx="100000" sy="100000" kx="0" ky="0" algn="bl" rotWithShape="0" blurRad="139700" dist="63500" dir="13500000">
+              <a:srgbClr val="FFFFFF">
+                <a:alpha val="95000"/>
+              </a:srgbClr>
+            </a:outerShdw>
+          </a:effectLst>
+        </p:spPr>
+      </p:sp>
+      <p:sp>
+        <p:nvSpPr>
+          <p:cNvPr id="20" name="s2_shp_25"/>
+          <p:cNvSpPr/>
+          <p:nvPr/>
+        </p:nvSpPr>
+        <p:spPr>
+          <a:xfrm>
+            <a:off x="4983480" y="3154680"/>
+            <a:ext cx="6675120" cy="1325880"/>
+          </a:xfrm>
+          <a:prstGeom prst="roundRect">
+            <a:avLst>
+              <a:gd name="adj" fmla="val 15172"/>
+            </a:avLst>
+          </a:prstGeom>
+          <a:solidFill>
+            <a:srgbClr val="E6EBF1"/>
+          </a:solidFill>
+          <a:ln/>
+          <a:effectLst>
+            <a:outerShdw sx="100000" sy="100000" kx="0" ky="0" algn="bl" rotWithShape="0" blurRad="139700" dist="63500" dir="2700000">
+              <a:srgbClr val="A3B1C6">
+                <a:alpha val="60000"/>
+              </a:srgbClr>
+            </a:outerShdw>
+          </a:effectLst>
+        </p:spPr>
+      </p:sp>
+      <p:sp>
+        <p:nvSpPr>
+          <p:cNvPr id="21" name="s2_shp_26"/>
+          <p:cNvSpPr/>
+          <p:nvPr/>
+        </p:nvSpPr>
+        <p:spPr>
+          <a:xfrm>
+            <a:off x="5303520" y="3493008"/>
+            <a:ext cx="640080" cy="640080"/>
+          </a:xfrm>
+          <a:prstGeom prst="ellipse">
+            <a:avLst/>
+          </a:prstGeom>
+          <a:solidFill>
+            <a:srgbClr val="E6EBF1"/>
+          </a:solidFill>
+          <a:ln/>
+          <a:effectLst>
+            <a:innerShdw blurRad="88900" dist="38100" dir="2700000">
+              <a:srgbClr val="A3B1C6">
+                <a:alpha val="75000"/>
+              </a:srgbClr>
+            </a:innerShdw>
+          </a:effectLst>
+        </p:spPr>
+      </p:sp>
+      <p:sp>
+        <p:nvSpPr>
+          <p:cNvPr id="22" name="s2_txt_27"/>
+          <p:cNvSpPr txBox="1"/>
+          <p:nvPr/>
+        </p:nvSpPr>
+        <p:spPr>
+          <a:xfrm>
+            <a:off x="5303520" y="3493008"/>
+            <a:ext cx="640080" cy="640080"/>
+          </a:xfrm>
+          <a:prstGeom prst="rect">
+            <a:avLst/>
+          </a:prstGeom>
+          <a:noFill/>
+          <a:ln/>
+        </p:spPr>
+        <p:txBody>
+          <a:bodyPr wrap="square" lIns="0" tIns="0" rIns="0" bIns="0" rtlCol="0" anchor="ctr"/>
+          <a:lstStyle/>
+          <a:p>
+            <a:pPr algn="ctr" indent="0" marL="0">
+              <a:buNone/>
+            </a:pPr>
+            <a:r>
+              <a:rPr lang="en-US" sz="2200" b="1" dirty="0">
+                <a:solidFill>
+                  <a:srgbClr val="2563C9"/>
+                </a:solidFill>
+                <a:latin typeface="Calibri" pitchFamily="34" charset="0"/>
+                <a:ea typeface="Calibri" pitchFamily="34" charset="-122"/>
+                <a:cs typeface="Calibri" pitchFamily="34" charset="-120"/>
+              </a:rPr>
+              <a:t>2</a:t>
+            </a:r>
+            <a:endParaRPr lang="en-US" sz="2200" dirty="0"/>
+          </a:p>
+        </p:txBody>
+      </p:sp>
+      <p:sp>
+        <p:nvSpPr>
+          <p:cNvPr id="23" name="s2_txt_28"/>
+          <p:cNvSpPr txBox="1"/>
+          <p:nvPr/>
+        </p:nvSpPr>
+        <p:spPr>
+          <a:xfrm>
+            <a:off x="6172200" y="3291840"/>
+            <a:ext cx="5303520" cy="365760"/>
+          </a:xfrm>
+          <a:prstGeom prst="rect">
+            <a:avLst/>
+          </a:prstGeom>
+          <a:noFill/>
+          <a:ln/>
+        </p:spPr>
+        <p:txBody>
+          <a:bodyPr wrap="square" lIns="0" tIns="0" rIns="0" bIns="0" rtlCol="0" anchor="ctr"/>
+          <a:lstStyle/>
+          <a:p>
+            <a:pPr indent="0" marL="0">
+              <a:buNone/>
+            </a:pPr>
+            <a:r>
+              <a:rPr lang="en-US" sz="1800" b="1" dirty="0">
+                <a:solidFill>
+                  <a:srgbClr val="2D3748"/>
+                </a:solidFill>
+                <a:latin typeface="Calibri" pitchFamily="34" charset="0"/>
+                <a:ea typeface="Calibri" pitchFamily="34" charset="-122"/>
+                <a:cs typeface="Calibri" pitchFamily="34" charset="-120"/>
+              </a:rPr>
+              <a:t>Как справляются</a:t>
+            </a:r>
+            <a:endParaRPr lang="en-US" sz="1800" dirty="0"/>
+          </a:p>
+        </p:txBody>
+      </p:sp>
+      <p:sp>
+        <p:nvSpPr>
+          <p:cNvPr id="24" name="s2_txt_29"/>
+          <p:cNvSpPr txBox="1"/>
+          <p:nvPr/>
+        </p:nvSpPr>
+        <p:spPr>
+          <a:xfrm>
+            <a:off x="6172200" y="3657600"/>
+            <a:ext cx="5303520" cy="777240"/>
+          </a:xfrm>
+          <a:prstGeom prst="rect">
+            <a:avLst/>
+          </a:prstGeom>
+          <a:noFill/>
+          <a:ln/>
+        </p:spPr>
+        <p:txBody>
+          <a:bodyPr wrap="square" lIns="0" tIns="0" rIns="0" bIns="0" rtlCol="0" anchor="t"/>
+          <a:lstStyle/>
+          <a:p>
+            <a:pPr indent="0" marL="0">
+              <a:buNone/>
+            </a:pPr>
+            <a:r>
+              <a:rPr lang="en-US" sz="1250" dirty="0">
+                <a:solidFill>
+                  <a:srgbClr val="66768C"/>
+                </a:solidFill>
+                <a:latin typeface="Calibri" pitchFamily="34" charset="0"/>
+                <a:ea typeface="Calibri" pitchFamily="34" charset="-122"/>
+                <a:cs typeface="Calibri" pitchFamily="34" charset="-120"/>
+              </a:rPr>
+              <a:t>Диспетчеры заранее изучают телепрограмму и держат наготове быстрые станции: Dinorwig выдаёт 1 320 МВт за 12 секунд. Такие пики есть и сегодня: в финале Евро-2024 — 1 300 МВт.</a:t>
+            </a:r>
+            <a:endParaRPr lang="en-US" sz="1250" dirty="0"/>
+          </a:p>
+        </p:txBody>
+      </p:sp>
+      <p:sp>
+        <p:nvSpPr>
+          <p:cNvPr id="25" name="s2_shp_30"/>
+          <p:cNvSpPr/>
+          <p:nvPr/>
+        </p:nvSpPr>
+        <p:spPr>
+          <a:xfrm>
+            <a:off x="4983480" y="4709160"/>
+            <a:ext cx="6675120" cy="1325880"/>
+          </a:xfrm>
+          <a:prstGeom prst="roundRect">
+            <a:avLst>
+              <a:gd name="adj" fmla="val 15172"/>
+            </a:avLst>
+          </a:prstGeom>
+          <a:solidFill>
+            <a:srgbClr val="E6EBF1"/>
+          </a:solidFill>
+          <a:ln/>
+          <a:effectLst>
+            <a:outerShdw sx="100000" sy="100000" kx="0" ky="0" algn="bl" rotWithShape="0" blurRad="139700" dist="63500" dir="13500000">
+              <a:srgbClr val="FFFFFF">
+                <a:alpha val="95000"/>
+              </a:srgbClr>
+            </a:outerShdw>
+          </a:effectLst>
+        </p:spPr>
+      </p:sp>
+      <p:sp>
+        <p:nvSpPr>
+          <p:cNvPr id="26" name="s2_shp_31"/>
+          <p:cNvSpPr/>
+          <p:nvPr/>
+        </p:nvSpPr>
+        <p:spPr>
+          <a:xfrm>
+            <a:off x="4983480" y="4709160"/>
+            <a:ext cx="6675120" cy="1325880"/>
+          </a:xfrm>
+          <a:prstGeom prst="roundRect">
+            <a:avLst>
+              <a:gd name="adj" fmla="val 15172"/>
+            </a:avLst>
+          </a:prstGeom>
+          <a:solidFill>
+            <a:srgbClr val="E6EBF1"/>
+          </a:solidFill>
+          <a:ln/>
+          <a:effectLst>
+            <a:outerShdw sx="100000" sy="100000" kx="0" ky="0" algn="bl" rotWithShape="0" blurRad="139700" dist="63500" dir="2700000">
+              <a:srgbClr val="A3B1C6">
+                <a:alpha val="60000"/>
+              </a:srgbClr>
+            </a:outerShdw>
+          </a:effectLst>
+        </p:spPr>
+      </p:sp>
+      <p:sp>
+        <p:nvSpPr>
+          <p:cNvPr id="27" name="s2_shp_32"/>
+          <p:cNvSpPr/>
+          <p:nvPr/>
+        </p:nvSpPr>
+        <p:spPr>
+          <a:xfrm>
+            <a:off x="5303520" y="5047488"/>
+            <a:ext cx="640080" cy="640080"/>
+          </a:xfrm>
+          <a:prstGeom prst="ellipse">
+            <a:avLst/>
+          </a:prstGeom>
+          <a:solidFill>
+            <a:srgbClr val="E6EBF1"/>
+          </a:solidFill>
+          <a:ln/>
+          <a:effectLst>
+            <a:innerShdw blurRad="88900" dist="38100" dir="2700000">
+              <a:srgbClr val="A3B1C6">
+                <a:alpha val="75000"/>
+              </a:srgbClr>
+            </a:innerShdw>
+          </a:effectLst>
+        </p:spPr>
+      </p:sp>
+      <p:sp>
+        <p:nvSpPr>
+          <p:cNvPr id="28" name="s2_txt_33"/>
+          <p:cNvSpPr txBox="1"/>
+          <p:nvPr/>
+        </p:nvSpPr>
+        <p:spPr>
+          <a:xfrm>
+            <a:off x="5303520" y="5047488"/>
+            <a:ext cx="640080" cy="640080"/>
+          </a:xfrm>
+          <a:prstGeom prst="rect">
+            <a:avLst/>
+          </a:prstGeom>
+          <a:noFill/>
+          <a:ln/>
+        </p:spPr>
+        <p:txBody>
+          <a:bodyPr wrap="square" lIns="0" tIns="0" rIns="0" bIns="0" rtlCol="0" anchor="ctr"/>
+          <a:lstStyle/>
+          <a:p>
+            <a:pPr algn="ctr" indent="0" marL="0">
+              <a:buNone/>
+            </a:pPr>
+            <a:r>
+              <a:rPr lang="en-US" sz="2200" b="1" dirty="0">
+                <a:solidFill>
+                  <a:srgbClr val="2563C9"/>
+                </a:solidFill>
+                <a:latin typeface="Calibri" pitchFamily="34" charset="0"/>
+                <a:ea typeface="Calibri" pitchFamily="34" charset="-122"/>
+                <a:cs typeface="Calibri" pitchFamily="34" charset="-120"/>
+              </a:rPr>
+              <a:t>3</a:t>
+            </a:r>
+            <a:endParaRPr lang="en-US" sz="2200" dirty="0"/>
+          </a:p>
+        </p:txBody>
+      </p:sp>
+      <p:sp>
+        <p:nvSpPr>
+          <p:cNvPr id="29" name="s2_txt_34"/>
+          <p:cNvSpPr txBox="1"/>
+          <p:nvPr/>
+        </p:nvSpPr>
+        <p:spPr>
+          <a:xfrm>
+            <a:off x="6172200" y="4846320"/>
+            <a:ext cx="5303520" cy="365760"/>
+          </a:xfrm>
+          <a:prstGeom prst="rect">
+            <a:avLst/>
+          </a:prstGeom>
+          <a:noFill/>
+          <a:ln/>
+        </p:spPr>
+        <p:txBody>
+          <a:bodyPr wrap="square" lIns="0" tIns="0" rIns="0" bIns="0" rtlCol="0" anchor="ctr"/>
+          <a:lstStyle/>
+          <a:p>
+            <a:pPr indent="0" marL="0">
+              <a:buNone/>
+            </a:pPr>
+            <a:r>
+              <a:rPr lang="en-US" sz="1800" b="1" dirty="0">
+                <a:solidFill>
+                  <a:srgbClr val="2D3748"/>
+                </a:solidFill>
+                <a:latin typeface="Calibri" pitchFamily="34" charset="0"/>
+                <a:ea typeface="Calibri" pitchFamily="34" charset="-122"/>
+                <a:cs typeface="Calibri" pitchFamily="34" charset="-120"/>
+              </a:rPr>
+              <a:t>Наша задача</a:t>
+            </a:r>
+            <a:endParaRPr lang="en-US" sz="1800" dirty="0"/>
+          </a:p>
+        </p:txBody>
+      </p:sp>
+      <p:sp>
+        <p:nvSpPr>
+          <p:cNvPr id="30" name="s2_txt_35"/>
+          <p:cNvSpPr txBox="1"/>
+          <p:nvPr/>
+        </p:nvSpPr>
+        <p:spPr>
+          <a:xfrm>
+            <a:off x="6172200" y="5212080"/>
+            <a:ext cx="5303520" cy="777240"/>
+          </a:xfrm>
+          <a:prstGeom prst="rect">
+            <a:avLst/>
+          </a:prstGeom>
+          <a:noFill/>
+          <a:ln/>
+        </p:spPr>
+        <p:txBody>
+          <a:bodyPr wrap="square" lIns="0" tIns="0" rIns="0" bIns="0" rtlCol="0" anchor="t"/>
+          <a:lstStyle/>
+          <a:p>
+            <a:pPr indent="0" marL="0">
+              <a:buNone/>
+            </a:pPr>
+            <a:r>
+              <a:rPr lang="en-US" sz="1250" dirty="0">
+                <a:solidFill>
+                  <a:srgbClr val="66768C"/>
+                </a:solidFill>
+                <a:latin typeface="Calibri" pitchFamily="34" charset="0"/>
+                <a:ea typeface="Calibri" pitchFamily="34" charset="-122"/>
+                <a:cs typeface="Calibri" pitchFamily="34" charset="-120"/>
+              </a:rPr>
+              <a:t>Та же, только в масштабе всего региона: заранее знать, сколько электроэнергии понадобится в каждый час завтрашних суток.</a:t>
+            </a:r>
+            <a:endParaRPr lang="en-US" sz="1250" dirty="0"/>
+          </a:p>
+        </p:txBody>
+      </p:sp>
+    </p:spTree>
+  </p:cSld>
+  <p:clrMapOvr>
+    <a:masterClrMapping/>
+  </p:clrMapOvr>
+  <mc:AlternateContent xmlns:mc="http://schemas.openxmlformats.org/markup-compatibility/2006">
+    <mc:Choice xmlns:p159="http://schemas.microsoft.com/office/powerpoint/2015/09/main" Requires="p159">
+      <p:transition xmlns:p14="http://schemas.microsoft.com/office/powerpoint/2010/main" spd="slow" p14:dur="1250">
+        <p159:morph option="byObject"/>
+      </p:transition>
+    </mc:Choice>
+    <mc:Fallback>
+      <p:transition spd="slow">
+        <p:fade/>
+      </p:transition>
+    </mc:Fallback>
+  </mc:AlternateContent>
+  <p:timing>
+    <p:tnLst>
+      <p:par>
+        <p:cTn id="1" dur="indefinite" restart="never" nodeType="tmRoot">
+          <p:childTnLst>
+            <p:seq concurrent="1" nextAc="seek">
+              <p:cTn id="2" dur="indefinite" nodeType="mainSeq">
+                <p:childTnLst>
+                  <p:par>
+                    <p:cTn id="3" fill="hold">
+                      <p:stCondLst>
+                        <p:cond delay="indefinite"/>
+                        <p:cond evt="onBegin" delay="0">
+                          <p:tn val="2"/>
+                        </p:cond>
+                      </p:stCondLst>
+                      <p:childTnLst>
+                        <p:par>
+                          <p:cTn id="4" fill="hold">
+                            <p:stCondLst>
+                              <p:cond delay="0"/>
+                            </p:stCondLst>
+                            <p:childTnLst>
+                              <p:par>
+                                <p:cTn id="5" presetID="10" presetClass="entr" presetSubtype="0" fill="hold" grpId="0" nodeType="afterEffect">
+                                  <p:stCondLst>
+                                    <p:cond delay="0"/>
+                                  </p:stCondLst>
+                                  <p:childTnLst>
+                                    <p:set>
+                                      <p:cBhvr>
+                                        <p:cTn id="6" dur="1" fill="hold">
+                                          <p:stCondLst>
+                                            <p:cond delay="0"/>
+                                          </p:stCondLst>
+                                        </p:cTn>
+                                        <p:tgtEl>
+                                          <p:spTgt spid="7"/>
+                                        </p:tgtEl>
+                                        <p:attrNameLst>
+                                          <p:attrName>style.visibility</p:attrName>
+                                        </p:attrNameLst>
+                                      </p:cBhvr>
+                                      <p:to>
+                                        <p:strVal val="visible"/>
+                                      </p:to>
+                                    </p:set>
+                                    <p:animEffect transition="in" filter="fade">
+                                      <p:cBhvr>
+                                        <p:cTn id="7" dur="500"/>
+                                        <p:tgtEl>
+                                          <p:spTgt spid="7"/>
+                                        </p:tgtEl>
+                                      </p:cBhvr>
+                                    </p:animEffect>
+                                  </p:childTnLst>
+                                </p:cTn>
+                              </p:par>
+                              <p:par>
+                                <p:cTn id="8" presetID="10" presetClass="entr" presetSubtype="0" fill="hold" grpId="0" nodeType="withEffect">
+                                  <p:stCondLst>
+                                    <p:cond delay="0"/>
+                                  </p:stCondLst>
+                                  <p:childTnLst>
+                                    <p:set>
+                                      <p:cBhvr>
+                                        <p:cTn id="9" dur="1" fill="hold">
+                                          <p:stCondLst>
+                                            <p:cond delay="0"/>
+                                          </p:stCondLst>
+                                        </p:cTn>
+                                        <p:tgtEl>
+                                          <p:spTgt spid="8"/>
+                                        </p:tgtEl>
+                                        <p:attrNameLst>
+                                          <p:attrName>style.visibility</p:attrName>
+                                        </p:attrNameLst>
+                                      </p:cBhvr>
+                                      <p:to>
+                                        <p:strVal val="visible"/>
+                                      </p:to>
+                                    </p:set>
+                                    <p:animEffect transition="in" filter="fade">
+                                      <p:cBhvr>
+                                        <p:cTn id="10" dur="500"/>
+                                        <p:tgtEl>
+                                          <p:spTgt spid="8"/>
+                                        </p:tgtEl>
+                                      </p:cBhvr>
+                                    </p:animEffect>
+                                  </p:childTnLst>
+                                </p:cTn>
+                              </p:par>
+                              <p:par>
+                                <p:cTn id="11" presetID="10" presetClass="entr" presetSubtype="0" fill="hold" grpId="0" nodeType="withEffect">
+                                  <p:stCondLst>
+                                    <p:cond delay="0"/>
+                                  </p:stCondLst>
+                                  <p:childTnLst>
+                                    <p:set>
+                                      <p:cBhvr>
+                                        <p:cTn id="12" dur="1" fill="hold">
+                                          <p:stCondLst>
+                                            <p:cond delay="0"/>
+                                          </p:stCondLst>
+                                        </p:cTn>
+                                        <p:tgtEl>
+                                          <p:spTgt spid="9"/>
+                                        </p:tgtEl>
+                                        <p:attrNameLst>
+                                          <p:attrName>style.visibility</p:attrName>
+                                        </p:attrNameLst>
+                                      </p:cBhvr>
+                                      <p:to>
+                                        <p:strVal val="visible"/>
+                                      </p:to>
+                                    </p:set>
+                                    <p:animEffect transition="in" filter="fade">
+                                      <p:cBhvr>
+                                        <p:cTn id="13" dur="500"/>
+                                        <p:tgtEl>
+                                          <p:spTgt spid="9"/>
+                                        </p:tgtEl>
+                                      </p:cBhvr>
+                                    </p:animEffect>
+                                  </p:childTnLst>
+                                </p:cTn>
+                              </p:par>
+                              <p:par>
+                                <p:cTn id="14" presetID="10" presetClass="entr" presetSubtype="0" fill="hold" grpId="0" nodeType="withEffect">
+                                  <p:stCondLst>
+                                    <p:cond delay="0"/>
+                                  </p:stCondLst>
+                                  <p:childTnLst>
+                                    <p:set>
+                                      <p:cBhvr>
+                                        <p:cTn id="15" dur="1" fill="hold">
+                                          <p:stCondLst>
+                                            <p:cond delay="0"/>
+                                          </p:stCondLst>
+                                        </p:cTn>
+                                        <p:tgtEl>
+                                          <p:spTgt spid="10"/>
+                                        </p:tgtEl>
+                                        <p:attrNameLst>
+                                          <p:attrName>style.visibility</p:attrName>
+                                        </p:attrNameLst>
+                                      </p:cBhvr>
+                                      <p:to>
+                                        <p:strVal val="visible"/>
+                                      </p:to>
+                                    </p:set>
+                                    <p:animEffect transition="in" filter="fade">
+                                      <p:cBhvr>
+                                        <p:cTn id="16" dur="500"/>
+                                        <p:tgtEl>
+                                          <p:spTgt spid="10"/>
+                                        </p:tgtEl>
+                                      </p:cBhvr>
+                                    </p:animEffect>
+                                  </p:childTnLst>
+                                </p:cTn>
+                              </p:par>
+                              <p:par>
+                                <p:cTn id="17" presetID="10" presetClass="entr" presetSubtype="0" fill="hold" grpId="0" nodeType="withEffect">
+                                  <p:stCondLst>
+                                    <p:cond delay="0"/>
+                                  </p:stCondLst>
+                                  <p:childTnLst>
+                                    <p:set>
+                                      <p:cBhvr>
+                                        <p:cTn id="18" dur="1" fill="hold">
+                                          <p:stCondLst>
+                                            <p:cond delay="0"/>
+                                          </p:stCondLst>
+                                        </p:cTn>
+                                        <p:tgtEl>
+                                          <p:spTgt spid="11"/>
+                                        </p:tgtEl>
+                                        <p:attrNameLst>
+                                          <p:attrName>style.visibility</p:attrName>
+                                        </p:attrNameLst>
+                                      </p:cBhvr>
+                                      <p:to>
+                                        <p:strVal val="visible"/>
+                                      </p:to>
+                                    </p:set>
+                                    <p:animEffect transition="in" filter="fade">
+                                      <p:cBhvr>
+                                        <p:cTn id="19" dur="500"/>
+                                        <p:tgtEl>
+                                          <p:spTgt spid="11"/>
+                                        </p:tgtEl>
+                                      </p:cBhvr>
+                                    </p:animEffect>
+                                  </p:childTnLst>
+                                </p:cTn>
+                              </p:par>
+                              <p:par>
+                                <p:cTn id="20" presetID="10" presetClass="entr" presetSubtype="0" fill="hold" grpId="0" nodeType="withEffect">
+                                  <p:stCondLst>
+                                    <p:cond delay="0"/>
+                                  </p:stCondLst>
+                                  <p:childTnLst>
+                                    <p:set>
+                                      <p:cBhvr>
+                                        <p:cTn id="21" dur="1" fill="hold">
+                                          <p:stCondLst>
+                                            <p:cond delay="0"/>
+                                          </p:stCondLst>
+                                        </p:cTn>
+                                        <p:tgtEl>
+                                          <p:spTgt spid="12"/>
+                                        </p:tgtEl>
+                                        <p:attrNameLst>
+                                          <p:attrName>style.visibility</p:attrName>
+                                        </p:attrNameLst>
+                                      </p:cBhvr>
+                                      <p:to>
+                                        <p:strVal val="visible"/>
+                                      </p:to>
+                                    </p:set>
+                                    <p:animEffect transition="in" filter="fade">
+                                      <p:cBhvr>
+                                        <p:cTn id="22" dur="500"/>
+                                        <p:tgtEl>
+                                          <p:spTgt spid="12"/>
+                                        </p:tgtEl>
+                                      </p:cBhvr>
+                                    </p:animEffect>
+                                  </p:childTnLst>
+                                </p:cTn>
+                              </p:par>
+                            </p:childTnLst>
+                          </p:cTn>
+                        </p:par>
+                        <p:par>
+                          <p:cTn id="23" fill="hold">
+                            <p:stCondLst>
+                              <p:cond delay="350"/>
+                            </p:stCondLst>
+                            <p:childTnLst>
+                              <p:par>
+                                <p:cTn id="24" presetID="10" presetClass="entr" presetSubtype="0" fill="hold" grpId="0" nodeType="afterEffect">
+                                  <p:stCondLst>
+                                    <p:cond delay="0"/>
+                                  </p:stCondLst>
+                                  <p:childTnLst>
+                                    <p:set>
+                                      <p:cBhvr>
+                                        <p:cTn id="25" dur="1" fill="hold">
+                                          <p:stCondLst>
+                                            <p:cond delay="0"/>
+                                          </p:stCondLst>
+                                        </p:cTn>
+                                        <p:tgtEl>
+                                          <p:spTgt spid="13"/>
+                                        </p:tgtEl>
+                                        <p:attrNameLst>
+                                          <p:attrName>style.visibility</p:attrName>
+                                        </p:attrNameLst>
+                                      </p:cBhvr>
+                                      <p:to>
+                                        <p:strVal val="visible"/>
+                                      </p:to>
+                                    </p:set>
+                                    <p:animEffect transition="in" filter="fade">
+                                      <p:cBhvr>
+                                        <p:cTn id="26" dur="500"/>
+                                        <p:tgtEl>
+                                          <p:spTgt spid="13"/>
+                                        </p:tgtEl>
+                                      </p:cBhvr>
+                                    </p:animEffect>
+                                  </p:childTnLst>
+                                </p:cTn>
+                              </p:par>
+                              <p:par>
+                                <p:cTn id="27" presetID="10" presetClass="entr" presetSubtype="0" fill="hold" grpId="0" nodeType="withEffect">
+                                  <p:stCondLst>
+                                    <p:cond delay="0"/>
+                                  </p:stCondLst>
+                                  <p:childTnLst>
+                                    <p:set>
+                                      <p:cBhvr>
+                                        <p:cTn id="28" dur="1" fill="hold">
+                                          <p:stCondLst>
+                                            <p:cond delay="0"/>
+                                          </p:stCondLst>
+                                        </p:cTn>
+                                        <p:tgtEl>
+                                          <p:spTgt spid="14"/>
+                                        </p:tgtEl>
+                                        <p:attrNameLst>
+                                          <p:attrName>style.visibility</p:attrName>
+                                        </p:attrNameLst>
+                                      </p:cBhvr>
+                                      <p:to>
+                                        <p:strVal val="visible"/>
+                                      </p:to>
+                                    </p:set>
+                                    <p:animEffect transition="in" filter="fade">
+                                      <p:cBhvr>
+                                        <p:cTn id="29" dur="500"/>
+                                        <p:tgtEl>
+                                          <p:spTgt spid="14"/>
+                                        </p:tgtEl>
+                                      </p:cBhvr>
+                                    </p:animEffect>
+                                  </p:childTnLst>
+                                </p:cTn>
+                              </p:par>
+                              <p:par>
+                                <p:cTn id="30" presetID="10" presetClass="entr" presetSubtype="0" fill="hold" grpId="0" nodeType="withEffect">
+                                  <p:stCondLst>
+                                    <p:cond delay="0"/>
+                                  </p:stCondLst>
+                                  <p:childTnLst>
+                                    <p:set>
+                                      <p:cBhvr>
+                                        <p:cTn id="31" dur="1" fill="hold">
+                                          <p:stCondLst>
+                                            <p:cond delay="0"/>
+                                          </p:stCondLst>
+                                        </p:cTn>
+                                        <p:tgtEl>
+                                          <p:spTgt spid="15"/>
+                                        </p:tgtEl>
+                                        <p:attrNameLst>
+                                          <p:attrName>style.visibility</p:attrName>
+                                        </p:attrNameLst>
+                                      </p:cBhvr>
+                                      <p:to>
+                                        <p:strVal val="visible"/>
+                                      </p:to>
+                                    </p:set>
+                                    <p:animEffect transition="in" filter="fade">
+                                      <p:cBhvr>
+                                        <p:cTn id="32" dur="500"/>
+                                        <p:tgtEl>
+                                          <p:spTgt spid="15"/>
+                                        </p:tgtEl>
+                                      </p:cBhvr>
+                                    </p:animEffect>
+                                  </p:childTnLst>
+                                </p:cTn>
+                              </p:par>
+                              <p:par>
+                                <p:cTn id="33" presetID="10" presetClass="entr" presetSubtype="0" fill="hold" grpId="0" nodeType="withEffect">
+                                  <p:stCondLst>
+                                    <p:cond delay="0"/>
+                                  </p:stCondLst>
+                                  <p:childTnLst>
+                                    <p:set>
+                                      <p:cBhvr>
+                                        <p:cTn id="34" dur="1" fill="hold">
+                                          <p:stCondLst>
+                                            <p:cond delay="0"/>
+                                          </p:stCondLst>
+                                        </p:cTn>
+                                        <p:tgtEl>
+                                          <p:spTgt spid="16"/>
+                                        </p:tgtEl>
+                                        <p:attrNameLst>
+                                          <p:attrName>style.visibility</p:attrName>
+                                        </p:attrNameLst>
+                                      </p:cBhvr>
+                                      <p:to>
+                                        <p:strVal val="visible"/>
+                                      </p:to>
+                                    </p:set>
+                                    <p:animEffect transition="in" filter="fade">
+                                      <p:cBhvr>
+                                        <p:cTn id="35" dur="500"/>
+                                        <p:tgtEl>
+                                          <p:spTgt spid="16"/>
+                                        </p:tgtEl>
+                                      </p:cBhvr>
+                                    </p:animEffect>
+                                  </p:childTnLst>
+                                </p:cTn>
+                              </p:par>
+                              <p:par>
+                                <p:cTn id="36" presetID="10" presetClass="entr" presetSubtype="0" fill="hold" grpId="0" nodeType="withEffect">
+                                  <p:stCondLst>
+                                    <p:cond delay="0"/>
+                                  </p:stCondLst>
+                                  <p:childTnLst>
+                                    <p:set>
+                                      <p:cBhvr>
+                                        <p:cTn id="37" dur="1" fill="hold">
+                                          <p:stCondLst>
+                                            <p:cond delay="0"/>
+                                          </p:stCondLst>
+                                        </p:cTn>
+                                        <p:tgtEl>
+                                          <p:spTgt spid="17"/>
+                                        </p:tgtEl>
+                                        <p:attrNameLst>
+                                          <p:attrName>style.visibility</p:attrName>
+                                        </p:attrNameLst>
+                                      </p:cBhvr>
+                                      <p:to>
+                                        <p:strVal val="visible"/>
+                                      </p:to>
+                                    </p:set>
+                                    <p:animEffect transition="in" filter="fade">
+                                      <p:cBhvr>
+                                        <p:cTn id="38" dur="500"/>
+                                        <p:tgtEl>
+                                          <p:spTgt spid="17"/>
+                                        </p:tgtEl>
+                                      </p:cBhvr>
+                                    </p:animEffect>
+                                  </p:childTnLst>
+                                </p:cTn>
+                              </p:par>
+                              <p:par>
+                                <p:cTn id="39" presetID="10" presetClass="entr" presetSubtype="0" fill="hold" grpId="0" nodeType="withEffect">
+                                  <p:stCondLst>
+                                    <p:cond delay="0"/>
+                                  </p:stCondLst>
+                                  <p:childTnLst>
+                                    <p:set>
+                                      <p:cBhvr>
+                                        <p:cTn id="40" dur="1" fill="hold">
+                                          <p:stCondLst>
+                                            <p:cond delay="0"/>
+                                          </p:stCondLst>
+                                        </p:cTn>
+                                        <p:tgtEl>
+                                          <p:spTgt spid="18"/>
+                                        </p:tgtEl>
+                                        <p:attrNameLst>
+                                          <p:attrName>style.visibility</p:attrName>
+                                        </p:attrNameLst>
+                                      </p:cBhvr>
+                                      <p:to>
+                                        <p:strVal val="visible"/>
+                                      </p:to>
+                                    </p:set>
+                                    <p:animEffect transition="in" filter="fade">
+                                      <p:cBhvr>
+                                        <p:cTn id="41" dur="500"/>
+                                        <p:tgtEl>
+                                          <p:spTgt spid="18"/>
+                                        </p:tgtEl>
+                                      </p:cBhvr>
+                                    </p:animEffect>
+                                  </p:childTnLst>
+                                </p:cTn>
+                              </p:par>
+                            </p:childTnLst>
+                          </p:cTn>
+                        </p:par>
+                        <p:par>
+                          <p:cTn id="42" fill="hold">
+                            <p:stCondLst>
+                              <p:cond delay="700"/>
+                            </p:stCondLst>
+                            <p:childTnLst>
+                              <p:par>
+                                <p:cTn id="43" presetID="10" presetClass="entr" presetSubtype="0" fill="hold" grpId="0" nodeType="afterEffect">
+                                  <p:stCondLst>
+                                    <p:cond delay="0"/>
+                                  </p:stCondLst>
+                                  <p:childTnLst>
+                                    <p:set>
+                                      <p:cBhvr>
+                                        <p:cTn id="44" dur="1" fill="hold">
+                                          <p:stCondLst>
+                                            <p:cond delay="0"/>
+                                          </p:stCondLst>
+                                        </p:cTn>
+                                        <p:tgtEl>
+                                          <p:spTgt spid="19"/>
+                                        </p:tgtEl>
+                                        <p:attrNameLst>
+                                          <p:attrName>style.visibility</p:attrName>
+                                        </p:attrNameLst>
+                                      </p:cBhvr>
+                                      <p:to>
+                                        <p:strVal val="visible"/>
+                                      </p:to>
+                                    </p:set>
+                                    <p:animEffect transition="in" filter="fade">
+                                      <p:cBhvr>
+                                        <p:cTn id="45" dur="500"/>
+                                        <p:tgtEl>
+                                          <p:spTgt spid="19"/>
+                                        </p:tgtEl>
+                                      </p:cBhvr>
+                                    </p:animEffect>
+                                  </p:childTnLst>
+                                </p:cTn>
+                              </p:par>
+                              <p:par>
+                                <p:cTn id="46" presetID="10" presetClass="entr" presetSubtype="0" fill="hold" grpId="0" nodeType="withEffect">
+                                  <p:stCondLst>
+                                    <p:cond delay="0"/>
+                                  </p:stCondLst>
+                                  <p:childTnLst>
+                                    <p:set>
+                                      <p:cBhvr>
+                                        <p:cTn id="47" dur="1" fill="hold">
+                                          <p:stCondLst>
+                                            <p:cond delay="0"/>
+                                          </p:stCondLst>
+                                        </p:cTn>
+                                        <p:tgtEl>
+                                          <p:spTgt spid="20"/>
+                                        </p:tgtEl>
+                                        <p:attrNameLst>
+                                          <p:attrName>style.visibility</p:attrName>
+                                        </p:attrNameLst>
+                                      </p:cBhvr>
+                                      <p:to>
+                                        <p:strVal val="visible"/>
+                                      </p:to>
+                                    </p:set>
+                                    <p:animEffect transition="in" filter="fade">
+                                      <p:cBhvr>
+                                        <p:cTn id="48" dur="500"/>
+                                        <p:tgtEl>
+                                          <p:spTgt spid="20"/>
+                                        </p:tgtEl>
+                                      </p:cBhvr>
+                                    </p:animEffect>
+                                  </p:childTnLst>
+                                </p:cTn>
+                              </p:par>
+                              <p:par>
+                                <p:cTn id="49" presetID="10" presetClass="entr" presetSubtype="0" fill="hold" grpId="0" nodeType="withEffect">
+                                  <p:stCondLst>
+                                    <p:cond delay="0"/>
+                                  </p:stCondLst>
+                                  <p:childTnLst>
+                                    <p:set>
+                                      <p:cBhvr>
+                                        <p:cTn id="50" dur="1" fill="hold">
+                                          <p:stCondLst>
+                                            <p:cond delay="0"/>
+                                          </p:stCondLst>
+                                        </p:cTn>
+                                        <p:tgtEl>
+                                          <p:spTgt spid="21"/>
+                                        </p:tgtEl>
+                                        <p:attrNameLst>
+                                          <p:attrName>style.visibility</p:attrName>
+                                        </p:attrNameLst>
+                                      </p:cBhvr>
+                                      <p:to>
+                                        <p:strVal val="visible"/>
+                                      </p:to>
+                                    </p:set>
+                                    <p:animEffect transition="in" filter="fade">
+                                      <p:cBhvr>
+                                        <p:cTn id="51" dur="500"/>
+                                        <p:tgtEl>
+                                          <p:spTgt spid="21"/>
+                                        </p:tgtEl>
+                                      </p:cBhvr>
+                                    </p:animEffect>
+                                  </p:childTnLst>
+                                </p:cTn>
+                              </p:par>
+                              <p:par>
+                                <p:cTn id="52" presetID="10" presetClass="entr" presetSubtype="0" fill="hold" grpId="0" nodeType="withEffect">
+                                  <p:stCondLst>
+                                    <p:cond delay="0"/>
+                                  </p:stCondLst>
+                                  <p:childTnLst>
+                                    <p:set>
+                                      <p:cBhvr>
+                                        <p:cTn id="53" dur="1" fill="hold">
+                                          <p:stCondLst>
+                                            <p:cond delay="0"/>
+                                          </p:stCondLst>
+                                        </p:cTn>
+                                        <p:tgtEl>
+                                          <p:spTgt spid="22"/>
+                                        </p:tgtEl>
+                                        <p:attrNameLst>
+                                          <p:attrName>style.visibility</p:attrName>
+                                        </p:attrNameLst>
+                                      </p:cBhvr>
+                                      <p:to>
+                                        <p:strVal val="visible"/>
+                                      </p:to>
+                                    </p:set>
+                                    <p:animEffect transition="in" filter="fade">
+                                      <p:cBhvr>
+                                        <p:cTn id="54" dur="500"/>
+                                        <p:tgtEl>
+                                          <p:spTgt spid="22"/>
+                                        </p:tgtEl>
+                                      </p:cBhvr>
+                                    </p:animEffect>
+                                  </p:childTnLst>
+                                </p:cTn>
+                              </p:par>
+                              <p:par>
+                                <p:cTn id="55" presetID="10" presetClass="entr" presetSubtype="0" fill="hold" grpId="0" nodeType="withEffect">
+                                  <p:stCondLst>
+                                    <p:cond delay="0"/>
+                                  </p:stCondLst>
+                                  <p:childTnLst>
+                                    <p:set>
+                                      <p:cBhvr>
+                                        <p:cTn id="56" dur="1" fill="hold">
+                                          <p:stCondLst>
+                                            <p:cond delay="0"/>
+                                          </p:stCondLst>
+                                        </p:cTn>
+                                        <p:tgtEl>
+                                          <p:spTgt spid="23"/>
+                                        </p:tgtEl>
+                                        <p:attrNameLst>
+                                          <p:attrName>style.visibility</p:attrName>
+                                        </p:attrNameLst>
+                                      </p:cBhvr>
+                                      <p:to>
+                                        <p:strVal val="visible"/>
+                                      </p:to>
+                                    </p:set>
+                                    <p:animEffect transition="in" filter="fade">
+                                      <p:cBhvr>
+                                        <p:cTn id="57" dur="500"/>
+                                        <p:tgtEl>
+                                          <p:spTgt spid="23"/>
+                                        </p:tgtEl>
+                                      </p:cBhvr>
+                                    </p:animEffect>
+                                  </p:childTnLst>
+                                </p:cTn>
+                              </p:par>
+                              <p:par>
+                                <p:cTn id="58" presetID="10" presetClass="entr" presetSubtype="0" fill="hold" grpId="0" nodeType="withEffect">
+                                  <p:stCondLst>
+                                    <p:cond delay="0"/>
+                                  </p:stCondLst>
+                                  <p:childTnLst>
+                                    <p:set>
+                                      <p:cBhvr>
+                                        <p:cTn id="59" dur="1" fill="hold">
+                                          <p:stCondLst>
+                                            <p:cond delay="0"/>
+                                          </p:stCondLst>
+                                        </p:cTn>
+                                        <p:tgtEl>
+                                          <p:spTgt spid="24"/>
+                                        </p:tgtEl>
+                                        <p:attrNameLst>
+                                          <p:attrName>style.visibility</p:attrName>
+                                        </p:attrNameLst>
+                                      </p:cBhvr>
+                                      <p:to>
+                                        <p:strVal val="visible"/>
+                                      </p:to>
+                                    </p:set>
+                                    <p:animEffect transition="in" filter="fade">
+                                      <p:cBhvr>
+                                        <p:cTn id="60" dur="500"/>
+                                        <p:tgtEl>
+                                          <p:spTgt spid="24"/>
+                                        </p:tgtEl>
+                                      </p:cBhvr>
+                                    </p:animEffect>
+                                  </p:childTnLst>
+                                </p:cTn>
+                              </p:par>
+                            </p:childTnLst>
+                          </p:cTn>
+                        </p:par>
+                        <p:par>
+                          <p:cTn id="61" fill="hold">
+                            <p:stCondLst>
+                              <p:cond delay="1050"/>
+                            </p:stCondLst>
+                            <p:childTnLst>
+                              <p:par>
+                                <p:cTn id="62" presetID="10" presetClass="entr" presetSubtype="0" fill="hold" grpId="0" nodeType="afterEffect">
+                                  <p:stCondLst>
+                                    <p:cond delay="0"/>
+                                  </p:stCondLst>
+                                  <p:childTnLst>
+                                    <p:set>
+                                      <p:cBhvr>
+                                        <p:cTn id="63" dur="1" fill="hold">
+                                          <p:stCondLst>
+                                            <p:cond delay="0"/>
+                                          </p:stCondLst>
+                                        </p:cTn>
+                                        <p:tgtEl>
+                                          <p:spTgt spid="25"/>
+                                        </p:tgtEl>
+                                        <p:attrNameLst>
+                                          <p:attrName>style.visibility</p:attrName>
+                                        </p:attrNameLst>
+                                      </p:cBhvr>
+                                      <p:to>
+                                        <p:strVal val="visible"/>
+                                      </p:to>
+                                    </p:set>
+                                    <p:animEffect transition="in" filter="fade">
+                                      <p:cBhvr>
+                                        <p:cTn id="64" dur="500"/>
+                                        <p:tgtEl>
+                                          <p:spTgt spid="25"/>
+                                        </p:tgtEl>
+                                      </p:cBhvr>
+                                    </p:animEffect>
+                                  </p:childTnLst>
+                                </p:cTn>
+                              </p:par>
+                              <p:par>
+                                <p:cTn id="65" presetID="10" presetClass="entr" presetSubtype="0" fill="hold" grpId="0" nodeType="withEffect">
+                                  <p:stCondLst>
+                                    <p:cond delay="0"/>
+                                  </p:stCondLst>
+                                  <p:childTnLst>
+                                    <p:set>
+                                      <p:cBhvr>
+                                        <p:cTn id="66" dur="1" fill="hold">
+                                          <p:stCondLst>
+                                            <p:cond delay="0"/>
+                                          </p:stCondLst>
+                                        </p:cTn>
+                                        <p:tgtEl>
+                                          <p:spTgt spid="26"/>
+                                        </p:tgtEl>
+                                        <p:attrNameLst>
+                                          <p:attrName>style.visibility</p:attrName>
+                                        </p:attrNameLst>
+                                      </p:cBhvr>
+                                      <p:to>
+                                        <p:strVal val="visible"/>
+                                      </p:to>
+                                    </p:set>
+                                    <p:animEffect transition="in" filter="fade">
+                                      <p:cBhvr>
+                                        <p:cTn id="67" dur="500"/>
+                                        <p:tgtEl>
+                                          <p:spTgt spid="26"/>
+                                        </p:tgtEl>
+                                      </p:cBhvr>
+                                    </p:animEffect>
+                                  </p:childTnLst>
+                                </p:cTn>
+                              </p:par>
+                              <p:par>
+                                <p:cTn id="68" presetID="10" presetClass="entr" presetSubtype="0" fill="hold" grpId="0" nodeType="withEffect">
+                                  <p:stCondLst>
+                                    <p:cond delay="0"/>
+                                  </p:stCondLst>
+                                  <p:childTnLst>
+                                    <p:set>
+                                      <p:cBhvr>
+                                        <p:cTn id="69" dur="1" fill="hold">
+                                          <p:stCondLst>
+                                            <p:cond delay="0"/>
+                                          </p:stCondLst>
+                                        </p:cTn>
+                                        <p:tgtEl>
+                                          <p:spTgt spid="27"/>
+                                        </p:tgtEl>
+                                        <p:attrNameLst>
+                                          <p:attrName>style.visibility</p:attrName>
+                                        </p:attrNameLst>
+                                      </p:cBhvr>
+                                      <p:to>
+                                        <p:strVal val="visible"/>
+                                      </p:to>
+                                    </p:set>
+                                    <p:animEffect transition="in" filter="fade">
+                                      <p:cBhvr>
+                                        <p:cTn id="70" dur="500"/>
+                                        <p:tgtEl>
+                                          <p:spTgt spid="27"/>
+                                        </p:tgtEl>
+                                      </p:cBhvr>
+                                    </p:animEffect>
+                                  </p:childTnLst>
+                                </p:cTn>
+                              </p:par>
+                              <p:par>
+                                <p:cTn id="71" presetID="10" presetClass="entr" presetSubtype="0" fill="hold" grpId="0" nodeType="withEffect">
+                                  <p:stCondLst>
+                                    <p:cond delay="0"/>
+                                  </p:stCondLst>
+                                  <p:childTnLst>
+                                    <p:set>
+                                      <p:cBhvr>
+                                        <p:cTn id="72" dur="1" fill="hold">
+                                          <p:stCondLst>
+                                            <p:cond delay="0"/>
+                                          </p:stCondLst>
+                                        </p:cTn>
+                                        <p:tgtEl>
+                                          <p:spTgt spid="28"/>
+                                        </p:tgtEl>
+                                        <p:attrNameLst>
+                                          <p:attrName>style.visibility</p:attrName>
+                                        </p:attrNameLst>
+                                      </p:cBhvr>
+                                      <p:to>
+                                        <p:strVal val="visible"/>
+                                      </p:to>
+                                    </p:set>
+                                    <p:animEffect transition="in" filter="fade">
+                                      <p:cBhvr>
+                                        <p:cTn id="73" dur="500"/>
+                                        <p:tgtEl>
+                                          <p:spTgt spid="28"/>
+                                        </p:tgtEl>
+                                      </p:cBhvr>
+                                    </p:animEffect>
+                                  </p:childTnLst>
+                                </p:cTn>
+                              </p:par>
+                              <p:par>
+                                <p:cTn id="74" presetID="10" presetClass="entr" presetSubtype="0" fill="hold" grpId="0" nodeType="withEffect">
+                                  <p:stCondLst>
+                                    <p:cond delay="0"/>
+                                  </p:stCondLst>
+                                  <p:childTnLst>
+                                    <p:set>
+                                      <p:cBhvr>
+                                        <p:cTn id="75" dur="1" fill="hold">
+                                          <p:stCondLst>
+                                            <p:cond delay="0"/>
+                                          </p:stCondLst>
+                                        </p:cTn>
+                                        <p:tgtEl>
+                                          <p:spTgt spid="29"/>
+                                        </p:tgtEl>
+                                        <p:attrNameLst>
+                                          <p:attrName>style.visibility</p:attrName>
+                                        </p:attrNameLst>
+                                      </p:cBhvr>
+                                      <p:to>
+                                        <p:strVal val="visible"/>
+                                      </p:to>
+                                    </p:set>
+                                    <p:animEffect transition="in" filter="fade">
+                                      <p:cBhvr>
+                                        <p:cTn id="76" dur="500"/>
+                                        <p:tgtEl>
+                                          <p:spTgt spid="29"/>
+                                        </p:tgtEl>
+                                      </p:cBhvr>
+                                    </p:animEffect>
+                                  </p:childTnLst>
+                                </p:cTn>
+                              </p:par>
+                              <p:par>
+                                <p:cTn id="77" presetID="10" presetClass="entr" presetSubtype="0" fill="hold" grpId="0" nodeType="withEffect">
+                                  <p:stCondLst>
+                                    <p:cond delay="0"/>
+                                  </p:stCondLst>
+                                  <p:childTnLst>
+                                    <p:set>
+                                      <p:cBhvr>
+                                        <p:cTn id="78" dur="1" fill="hold">
+                                          <p:stCondLst>
+                                            <p:cond delay="0"/>
+                                          </p:stCondLst>
+                                        </p:cTn>
+                                        <p:tgtEl>
+                                          <p:spTgt spid="30"/>
+                                        </p:tgtEl>
+                                        <p:attrNameLst>
+                                          <p:attrName>style.visibility</p:attrName>
+                                        </p:attrNameLst>
+                                      </p:cBhvr>
+                                      <p:to>
+                                        <p:strVal val="visible"/>
+                                      </p:to>
+                                    </p:set>
+                                    <p:animEffect transition="in" filter="fade">
+                                      <p:cBhvr>
+                                        <p:cTn id="79" dur="500"/>
+                                        <p:tgtEl>
+                                          <p:spTgt spid="30"/>
+                                        </p:tgtEl>
+                                      </p:cBhvr>
+                                    </p:animEffect>
+                                  </p:childTnLst>
+                                </p:cTn>
+                              </p:par>
+                            </p:childTnLst>
+                          </p:cTn>
+                        </p:par>
+                      </p:childTnLst>
+                    </p:cTn>
+                  </p:par>
+                </p:childTnLst>
+              </p:cTn>
+              <p:prevCondLst>
+                <p:cond evt="onPrev" delay="0">
+                  <p:tgtEl>
+                    <p:sldTgt/>
+                  </p:tgtEl>
+                </p:cond>
+              </p:prevCondLst>
+              <p:nextCondLst>
+                <p:cond evt="onNext" delay="0">
+                  <p:tgtEl>
+                    <p:sldTgt/>
+                  </p:tgtEl>
+                </p:cond>
+              </p:nextCondLst>
+            </p:seq>
+          </p:childTnLst>
+        </p:cTn>
+      </p:par>
+    </p:tnLst>
+    <p:bldLst>
+      <p:bldP spid="7" grpId="0" animBg="1"/>
+      <p:bldP spid="8" grpId="0" animBg="1"/>
+      <p:bldP spid="9" grpId="0" animBg="1"/>
+      <p:bldP spid="10" grpId="0" animBg="1"/>
+      <p:bldP spid="11" grpId="0" animBg="1"/>
+      <p:bldP spid="12" grpId="0" animBg="1"/>
+      <p:bldP spid="13" grpId="0" animBg="1"/>
+      <p:bldP spid="14" grpId="0" animBg="1"/>
+      <p:bldP spid="15" grpId="0" animBg="1"/>
+      <p:bldP spid="16" grpId="0" animBg="1"/>
+      <p:bldP spid="17" grpId="0" animBg="1"/>
+      <p:bldP spid="18" grpId="0" animBg="1"/>
+      <p:bldP spid="19" grpId="0" animBg="1"/>
+      <p:bldP spid="20" grpId="0" animBg="1"/>
+      <p:bldP spid="21" grpId="0" animBg="1"/>
+      <p:bldP spid="22" grpId="0" animBg="1"/>
+      <p:bldP spid="23" grpId="0" animBg="1"/>
+      <p:bldP spid="24" grpId="0" animBg="1"/>
+      <p:bldP spid="25" grpId="0" animBg="1"/>
+      <p:bldP spid="26" grpId="0" animBg="1"/>
+      <p:bldP spid="27" grpId="0" animBg="1"/>
+      <p:bldP spid="28" grpId="0" animBg="1"/>
+      <p:bldP spid="29" grpId="0" animBg="1"/>
+      <p:bldP spid="30" grpId="0" animBg="1"/>
+    </p:bldLst>
+  </p:timing>
+</p:sld>
+</file>
+
+<file path=ppt/slides/slide20.xml><?xml version="1.0" encoding="utf-8"?>
+<p:sld xmlns:a="http://schemas.openxmlformats.org/drawingml/2006/main" xmlns:r="http://schemas.openxmlformats.org/officeDocument/2006/relationships" xmlns:p="http://schemas.openxmlformats.org/presentationml/2006/main">
+  <p:cSld name="Slide 20">
+    <p:bg>
+      <p:bgPr>
+        <a:solidFill>
+          <a:srgbClr val="E6EBF1"/>
+        </a:solidFill>
+      </p:bgPr>
+    </p:bg>
+    <p:spTree>
+      <p:nvGrpSpPr>
+        <p:cNvPr id="1" name=""/>
+        <p:cNvGrpSpPr/>
+        <p:nvPr/>
+      </p:nvGrpSpPr>
+      <p:grpSpPr>
+        <a:xfrm>
+          <a:off x="0" y="0"/>
+          <a:ext cx="0" cy="0"/>
+          <a:chOff x="0" y="0"/>
+          <a:chExt cx="0" cy="0"/>
+        </a:xfrm>
+      </p:grpSpPr>
+      <p:sp>
+        <p:nvSpPr>
+          <p:cNvPr id="2" name="!!orbL"/>
+          <p:cNvSpPr/>
+          <p:nvPr/>
+        </p:nvSpPr>
+        <p:spPr>
+          <a:xfrm>
+            <a:off x="1005840" y="1828800"/>
+            <a:ext cx="3200400" cy="3200400"/>
+          </a:xfrm>
+          <a:prstGeom prst="ellipse">
+            <a:avLst/>
+          </a:prstGeom>
+          <a:solidFill>
+            <a:srgbClr val="E6EBF1"/>
+          </a:solidFill>
+          <a:ln/>
+          <a:effectLst>
+            <a:outerShdw sx="100000" sy="100000" kx="0" ky="0" algn="bl" rotWithShape="0" blurRad="223520" dist="101600" dir="13500000">
+              <a:srgbClr val="FFFFFF">
+                <a:alpha val="95000"/>
+              </a:srgbClr>
+            </a:outerShdw>
+          </a:effectLst>
+        </p:spPr>
+      </p:sp>
+      <p:sp>
+        <p:nvSpPr>
+          <p:cNvPr id="3" name="!!orbD"/>
+          <p:cNvSpPr/>
+          <p:nvPr/>
+        </p:nvSpPr>
+        <p:spPr>
+          <a:xfrm>
+            <a:off x="1005840" y="1828800"/>
+            <a:ext cx="3200400" cy="3200400"/>
+          </a:xfrm>
+          <a:prstGeom prst="ellipse">
+            <a:avLst/>
+          </a:prstGeom>
+          <a:solidFill>
+            <a:srgbClr val="E6EBF1"/>
+          </a:solidFill>
+          <a:ln/>
+          <a:effectLst>
+            <a:outerShdw sx="100000" sy="100000" kx="0" ky="0" algn="bl" rotWithShape="0" blurRad="223520" dist="101600" dir="2700000">
+              <a:srgbClr val="A3B1C6">
+                <a:alpha val="60000"/>
+              </a:srgbClr>
+            </a:outerShdw>
+          </a:effectLst>
+        </p:spPr>
+      </p:sp>
+      <p:sp>
+        <p:nvSpPr>
+          <p:cNvPr id="4" name="!!well"/>
+          <p:cNvSpPr/>
+          <p:nvPr/>
+        </p:nvSpPr>
+        <p:spPr>
+          <a:xfrm>
+            <a:off x="1463040" y="2286000"/>
+            <a:ext cx="2286000" cy="2286000"/>
+          </a:xfrm>
+          <a:prstGeom prst="ellipse">
+            <a:avLst/>
+          </a:prstGeom>
+          <a:solidFill>
+            <a:srgbClr val="E6EBF1"/>
+          </a:solidFill>
+          <a:ln/>
+          <a:effectLst>
+            <a:innerShdw blurRad="88900" dist="38100" dir="2700000">
+              <a:srgbClr val="A3B1C6">
+                <a:alpha val="75000"/>
+              </a:srgbClr>
+            </a:innerShdw>
+          </a:effectLst>
+        </p:spPr>
+      </p:sp>
+      <p:sp>
+        <p:nvSpPr>
+          <p:cNvPr id="5" name="!!num"/>
+          <p:cNvSpPr txBox="1"/>
+          <p:nvPr/>
+        </p:nvSpPr>
+        <p:spPr>
+          <a:xfrm>
+            <a:off x="1463040" y="2286000"/>
+            <a:ext cx="2286000" cy="2286000"/>
+          </a:xfrm>
+          <a:prstGeom prst="rect">
+            <a:avLst/>
+          </a:prstGeom>
+          <a:noFill/>
+          <a:ln/>
+        </p:spPr>
+        <p:txBody>
+          <a:bodyPr wrap="square" lIns="0" tIns="0" rIns="0" bIns="0" rtlCol="0" anchor="ctr"/>
+          <a:lstStyle/>
+          <a:p>
+            <a:pPr algn="ctr" indent="0" marL="0">
+              <a:buNone/>
+            </a:pPr>
+            <a:r>
+              <a:rPr lang="en-US" sz="8000" b="1" dirty="0">
+                <a:solidFill>
+                  <a:srgbClr val="2563C9"/>
+                </a:solidFill>
+                <a:latin typeface="Calibri" pitchFamily="34" charset="0"/>
+                <a:ea typeface="Calibri" pitchFamily="34" charset="-122"/>
+                <a:cs typeface="Calibri" pitchFamily="34" charset="-120"/>
+              </a:rPr>
+              <a:t>?</a:t>
+            </a:r>
+            <a:endParaRPr lang="en-US" sz="8000" dirty="0"/>
+          </a:p>
+        </p:txBody>
+      </p:sp>
+      <p:sp>
+        <p:nvSpPr>
+          <p:cNvPr id="6" name="s20_txt_389"/>
+          <p:cNvSpPr txBox="1"/>
+          <p:nvPr/>
+        </p:nvSpPr>
+        <p:spPr>
+          <a:xfrm>
+            <a:off x="4572000" y="1691640"/>
+            <a:ext cx="4023360" cy="1737360"/>
+          </a:xfrm>
+          <a:prstGeom prst="rect">
+            <a:avLst/>
+          </a:prstGeom>
+          <a:noFill/>
+          <a:ln/>
+        </p:spPr>
+        <p:txBody>
+          <a:bodyPr wrap="square" lIns="0" tIns="0" rIns="0" bIns="0" rtlCol="0" anchor="b"/>
+          <a:lstStyle/>
+          <a:p>
+            <a:pPr indent="0" marL="0">
+              <a:buNone/>
+            </a:pPr>
+            <a:r>
+              <a:rPr lang="en-US" sz="4000" b="1" dirty="0">
+                <a:solidFill>
+                  <a:srgbClr val="2D3748"/>
+                </a:solidFill>
+                <a:latin typeface="Calibri" pitchFamily="34" charset="0"/>
+                <a:ea typeface="Calibri" pitchFamily="34" charset="-122"/>
+                <a:cs typeface="Calibri" pitchFamily="34" charset="-120"/>
+              </a:rPr>
+              <a:t>Спасибо за внимание</a:t>
+            </a:r>
+            <a:endParaRPr lang="en-US" sz="4000" dirty="0"/>
+          </a:p>
+        </p:txBody>
+      </p:sp>
+      <p:sp>
+        <p:nvSpPr>
+          <p:cNvPr id="7" name="s20_txt_390"/>
+          <p:cNvSpPr txBox="1"/>
+          <p:nvPr/>
+        </p:nvSpPr>
+        <p:spPr>
+          <a:xfrm>
+            <a:off x="4572000" y="3520440"/>
+            <a:ext cx="3566160" cy="1005840"/>
+          </a:xfrm>
+          <a:prstGeom prst="rect">
+            <a:avLst/>
+          </a:prstGeom>
+          <a:noFill/>
+          <a:ln/>
+        </p:spPr>
+        <p:txBody>
+          <a:bodyPr wrap="square" lIns="0" tIns="0" rIns="0" bIns="0" rtlCol="0" anchor="t"/>
+          <a:lstStyle/>
+          <a:p>
+            <a:pPr indent="0" marL="0">
+              <a:buNone/>
+            </a:pPr>
+            <a:r>
+              <a:rPr lang="en-US" sz="1600" dirty="0">
+                <a:solidFill>
+                  <a:srgbClr val="66768C"/>
+                </a:solidFill>
+                <a:latin typeface="Calibri" pitchFamily="34" charset="0"/>
+                <a:ea typeface="Calibri" pitchFamily="34" charset="-122"/>
+                <a:cs typeface="Calibri" pitchFamily="34" charset="-120"/>
+              </a:rPr>
+              <a:t>Прогноз на завтра, результаты за год и код — по QR-коду</a:t>
+            </a:r>
+            <a:endParaRPr lang="en-US" sz="1600" dirty="0"/>
+          </a:p>
+        </p:txBody>
+      </p:sp>
+      <p:sp>
+        <p:nvSpPr>
+          <p:cNvPr id="8" name="s20_txt_391"/>
+          <p:cNvSpPr txBox="1"/>
+          <p:nvPr/>
+        </p:nvSpPr>
+        <p:spPr>
+          <a:xfrm>
+            <a:off x="4572000" y="4617720"/>
+            <a:ext cx="3840480" cy="365760"/>
+          </a:xfrm>
+          <a:prstGeom prst="rect">
+            <a:avLst/>
+          </a:prstGeom>
+          <a:noFill/>
+          <a:ln/>
+        </p:spPr>
+        <p:txBody>
+          <a:bodyPr wrap="square" lIns="0" tIns="0" rIns="0" bIns="0" rtlCol="0" anchor="ctr"/>
+          <a:lstStyle/>
+          <a:p>
+            <a:pPr indent="0" marL="0">
+              <a:buNone/>
+            </a:pPr>
+            <a:r>
+              <a:rPr lang="en-US" sz="1400" b="1" dirty="0">
+                <a:solidFill>
+                  <a:srgbClr val="2563C9"/>
+                </a:solidFill>
+                <a:latin typeface="Calibri" pitchFamily="34" charset="0"/>
+                <a:ea typeface="Calibri" pitchFamily="34" charset="-122"/>
+                <a:cs typeface="Calibri" pitchFamily="34" charset="-120"/>
+              </a:rPr>
+              <a:t>nematzhanov.github.io/rosseti</a:t>
+            </a:r>
+            <a:endParaRPr lang="en-US" sz="1400" dirty="0"/>
+          </a:p>
+        </p:txBody>
+      </p:sp>
+      <p:sp>
+        <p:nvSpPr>
+          <p:cNvPr id="9" name="s20_shp_392"/>
+          <p:cNvSpPr/>
+          <p:nvPr/>
+        </p:nvSpPr>
+        <p:spPr>
+          <a:xfrm>
+            <a:off x="8549640" y="1737360"/>
+            <a:ext cx="3108960" cy="3566160"/>
+          </a:xfrm>
+          <a:prstGeom prst="roundRect">
+            <a:avLst>
+              <a:gd name="adj" fmla="val 8824"/>
+            </a:avLst>
+          </a:prstGeom>
+          <a:solidFill>
+            <a:srgbClr val="E6EBF1"/>
+          </a:solidFill>
+          <a:ln/>
+          <a:effectLst>
+            <a:outerShdw sx="100000" sy="100000" kx="0" ky="0" algn="bl" rotWithShape="0" blurRad="139700" dist="63500" dir="13500000">
+              <a:srgbClr val="FFFFFF">
+                <a:alpha val="95000"/>
+              </a:srgbClr>
+            </a:outerShdw>
+          </a:effectLst>
+        </p:spPr>
+      </p:sp>
+      <p:sp>
+        <p:nvSpPr>
+          <p:cNvPr id="10" name="s20_shp_393"/>
+          <p:cNvSpPr/>
+          <p:nvPr/>
+        </p:nvSpPr>
+        <p:spPr>
+          <a:xfrm>
+            <a:off x="8549640" y="1737360"/>
+            <a:ext cx="3108960" cy="3566160"/>
+          </a:xfrm>
+          <a:prstGeom prst="roundRect">
+            <a:avLst>
+              <a:gd name="adj" fmla="val 8824"/>
+            </a:avLst>
+          </a:prstGeom>
+          <a:solidFill>
+            <a:srgbClr val="E6EBF1"/>
+          </a:solidFill>
+          <a:ln/>
+          <a:effectLst>
+            <a:outerShdw sx="100000" sy="100000" kx="0" ky="0" algn="bl" rotWithShape="0" blurRad="139700" dist="63500" dir="2700000">
+              <a:srgbClr val="A3B1C6">
+                <a:alpha val="60000"/>
+              </a:srgbClr>
+            </a:outerShdw>
+          </a:effectLst>
+        </p:spPr>
+      </p:sp>
+      <p:pic>
+        <p:nvPicPr>
+          <p:cNvPr id="11" name="s20_qr_394" descr="QR-код: nematzhanov.github.io/rosseti">    </p:cNvPr>
+          <p:cNvPicPr>
+            <a:picLocks noChangeAspect="1"/>
+          </p:cNvPicPr>
+          <p:nvPr/>
+        </p:nvPicPr>
+        <p:blipFill>
+          <a:blip r:embed="rId1"/>
+          <a:stretch>
+            <a:fillRect/>
+          </a:stretch>
+        </p:blipFill>
+        <p:spPr>
+          <a:xfrm>
+            <a:off x="8869680" y="2057400"/>
+            <a:ext cx="2468880" cy="2468880"/>
+          </a:xfrm>
+          <a:prstGeom prst="rect">
+            <a:avLst/>
+          </a:prstGeom>
+        </p:spPr>
+      </p:pic>
+      <p:sp>
+        <p:nvSpPr>
+          <p:cNvPr id="12" name="s20_txt_395"/>
+          <p:cNvSpPr txBox="1"/>
+          <p:nvPr/>
+        </p:nvSpPr>
+        <p:spPr>
+          <a:xfrm>
+            <a:off x="8869680" y="4617720"/>
+            <a:ext cx="2468880" cy="457200"/>
+          </a:xfrm>
+          <a:prstGeom prst="rect">
+            <a:avLst/>
+          </a:prstGeom>
+          <a:noFill/>
+          <a:ln/>
+        </p:spPr>
+        <p:txBody>
+          <a:bodyPr wrap="square" lIns="0" tIns="0" rIns="0" bIns="0" rtlCol="0" anchor="ctr"/>
+          <a:lstStyle/>
+          <a:p>
+            <a:pPr algn="ctr" indent="0" marL="0">
+              <a:buNone/>
+            </a:pPr>
+            <a:r>
+              <a:rPr lang="en-US" sz="1300" dirty="0">
+                <a:solidFill>
+                  <a:srgbClr val="66768C"/>
+                </a:solidFill>
+                <a:latin typeface="Calibri" pitchFamily="34" charset="0"/>
+                <a:ea typeface="Calibri" pitchFamily="34" charset="-122"/>
+                <a:cs typeface="Calibri" pitchFamily="34" charset="-120"/>
+              </a:rPr>
+              <a:t>Наведите камеру</a:t>
+            </a:r>
+            <a:endParaRPr lang="en-US" sz="1300" dirty="0"/>
+          </a:p>
+        </p:txBody>
+      </p:sp>
+    </p:spTree>
+  </p:cSld>
+  <p:clrMapOvr>
+    <a:masterClrMapping/>
+  </p:clrMapOvr>
+  <mc:AlternateContent xmlns:mc="http://schemas.openxmlformats.org/markup-compatibility/2006">
+    <mc:Choice xmlns:p159="http://schemas.microsoft.com/office/powerpoint/2015/09/main" Requires="p159">
+      <p:transition xmlns:p14="http://schemas.microsoft.com/office/powerpoint/2010/main" spd="slow" p14:dur="1250">
+        <p159:morph option="byObject"/>
+      </p:transition>
+    </mc:Choice>
+    <mc:Fallback>
+      <p:transition spd="slow">
+        <p:fade/>
+      </p:transition>
+    </mc:Fallback>
+  </mc:AlternateContent>
+  <p:timing>
+    <p:tnLst>
+      <p:par>
+        <p:cTn id="1" dur="indefinite" restart="never" nodeType="tmRoot">
+          <p:childTnLst>
+            <p:seq concurrent="1" nextAc="seek">
+              <p:cTn id="2" dur="indefinite" nodeType="mainSeq">
+                <p:childTnLst>
+                  <p:par>
+                    <p:cTn id="3" fill="hold">
+                      <p:stCondLst>
+                        <p:cond delay="indefinite"/>
+                        <p:cond evt="onBegin" delay="0">
+                          <p:tn val="2"/>
+                        </p:cond>
+                      </p:stCondLst>
+                      <p:childTnLst>
+                        <p:par>
+                          <p:cTn id="4" fill="hold">
+                            <p:stCondLst>
+                              <p:cond delay="0"/>
+                            </p:stCondLst>
+                            <p:childTnLst>
+                              <p:par>
+                                <p:cTn id="5" presetID="10" presetClass="entr" presetSubtype="0" fill="hold" grpId="0" nodeType="afterEffect">
+                                  <p:stCondLst>
+                                    <p:cond delay="0"/>
+                                  </p:stCondLst>
+                                  <p:childTnLst>
+                                    <p:set>
+                                      <p:cBhvr>
+                                        <p:cTn id="6" dur="1" fill="hold">
+                                          <p:stCondLst>
+                                            <p:cond delay="0"/>
+                                          </p:stCondLst>
+                                        </p:cTn>
+                                        <p:tgtEl>
+                                          <p:spTgt spid="9"/>
+                                        </p:tgtEl>
+                                        <p:attrNameLst>
+                                          <p:attrName>style.visibility</p:attrName>
+                                        </p:attrNameLst>
+                                      </p:cBhvr>
+                                      <p:to>
+                                        <p:strVal val="visible"/>
+                                      </p:to>
+                                    </p:set>
+                                    <p:animEffect transition="in" filter="fade">
+                                      <p:cBhvr>
+                                        <p:cTn id="7" dur="500"/>
+                                        <p:tgtEl>
+                                          <p:spTgt spid="9"/>
+                                        </p:tgtEl>
+                                      </p:cBhvr>
+                                    </p:animEffect>
+                                  </p:childTnLst>
+                                </p:cTn>
+                              </p:par>
+                              <p:par>
+                                <p:cTn id="8" presetID="10" presetClass="entr" presetSubtype="0" fill="hold" grpId="0" nodeType="withEffect">
+                                  <p:stCondLst>
+                                    <p:cond delay="0"/>
+                                  </p:stCondLst>
+                                  <p:childTnLst>
+                                    <p:set>
+                                      <p:cBhvr>
+                                        <p:cTn id="9" dur="1" fill="hold">
+                                          <p:stCondLst>
+                                            <p:cond delay="0"/>
+                                          </p:stCondLst>
+                                        </p:cTn>
+                                        <p:tgtEl>
+                                          <p:spTgt spid="10"/>
+                                        </p:tgtEl>
+                                        <p:attrNameLst>
+                                          <p:attrName>style.visibility</p:attrName>
+                                        </p:attrNameLst>
+                                      </p:cBhvr>
+                                      <p:to>
+                                        <p:strVal val="visible"/>
+                                      </p:to>
+                                    </p:set>
+                                    <p:animEffect transition="in" filter="fade">
+                                      <p:cBhvr>
+                                        <p:cTn id="10" dur="500"/>
+                                        <p:tgtEl>
+                                          <p:spTgt spid="10"/>
+                                        </p:tgtEl>
+                                      </p:cBhvr>
+                                    </p:animEffect>
+                                  </p:childTnLst>
+                                </p:cTn>
+                              </p:par>
+                              <p:par>
+                                <p:cTn id="11" presetID="10" presetClass="entr" presetSubtype="0" fill="hold" nodeType="withEffect">
+                                  <p:stCondLst>
+                                    <p:cond delay="0"/>
+                                  </p:stCondLst>
+                                  <p:childTnLst>
+                                    <p:set>
+                                      <p:cBhvr>
+                                        <p:cTn id="12" dur="1" fill="hold">
+                                          <p:stCondLst>
+                                            <p:cond delay="0"/>
+                                          </p:stCondLst>
+                                        </p:cTn>
+                                        <p:tgtEl>
+                                          <p:spTgt spid="11"/>
+                                        </p:tgtEl>
+                                        <p:attrNameLst>
+                                          <p:attrName>style.visibility</p:attrName>
+                                        </p:attrNameLst>
+                                      </p:cBhvr>
+                                      <p:to>
+                                        <p:strVal val="visible"/>
+                                      </p:to>
+                                    </p:set>
+                                    <p:animEffect transition="in" filter="fade">
+                                      <p:cBhvr>
+                                        <p:cTn id="13" dur="500"/>
+                                        <p:tgtEl>
+                                          <p:spTgt spid="11"/>
+                                        </p:tgtEl>
+                                      </p:cBhvr>
+                                    </p:animEffect>
+                                  </p:childTnLst>
+                                </p:cTn>
+                              </p:par>
+                              <p:par>
+                                <p:cTn id="14" presetID="10" presetClass="entr" presetSubtype="0" fill="hold" grpId="0" nodeType="withEffect">
+                                  <p:stCondLst>
+                                    <p:cond delay="0"/>
+                                  </p:stCondLst>
+                                  <p:childTnLst>
+                                    <p:set>
+                                      <p:cBhvr>
+                                        <p:cTn id="15" dur="1" fill="hold">
+                                          <p:stCondLst>
+                                            <p:cond delay="0"/>
+                                          </p:stCondLst>
+                                        </p:cTn>
+                                        <p:tgtEl>
+                                          <p:spTgt spid="12"/>
+                                        </p:tgtEl>
+                                        <p:attrNameLst>
+                                          <p:attrName>style.visibility</p:attrName>
+                                        </p:attrNameLst>
+                                      </p:cBhvr>
+                                      <p:to>
+                                        <p:strVal val="visible"/>
+                                      </p:to>
+                                    </p:set>
+                                    <p:animEffect transition="in" filter="fade">
+                                      <p:cBhvr>
+                                        <p:cTn id="16" dur="500"/>
+                                        <p:tgtEl>
+                                          <p:spTgt spid="12"/>
+                                        </p:tgtEl>
+                                      </p:cBhvr>
+                                    </p:animEffect>
+                                  </p:childTnLst>
+                                </p:cTn>
+                              </p:par>
+                            </p:childTnLst>
+                          </p:cTn>
+                        </p:par>
+                      </p:childTnLst>
+                    </p:cTn>
+                  </p:par>
+                </p:childTnLst>
+              </p:cTn>
+              <p:prevCondLst>
+                <p:cond evt="onPrev" delay="0">
+                  <p:tgtEl>
+                    <p:sldTgt/>
+                  </p:tgtEl>
+                </p:cond>
+              </p:prevCondLst>
+              <p:nextCondLst>
+                <p:cond evt="onNext" delay="0">
+                  <p:tgtEl>
+                    <p:sldTgt/>
+                  </p:tgtEl>
+                </p:cond>
+              </p:nextCondLst>
+            </p:seq>
+          </p:childTnLst>
+        </p:cTn>
+      </p:par>
+    </p:tnLst>
+    <p:bldLst>
+      <p:bldP spid="9" grpId="0" animBg="1"/>
+      <p:bldP spid="10" grpId="0" animBg="1"/>
+      <p:bldP spid="12" grpId="0" animBg="1"/>
+    </p:bldLst>
+  </p:timing>
+</p:sld>
+</file>
+
+<file path=ppt/slides/slide3.xml><?xml version="1.0" encoding="utf-8"?>
+<p:sld xmlns:a="http://schemas.openxmlformats.org/drawingml/2006/main" xmlns:r="http://schemas.openxmlformats.org/officeDocument/2006/relationships" xmlns:p="http://schemas.openxmlformats.org/presentationml/2006/main">
+  <p:cSld name="Slide 3">
+    <p:bg>
+      <p:bgPr>
+        <a:solidFill>
+          <a:srgbClr val="E6EBF1"/>
+        </a:solidFill>
+      </p:bgPr>
+    </p:bg>
+    <p:spTree>
+      <p:nvGrpSpPr>
+        <p:cNvPr id="1" name=""/>
+        <p:cNvGrpSpPr/>
+        <p:nvPr/>
+      </p:nvGrpSpPr>
+      <p:grpSpPr>
+        <a:xfrm>
+          <a:off x="0" y="0"/>
+          <a:ext cx="0" cy="0"/>
+          <a:chOff x="0" y="0"/>
+          <a:chExt cx="0" cy="0"/>
+        </a:xfrm>
+      </p:grpSpPr>
+      <p:sp>
+        <p:nvSpPr>
+          <p:cNvPr id="2" name="!!orbL"/>
+          <p:cNvSpPr/>
+          <p:nvPr/>
+        </p:nvSpPr>
+        <p:spPr>
+          <a:xfrm>
             <a:off x="1005840" y="1828800"/>
             <a:ext cx="3200400" cy="3200400"/>
           </a:xfrm>
@@ -34487,7 +38272,7 @@
       </p:sp>
       <p:sp>
         <p:nvSpPr>
-          <p:cNvPr id="6" name="s2_txt_10"/>
+          <p:cNvPr id="6" name="s3_txt_36"/>
           <p:cNvSpPr txBox="1"/>
           <p:nvPr/>
         </p:nvSpPr>
@@ -34526,7 +38311,7 @@
       </p:sp>
       <p:sp>
         <p:nvSpPr>
-          <p:cNvPr id="7" name="s2_txt_11"/>
+          <p:cNvPr id="7" name="s3_txt_37"/>
           <p:cNvSpPr txBox="1"/>
           <p:nvPr/>
         </p:nvSpPr>
@@ -34565,7 +38350,7 @@
       </p:sp>
       <p:sp>
         <p:nvSpPr>
-          <p:cNvPr id="8" name="s2_shp_12"/>
+          <p:cNvPr id="8" name="s3_shp_38"/>
           <p:cNvSpPr/>
           <p:nvPr/>
         </p:nvSpPr>
@@ -34592,7 +38377,7 @@
       </p:sp>
       <p:sp>
         <p:nvSpPr>
-          <p:cNvPr id="9" name="s2_shp_13"/>
+          <p:cNvPr id="9" name="s3_shp_39"/>
           <p:cNvSpPr/>
           <p:nvPr/>
         </p:nvSpPr>
@@ -34619,7 +38404,7 @@
       </p:sp>
       <p:sp>
         <p:nvSpPr>
-          <p:cNvPr id="10" name="s2_shp_14"/>
+          <p:cNvPr id="10" name="s3_shp_40"/>
           <p:cNvSpPr/>
           <p:nvPr/>
         </p:nvSpPr>
@@ -34646,7 +38431,7 @@
       </p:sp>
       <p:sp>
         <p:nvSpPr>
-          <p:cNvPr id="11" name="s2_shp_15"/>
+          <p:cNvPr id="11" name="s3_shp_41"/>
           <p:cNvSpPr/>
           <p:nvPr/>
         </p:nvSpPr>
@@ -34691,9 +38476,9 @@
 </p:sld>
 </file>
 
-<file path=ppt/slides/slide3.xml><?xml version="1.0" encoding="utf-8"?>
+<file path=ppt/slides/slide4.xml><?xml version="1.0" encoding="utf-8"?>
 <p:sld xmlns:a="http://schemas.openxmlformats.org/drawingml/2006/main" xmlns:r="http://schemas.openxmlformats.org/officeDocument/2006/relationships" xmlns:p="http://schemas.openxmlformats.org/presentationml/2006/main">
-  <p:cSld name="Slide 3">
+  <p:cSld name="Slide 4">
     <p:bg>
       <p:bgPr>
         <a:solidFill>
@@ -34810,7 +38595,7 @@
       </p:sp>
       <p:sp>
         <p:nvSpPr>
-          <p:cNvPr id="5" name="s3_txt_16"/>
+          <p:cNvPr id="5" name="s4_txt_42"/>
           <p:cNvSpPr txBox="1"/>
           <p:nvPr/>
         </p:nvSpPr>
@@ -34849,7 +38634,7 @@
       </p:sp>
       <p:sp>
         <p:nvSpPr>
-          <p:cNvPr id="6" name="s3_txt_17"/>
+          <p:cNvPr id="6" name="s4_txt_43"/>
           <p:cNvSpPr txBox="1"/>
           <p:nvPr/>
         </p:nvSpPr>
@@ -34888,7 +38673,7 @@
       </p:sp>
       <p:sp>
         <p:nvSpPr>
-          <p:cNvPr id="7" name="s3_shp_18"/>
+          <p:cNvPr id="7" name="s4_shp_44"/>
           <p:cNvSpPr/>
           <p:nvPr/>
         </p:nvSpPr>
@@ -34917,7 +38702,7 @@
       </p:sp>
       <p:sp>
         <p:nvSpPr>
-          <p:cNvPr id="8" name="s3_shp_19"/>
+          <p:cNvPr id="8" name="s4_shp_45"/>
           <p:cNvSpPr/>
           <p:nvPr/>
         </p:nvSpPr>
@@ -34946,7 +38731,7 @@
       </p:sp>
       <p:sp>
         <p:nvSpPr>
-          <p:cNvPr id="9" name="s3_shp_20"/>
+          <p:cNvPr id="9" name="s4_shp_46"/>
           <p:cNvSpPr/>
           <p:nvPr/>
         </p:nvSpPr>
@@ -34973,7 +38758,7 @@
       </p:sp>
       <p:sp>
         <p:nvSpPr>
-          <p:cNvPr id="10" name="s3_shp_21"/>
+          <p:cNvPr id="10" name="s4_shp_47"/>
           <p:cNvSpPr/>
           <p:nvPr/>
         </p:nvSpPr>
@@ -35000,7 +38785,7 @@
       </p:sp>
       <p:sp>
         <p:nvSpPr>
-          <p:cNvPr id="11" name="s3_shp_22"/>
+          <p:cNvPr id="11" name="s4_shp_48"/>
           <p:cNvSpPr/>
           <p:nvPr/>
         </p:nvSpPr>
@@ -35020,7 +38805,7 @@
       </p:sp>
       <p:sp>
         <p:nvSpPr>
-          <p:cNvPr id="12" name="s3_txt_23"/>
+          <p:cNvPr id="12" name="s4_txt_49"/>
           <p:cNvSpPr txBox="1"/>
           <p:nvPr/>
         </p:nvSpPr>
@@ -35059,7 +38844,7 @@
       </p:sp>
       <p:sp>
         <p:nvSpPr>
-          <p:cNvPr id="13" name="s3_txt_24"/>
+          <p:cNvPr id="13" name="s4_txt_50"/>
           <p:cNvSpPr txBox="1"/>
           <p:nvPr/>
         </p:nvSpPr>
@@ -35098,7 +38883,7 @@
       </p:sp>
       <p:sp>
         <p:nvSpPr>
-          <p:cNvPr id="14" name="s3_shp_25"/>
+          <p:cNvPr id="14" name="s4_shp_51"/>
           <p:cNvSpPr/>
           <p:nvPr/>
         </p:nvSpPr>
@@ -35127,7 +38912,7 @@
       </p:sp>
       <p:sp>
         <p:nvSpPr>
-          <p:cNvPr id="15" name="s3_shp_26"/>
+          <p:cNvPr id="15" name="s4_shp_52"/>
           <p:cNvSpPr/>
           <p:nvPr/>
         </p:nvSpPr>
@@ -35156,7 +38941,7 @@
       </p:sp>
       <p:sp>
         <p:nvSpPr>
-          <p:cNvPr id="16" name="s3_shp_27"/>
+          <p:cNvPr id="16" name="s4_shp_53"/>
           <p:cNvSpPr/>
           <p:nvPr/>
         </p:nvSpPr>
@@ -35183,7 +38968,7 @@
       </p:sp>
       <p:sp>
         <p:nvSpPr>
-          <p:cNvPr id="17" name="s3_shp_28"/>
+          <p:cNvPr id="17" name="s4_shp_54"/>
           <p:cNvSpPr/>
           <p:nvPr/>
         </p:nvSpPr>
@@ -35210,7 +38995,7 @@
       </p:sp>
       <p:sp>
         <p:nvSpPr>
-          <p:cNvPr id="18" name="s3_shp_29"/>
+          <p:cNvPr id="18" name="s4_shp_55"/>
           <p:cNvSpPr/>
           <p:nvPr/>
         </p:nvSpPr>
@@ -35230,7 +39015,7 @@
       </p:sp>
       <p:sp>
         <p:nvSpPr>
-          <p:cNvPr id="19" name="s3_shp_30"/>
+          <p:cNvPr id="19" name="s4_shp_56"/>
           <p:cNvSpPr/>
           <p:nvPr/>
         </p:nvSpPr>
@@ -35250,7 +39035,7 @@
       </p:sp>
       <p:sp>
         <p:nvSpPr>
-          <p:cNvPr id="20" name="s3_txt_31"/>
+          <p:cNvPr id="20" name="s4_txt_57"/>
           <p:cNvSpPr txBox="1"/>
           <p:nvPr/>
         </p:nvSpPr>
@@ -35289,7 +39074,7 @@
       </p:sp>
       <p:sp>
         <p:nvSpPr>
-          <p:cNvPr id="21" name="s3_txt_32"/>
+          <p:cNvPr id="21" name="s4_txt_58"/>
           <p:cNvSpPr txBox="1"/>
           <p:nvPr/>
         </p:nvSpPr>
@@ -35328,7 +39113,7 @@
       </p:sp>
       <p:sp>
         <p:nvSpPr>
-          <p:cNvPr id="22" name="s3_shp_33"/>
+          <p:cNvPr id="22" name="s4_shp_59"/>
           <p:cNvSpPr/>
           <p:nvPr/>
         </p:nvSpPr>
@@ -35357,7 +39142,7 @@
       </p:sp>
       <p:sp>
         <p:nvSpPr>
-          <p:cNvPr id="23" name="s3_shp_34"/>
+          <p:cNvPr id="23" name="s4_shp_60"/>
           <p:cNvSpPr/>
           <p:nvPr/>
         </p:nvSpPr>
@@ -35386,7 +39171,7 @@
       </p:sp>
       <p:sp>
         <p:nvSpPr>
-          <p:cNvPr id="24" name="s3_shp_35"/>
+          <p:cNvPr id="24" name="s4_shp_61"/>
           <p:cNvSpPr/>
           <p:nvPr/>
         </p:nvSpPr>
@@ -35413,7 +39198,7 @@
       </p:sp>
       <p:sp>
         <p:nvSpPr>
-          <p:cNvPr id="25" name="s3_shp_36"/>
+          <p:cNvPr id="25" name="s4_shp_62"/>
           <p:cNvSpPr/>
           <p:nvPr/>
         </p:nvSpPr>
@@ -35440,7 +39225,7 @@
       </p:sp>
       <p:sp>
         <p:nvSpPr>
-          <p:cNvPr id="26" name="s3_shp_37"/>
+          <p:cNvPr id="26" name="s4_shp_63"/>
           <p:cNvSpPr/>
           <p:nvPr/>
         </p:nvSpPr>
@@ -35460,7 +39245,7 @@
       </p:sp>
       <p:sp>
         <p:nvSpPr>
-          <p:cNvPr id="27" name="s3_txt_38"/>
+          <p:cNvPr id="27" name="s4_txt_64"/>
           <p:cNvSpPr txBox="1"/>
           <p:nvPr/>
         </p:nvSpPr>
@@ -35499,7 +39284,7 @@
       </p:sp>
       <p:sp>
         <p:nvSpPr>
-          <p:cNvPr id="28" name="s3_txt_39"/>
+          <p:cNvPr id="28" name="s4_txt_65"/>
           <p:cNvSpPr txBox="1"/>
           <p:nvPr/>
         </p:nvSpPr>
@@ -36419,9 +40204,9 @@
 </p:sld>
 </file>
 
-<file path=ppt/slides/slide4.xml><?xml version="1.0" encoding="utf-8"?>
+<file path=ppt/slides/slide5.xml><?xml version="1.0" encoding="utf-8"?>
 <p:sld xmlns:a="http://schemas.openxmlformats.org/drawingml/2006/main" xmlns:r="http://schemas.openxmlformats.org/officeDocument/2006/relationships" xmlns:p="http://schemas.openxmlformats.org/presentationml/2006/main">
-  <p:cSld name="Slide 4">
+  <p:cSld name="Slide 5">
     <p:bg>
       <p:bgPr>
         <a:solidFill>
@@ -36538,7 +40323,7 @@
       </p:sp>
       <p:sp>
         <p:nvSpPr>
-          <p:cNvPr id="5" name="s4_txt_40"/>
+          <p:cNvPr id="5" name="s5_txt_66"/>
           <p:cNvSpPr txBox="1"/>
           <p:nvPr/>
         </p:nvSpPr>
@@ -36577,7 +40362,7 @@
       </p:sp>
       <p:sp>
         <p:nvSpPr>
-          <p:cNvPr id="6" name="s4_shp_41"/>
+          <p:cNvPr id="6" name="s5_shp_67"/>
           <p:cNvSpPr/>
           <p:nvPr/>
         </p:nvSpPr>
@@ -36606,7 +40391,7 @@
       </p:sp>
       <p:sp>
         <p:nvSpPr>
-          <p:cNvPr id="7" name="s4_shp_42"/>
+          <p:cNvPr id="7" name="s5_shp_68"/>
           <p:cNvSpPr/>
           <p:nvPr/>
         </p:nvSpPr>
@@ -36635,7 +40420,7 @@
       </p:sp>
       <p:sp>
         <p:nvSpPr>
-          <p:cNvPr id="8" name="s4_shp_43"/>
+          <p:cNvPr id="8" name="s5_shp_69"/>
           <p:cNvSpPr/>
           <p:nvPr/>
         </p:nvSpPr>
@@ -36662,7 +40447,7 @@
       </p:sp>
       <p:sp>
         <p:nvSpPr>
-          <p:cNvPr id="9" name="s4_txt_44"/>
+          <p:cNvPr id="9" name="s5_txt_70"/>
           <p:cNvSpPr txBox="1"/>
           <p:nvPr/>
         </p:nvSpPr>
@@ -36701,7 +40486,7 @@
       </p:sp>
       <p:sp>
         <p:nvSpPr>
-          <p:cNvPr id="10" name="s4_txt_45"/>
+          <p:cNvPr id="10" name="s5_txt_71"/>
           <p:cNvSpPr txBox="1"/>
           <p:nvPr/>
         </p:nvSpPr>
@@ -36740,7 +40525,7 @@
       </p:sp>
       <p:sp>
         <p:nvSpPr>
-          <p:cNvPr id="11" name="s4_txt_46"/>
+          <p:cNvPr id="11" name="s5_txt_72"/>
           <p:cNvSpPr txBox="1"/>
           <p:nvPr/>
         </p:nvSpPr>
@@ -36779,7 +40564,7 @@
       </p:sp>
       <p:sp>
         <p:nvSpPr>
-          <p:cNvPr id="12" name="s4_shp_47"/>
+          <p:cNvPr id="12" name="s5_shp_73"/>
           <p:cNvSpPr/>
           <p:nvPr/>
         </p:nvSpPr>
@@ -36808,7 +40593,7 @@
       </p:sp>
       <p:sp>
         <p:nvSpPr>
-          <p:cNvPr id="13" name="s4_shp_48"/>
+          <p:cNvPr id="13" name="s5_shp_74"/>
           <p:cNvSpPr/>
           <p:nvPr/>
         </p:nvSpPr>
@@ -36837,7 +40622,7 @@
       </p:sp>
       <p:sp>
         <p:nvSpPr>
-          <p:cNvPr id="14" name="s4_shp_49"/>
+          <p:cNvPr id="14" name="s5_shp_75"/>
           <p:cNvSpPr/>
           <p:nvPr/>
         </p:nvSpPr>
@@ -36864,7 +40649,7 @@
       </p:sp>
       <p:sp>
         <p:nvSpPr>
-          <p:cNvPr id="15" name="s4_txt_50"/>
+          <p:cNvPr id="15" name="s5_txt_76"/>
           <p:cNvSpPr txBox="1"/>
           <p:nvPr/>
         </p:nvSpPr>
@@ -36903,7 +40688,7 @@
       </p:sp>
       <p:sp>
         <p:nvSpPr>
-          <p:cNvPr id="16" name="s4_txt_51"/>
+          <p:cNvPr id="16" name="s5_txt_77"/>
           <p:cNvSpPr txBox="1"/>
           <p:nvPr/>
         </p:nvSpPr>
@@ -36942,7 +40727,7 @@
       </p:sp>
       <p:sp>
         <p:nvSpPr>
-          <p:cNvPr id="17" name="s4_txt_52"/>
+          <p:cNvPr id="17" name="s5_txt_78"/>
           <p:cNvSpPr txBox="1"/>
           <p:nvPr/>
         </p:nvSpPr>
@@ -36981,7 +40766,7 @@
       </p:sp>
       <p:sp>
         <p:nvSpPr>
-          <p:cNvPr id="18" name="s4_shp_53"/>
+          <p:cNvPr id="18" name="s5_shp_79"/>
           <p:cNvSpPr/>
           <p:nvPr/>
         </p:nvSpPr>
@@ -37010,7 +40795,7 @@
       </p:sp>
       <p:sp>
         <p:nvSpPr>
-          <p:cNvPr id="19" name="s4_shp_54"/>
+          <p:cNvPr id="19" name="s5_shp_80"/>
           <p:cNvSpPr/>
           <p:nvPr/>
         </p:nvSpPr>
@@ -37039,7 +40824,7 @@
       </p:sp>
       <p:sp>
         <p:nvSpPr>
-          <p:cNvPr id="20" name="s4_shp_55"/>
+          <p:cNvPr id="20" name="s5_shp_81"/>
           <p:cNvSpPr/>
           <p:nvPr/>
         </p:nvSpPr>
@@ -37066,7 +40851,7 @@
       </p:sp>
       <p:sp>
         <p:nvSpPr>
-          <p:cNvPr id="21" name="s4_txt_56"/>
+          <p:cNvPr id="21" name="s5_txt_82"/>
           <p:cNvSpPr txBox="1"/>
           <p:nvPr/>
         </p:nvSpPr>
@@ -37105,7 +40890,7 @@
       </p:sp>
       <p:sp>
         <p:nvSpPr>
-          <p:cNvPr id="22" name="s4_txt_57"/>
+          <p:cNvPr id="22" name="s5_txt_83"/>
           <p:cNvSpPr txBox="1"/>
           <p:nvPr/>
         </p:nvSpPr>
@@ -37144,7 +40929,7 @@
       </p:sp>
       <p:sp>
         <p:nvSpPr>
-          <p:cNvPr id="23" name="s4_txt_58"/>
+          <p:cNvPr id="23" name="s5_txt_84"/>
           <p:cNvSpPr txBox="1"/>
           <p:nvPr/>
         </p:nvSpPr>
@@ -37920,9 +41705,9 @@
 </p:sld>
 </file>
 
-<file path=ppt/slides/slide5.xml><?xml version="1.0" encoding="utf-8"?>
+<file path=ppt/slides/slide6.xml><?xml version="1.0" encoding="utf-8"?>
 <p:sld xmlns:a="http://schemas.openxmlformats.org/drawingml/2006/main" xmlns:r="http://schemas.openxmlformats.org/officeDocument/2006/relationships" xmlns:p="http://schemas.openxmlformats.org/presentationml/2006/main">
-  <p:cSld name="Slide 5">
+  <p:cSld name="Slide 6">
     <p:bg>
       <p:bgPr>
         <a:solidFill>
@@ -38039,7 +41824,7 @@
       </p:sp>
       <p:sp>
         <p:nvSpPr>
-          <p:cNvPr id="5" name="s5_txt_59"/>
+          <p:cNvPr id="5" name="s6_txt_85"/>
           <p:cNvSpPr txBox="1"/>
           <p:nvPr/>
         </p:nvSpPr>
@@ -38078,7 +41863,7 @@
       </p:sp>
       <p:sp>
         <p:nvSpPr>
-          <p:cNvPr id="6" name="s5_shp_60"/>
+          <p:cNvPr id="6" name="s6_shp_86"/>
           <p:cNvSpPr/>
           <p:nvPr/>
         </p:nvSpPr>
@@ -38107,7 +41892,7 @@
       </p:sp>
       <p:sp>
         <p:nvSpPr>
-          <p:cNvPr id="7" name="s5_shp_61"/>
+          <p:cNvPr id="7" name="s6_shp_87"/>
           <p:cNvSpPr/>
           <p:nvPr/>
         </p:nvSpPr>
@@ -38136,7 +41921,7 @@
       </p:sp>
       <p:sp>
         <p:nvSpPr>
-          <p:cNvPr id="8" name="s5_txt_62"/>
+          <p:cNvPr id="8" name="s6_txt_88"/>
           <p:cNvSpPr txBox="1"/>
           <p:nvPr/>
         </p:nvSpPr>
@@ -38175,7 +41960,7 @@
       </p:sp>
       <p:sp>
         <p:nvSpPr>
-          <p:cNvPr id="9" name="s5_txt_63"/>
+          <p:cNvPr id="9" name="s6_txt_89"/>
           <p:cNvSpPr txBox="1"/>
           <p:nvPr/>
         </p:nvSpPr>
@@ -38214,7 +41999,7 @@
       </p:sp>
       <p:sp>
         <p:nvSpPr>
-          <p:cNvPr id="10" name="s5_shp_64"/>
+          <p:cNvPr id="10" name="s6_shp_90"/>
           <p:cNvSpPr/>
           <p:nvPr/>
         </p:nvSpPr>
@@ -38243,7 +42028,7 @@
       </p:sp>
       <p:sp>
         <p:nvSpPr>
-          <p:cNvPr id="11" name="s5_shp_65"/>
+          <p:cNvPr id="11" name="s6_shp_91"/>
           <p:cNvSpPr/>
           <p:nvPr/>
         </p:nvSpPr>
@@ -38270,7 +42055,7 @@
       </p:sp>
       <p:sp>
         <p:nvSpPr>
-          <p:cNvPr id="12" name="s5_shp_66"/>
+          <p:cNvPr id="12" name="s6_shp_92"/>
           <p:cNvSpPr/>
           <p:nvPr/>
         </p:nvSpPr>
@@ -38297,7 +42082,7 @@
       </p:sp>
       <p:sp>
         <p:nvSpPr>
-          <p:cNvPr id="13" name="s5_txt_67"/>
+          <p:cNvPr id="13" name="s6_txt_93"/>
           <p:cNvSpPr txBox="1"/>
           <p:nvPr/>
         </p:nvSpPr>
@@ -38336,7 +42121,7 @@
       </p:sp>
       <p:sp>
         <p:nvSpPr>
-          <p:cNvPr id="14" name="s5_txt_68"/>
+          <p:cNvPr id="14" name="s6_txt_94"/>
           <p:cNvSpPr txBox="1"/>
           <p:nvPr/>
         </p:nvSpPr>
@@ -38375,7 +42160,7 @@
       </p:sp>
       <p:sp>
         <p:nvSpPr>
-          <p:cNvPr id="15" name="s5_shp_69"/>
+          <p:cNvPr id="15" name="s6_shp_95"/>
           <p:cNvSpPr/>
           <p:nvPr/>
         </p:nvSpPr>
@@ -38404,7 +42189,7 @@
       </p:sp>
       <p:sp>
         <p:nvSpPr>
-          <p:cNvPr id="16" name="s5_shp_70"/>
+          <p:cNvPr id="16" name="s6_shp_96"/>
           <p:cNvSpPr/>
           <p:nvPr/>
         </p:nvSpPr>
@@ -38431,7 +42216,7 @@
       </p:sp>
       <p:sp>
         <p:nvSpPr>
-          <p:cNvPr id="17" name="s5_shp_71"/>
+          <p:cNvPr id="17" name="s6_shp_97"/>
           <p:cNvSpPr/>
           <p:nvPr/>
         </p:nvSpPr>
@@ -38458,7 +42243,7 @@
       </p:sp>
       <p:sp>
         <p:nvSpPr>
-          <p:cNvPr id="18" name="s5_txt_72"/>
+          <p:cNvPr id="18" name="s6_txt_98"/>
           <p:cNvSpPr txBox="1"/>
           <p:nvPr/>
         </p:nvSpPr>
@@ -38497,7 +42282,7 @@
       </p:sp>
       <p:sp>
         <p:nvSpPr>
-          <p:cNvPr id="19" name="s5_txt_73"/>
+          <p:cNvPr id="19" name="s6_txt_99"/>
           <p:cNvSpPr txBox="1"/>
           <p:nvPr/>
         </p:nvSpPr>
@@ -38536,7 +42321,7 @@
       </p:sp>
       <p:sp>
         <p:nvSpPr>
-          <p:cNvPr id="20" name="s5_shp_74"/>
+          <p:cNvPr id="20" name="s6_shp_100"/>
           <p:cNvSpPr/>
           <p:nvPr/>
         </p:nvSpPr>
@@ -38565,7 +42350,7 @@
       </p:sp>
       <p:sp>
         <p:nvSpPr>
-          <p:cNvPr id="21" name="s5_shp_75"/>
+          <p:cNvPr id="21" name="s6_shp_101"/>
           <p:cNvSpPr/>
           <p:nvPr/>
         </p:nvSpPr>
@@ -38592,7 +42377,7 @@
       </p:sp>
       <p:sp>
         <p:nvSpPr>
-          <p:cNvPr id="22" name="s5_shp_76"/>
+          <p:cNvPr id="22" name="s6_shp_102"/>
           <p:cNvSpPr/>
           <p:nvPr/>
         </p:nvSpPr>
@@ -38619,7 +42404,7 @@
       </p:sp>
       <p:sp>
         <p:nvSpPr>
-          <p:cNvPr id="23" name="s5_txt_77"/>
+          <p:cNvPr id="23" name="s6_txt_103"/>
           <p:cNvSpPr txBox="1"/>
           <p:nvPr/>
         </p:nvSpPr>
@@ -38658,7 +42443,7 @@
       </p:sp>
       <p:sp>
         <p:nvSpPr>
-          <p:cNvPr id="24" name="s5_txt_78"/>
+          <p:cNvPr id="24" name="s6_txt_104"/>
           <p:cNvSpPr txBox="1"/>
           <p:nvPr/>
         </p:nvSpPr>
@@ -38697,7 +42482,7 @@
       </p:sp>
       <p:sp>
         <p:nvSpPr>
-          <p:cNvPr id="25" name="s5_shp_79"/>
+          <p:cNvPr id="25" name="s6_shp_105"/>
           <p:cNvSpPr/>
           <p:nvPr/>
         </p:nvSpPr>
@@ -38726,7 +42511,7 @@
       </p:sp>
       <p:sp>
         <p:nvSpPr>
-          <p:cNvPr id="26" name="s5_shp_80"/>
+          <p:cNvPr id="26" name="s6_shp_106"/>
           <p:cNvSpPr/>
           <p:nvPr/>
         </p:nvSpPr>
@@ -38753,7 +42538,7 @@
       </p:sp>
       <p:sp>
         <p:nvSpPr>
-          <p:cNvPr id="27" name="s5_shp_81"/>
+          <p:cNvPr id="27" name="s6_shp_107"/>
           <p:cNvSpPr/>
           <p:nvPr/>
         </p:nvSpPr>
@@ -38780,7 +42565,7 @@
       </p:sp>
       <p:sp>
         <p:nvSpPr>
-          <p:cNvPr id="28" name="s5_txt_82"/>
+          <p:cNvPr id="28" name="s6_txt_108"/>
           <p:cNvSpPr txBox="1"/>
           <p:nvPr/>
         </p:nvSpPr>
@@ -38819,7 +42604,7 @@
       </p:sp>
       <p:sp>
         <p:nvSpPr>
-          <p:cNvPr id="29" name="s5_txt_83"/>
+          <p:cNvPr id="29" name="s6_txt_109"/>
           <p:cNvSpPr txBox="1"/>
           <p:nvPr/>
         </p:nvSpPr>
@@ -38858,7 +42643,7 @@
       </p:sp>
       <p:sp>
         <p:nvSpPr>
-          <p:cNvPr id="30" name="s5_shp_84"/>
+          <p:cNvPr id="30" name="s6_shp_110"/>
           <p:cNvSpPr/>
           <p:nvPr/>
         </p:nvSpPr>
@@ -38887,7 +42672,7 @@
       </p:sp>
       <p:sp>
         <p:nvSpPr>
-          <p:cNvPr id="31" name="s5_shp_85"/>
+          <p:cNvPr id="31" name="s6_shp_111"/>
           <p:cNvSpPr/>
           <p:nvPr/>
         </p:nvSpPr>
@@ -38914,7 +42699,7 @@
       </p:sp>
       <p:sp>
         <p:nvSpPr>
-          <p:cNvPr id="32" name="s5_shp_86"/>
+          <p:cNvPr id="32" name="s6_shp_112"/>
           <p:cNvSpPr/>
           <p:nvPr/>
         </p:nvSpPr>
@@ -38941,7 +42726,7 @@
       </p:sp>
       <p:sp>
         <p:nvSpPr>
-          <p:cNvPr id="33" name="s5_txt_87"/>
+          <p:cNvPr id="33" name="s6_txt_113"/>
           <p:cNvSpPr txBox="1"/>
           <p:nvPr/>
         </p:nvSpPr>
@@ -38980,7 +42765,7 @@
       </p:sp>
       <p:sp>
         <p:nvSpPr>
-          <p:cNvPr id="34" name="s5_txt_88"/>
+          <p:cNvPr id="34" name="s6_txt_114"/>
           <p:cNvSpPr txBox="1"/>
           <p:nvPr/>
         </p:nvSpPr>
@@ -40179,9 +43964,9 @@
 </p:sld>
 </file>
 
-<file path=ppt/slides/slide6.xml><?xml version="1.0" encoding="utf-8"?>
+<file path=ppt/slides/slide7.xml><?xml version="1.0" encoding="utf-8"?>
 <p:sld xmlns:a="http://schemas.openxmlformats.org/drawingml/2006/main" xmlns:r="http://schemas.openxmlformats.org/officeDocument/2006/relationships" xmlns:p="http://schemas.openxmlformats.org/presentationml/2006/main">
-  <p:cSld name="Slide 6">
+  <p:cSld name="Slide 7">
     <p:bg>
       <p:bgPr>
         <a:solidFill>
@@ -40298,7 +44083,7 @@
       </p:sp>
       <p:sp>
         <p:nvSpPr>
-          <p:cNvPr id="5" name="s6_txt_89"/>
+          <p:cNvPr id="5" name="s7_txt_115"/>
           <p:cNvSpPr txBox="1"/>
           <p:nvPr/>
         </p:nvSpPr>
@@ -40337,7 +44122,7 @@
       </p:sp>
       <p:sp>
         <p:nvSpPr>
-          <p:cNvPr id="6" name="s6_shp_90"/>
+          <p:cNvPr id="6" name="s7_shp_116"/>
           <p:cNvSpPr/>
           <p:nvPr/>
         </p:nvSpPr>
@@ -40366,7 +44151,7 @@
       </p:sp>
       <p:sp>
         <p:nvSpPr>
-          <p:cNvPr id="7" name="s6_shp_91"/>
+          <p:cNvPr id="7" name="s7_shp_117"/>
           <p:cNvSpPr/>
           <p:nvPr/>
         </p:nvSpPr>
@@ -40395,7 +44180,7 @@
       </p:sp>
       <p:sp>
         <p:nvSpPr>
-          <p:cNvPr id="8" name="s6_txt_92"/>
+          <p:cNvPr id="8" name="s7_txt_118"/>
           <p:cNvSpPr txBox="1"/>
           <p:nvPr/>
         </p:nvSpPr>
@@ -40497,7 +44282,7 @@
       </p:sp>
       <p:sp>
         <p:nvSpPr>
-          <p:cNvPr id="9" name="s6_shp_93"/>
+          <p:cNvPr id="9" name="s7_shp_119"/>
           <p:cNvSpPr/>
           <p:nvPr/>
         </p:nvSpPr>
@@ -40526,7 +44311,7 @@
       </p:sp>
       <p:sp>
         <p:nvSpPr>
-          <p:cNvPr id="10" name="s6_shp_94"/>
+          <p:cNvPr id="10" name="s7_shp_120"/>
           <p:cNvSpPr/>
           <p:nvPr/>
         </p:nvSpPr>
@@ -40555,7 +44340,7 @@
       </p:sp>
       <p:sp>
         <p:nvSpPr>
-          <p:cNvPr id="11" name="s6_txt_95"/>
+          <p:cNvPr id="11" name="s7_txt_121"/>
           <p:cNvSpPr txBox="1"/>
           <p:nvPr/>
         </p:nvSpPr>
@@ -40594,7 +44379,7 @@
       </p:sp>
       <p:sp>
         <p:nvSpPr>
-          <p:cNvPr id="12" name="s6_shp_96"/>
+          <p:cNvPr id="12" name="s7_shp_122"/>
           <p:cNvSpPr/>
           <p:nvPr/>
         </p:nvSpPr>
@@ -40623,7 +44408,7 @@
       </p:sp>
       <p:sp>
         <p:nvSpPr>
-          <p:cNvPr id="13" name="s6_shp_97"/>
+          <p:cNvPr id="13" name="s7_shp_123"/>
           <p:cNvSpPr/>
           <p:nvPr/>
         </p:nvSpPr>
@@ -40645,7 +44430,7 @@
       </p:sp>
       <p:sp>
         <p:nvSpPr>
-          <p:cNvPr id="14" name="s6_shp_98"/>
+          <p:cNvPr id="14" name="s7_shp_124"/>
           <p:cNvSpPr/>
           <p:nvPr/>
         </p:nvSpPr>
@@ -40667,7 +44452,7 @@
       </p:sp>
       <p:sp>
         <p:nvSpPr>
-          <p:cNvPr id="15" name="s6_shp_99"/>
+          <p:cNvPr id="15" name="s7_shp_125"/>
           <p:cNvSpPr/>
           <p:nvPr/>
         </p:nvSpPr>
@@ -40687,7 +44472,7 @@
       </p:sp>
       <p:sp>
         <p:nvSpPr>
-          <p:cNvPr id="16" name="s6_txt_100"/>
+          <p:cNvPr id="16" name="s7_txt_126"/>
           <p:cNvSpPr txBox="1"/>
           <p:nvPr/>
         </p:nvSpPr>
@@ -40726,7 +44511,7 @@
       </p:sp>
       <p:sp>
         <p:nvSpPr>
-          <p:cNvPr id="17" name="s6_txt_101"/>
+          <p:cNvPr id="17" name="s7_txt_127"/>
           <p:cNvSpPr txBox="1"/>
           <p:nvPr/>
         </p:nvSpPr>
@@ -40765,7 +44550,7 @@
       </p:sp>
       <p:sp>
         <p:nvSpPr>
-          <p:cNvPr id="18" name="s6_txt_102"/>
+          <p:cNvPr id="18" name="s7_txt_128"/>
           <p:cNvSpPr txBox="1"/>
           <p:nvPr/>
         </p:nvSpPr>
@@ -40804,7 +44589,7 @@
       </p:sp>
       <p:sp>
         <p:nvSpPr>
-          <p:cNvPr id="19" name="s6_txt_103"/>
+          <p:cNvPr id="19" name="s7_txt_129"/>
           <p:cNvSpPr txBox="1"/>
           <p:nvPr/>
         </p:nvSpPr>
@@ -40843,7 +44628,7 @@
       </p:sp>
       <p:sp>
         <p:nvSpPr>
-          <p:cNvPr id="20" name="s6_txt_104"/>
+          <p:cNvPr id="20" name="s7_txt_130"/>
           <p:cNvSpPr txBox="1"/>
           <p:nvPr/>
         </p:nvSpPr>
@@ -40882,7 +44667,7 @@
       </p:sp>
       <p:sp>
         <p:nvSpPr>
-          <p:cNvPr id="21" name="s6_txt_105"/>
+          <p:cNvPr id="21" name="s7_txt_131"/>
           <p:cNvSpPr txBox="1"/>
           <p:nvPr/>
         </p:nvSpPr>
@@ -40921,7 +44706,7 @@
       </p:sp>
       <p:sp>
         <p:nvSpPr>
-          <p:cNvPr id="22" name="s6_shp_106"/>
+          <p:cNvPr id="22" name="s7_shp_132"/>
           <p:cNvSpPr/>
           <p:nvPr/>
         </p:nvSpPr>
@@ -40950,7 +44735,7 @@
       </p:sp>
       <p:sp>
         <p:nvSpPr>
-          <p:cNvPr id="23" name="s6_shp_107"/>
+          <p:cNvPr id="23" name="s7_shp_133"/>
           <p:cNvSpPr/>
           <p:nvPr/>
         </p:nvSpPr>
@@ -40979,7 +44764,7 @@
       </p:sp>
       <p:sp>
         <p:nvSpPr>
-          <p:cNvPr id="24" name="s6_txt_108"/>
+          <p:cNvPr id="24" name="s7_txt_134"/>
           <p:cNvSpPr txBox="1"/>
           <p:nvPr/>
         </p:nvSpPr>
@@ -41018,7 +44803,7 @@
       </p:sp>
       <p:sp>
         <p:nvSpPr>
-          <p:cNvPr id="25" name="s6_txt_109"/>
+          <p:cNvPr id="25" name="s7_txt_135"/>
           <p:cNvSpPr txBox="1"/>
           <p:nvPr/>
         </p:nvSpPr>
@@ -41057,7 +44842,7 @@
       </p:sp>
       <p:sp>
         <p:nvSpPr>
-          <p:cNvPr id="26" name="s6_shp_110"/>
+          <p:cNvPr id="26" name="s7_shp_136"/>
           <p:cNvSpPr/>
           <p:nvPr/>
         </p:nvSpPr>
@@ -41086,7 +44871,7 @@
       </p:sp>
       <p:sp>
         <p:nvSpPr>
-          <p:cNvPr id="27" name="s6_shp_111"/>
+          <p:cNvPr id="27" name="s7_shp_137"/>
           <p:cNvSpPr/>
           <p:nvPr/>
         </p:nvSpPr>
@@ -41115,7 +44900,7 @@
       </p:sp>
       <p:sp>
         <p:nvSpPr>
-          <p:cNvPr id="28" name="s6_txt_112"/>
+          <p:cNvPr id="28" name="s7_txt_138"/>
           <p:cNvSpPr txBox="1"/>
           <p:nvPr/>
         </p:nvSpPr>
@@ -41154,7 +44939,7 @@
       </p:sp>
       <p:sp>
         <p:nvSpPr>
-          <p:cNvPr id="29" name="s6_txt_113"/>
+          <p:cNvPr id="29" name="s7_txt_139"/>
           <p:cNvSpPr txBox="1"/>
           <p:nvPr/>
         </p:nvSpPr>
@@ -42155,9 +45940,9 @@
 </p:sld>
 </file>
 
-<file path=ppt/slides/slide7.xml><?xml version="1.0" encoding="utf-8"?>
+<file path=ppt/slides/slide8.xml><?xml version="1.0" encoding="utf-8"?>
 <p:sld xmlns:a="http://schemas.openxmlformats.org/drawingml/2006/main" xmlns:r="http://schemas.openxmlformats.org/officeDocument/2006/relationships" xmlns:p="http://schemas.openxmlformats.org/presentationml/2006/main">
-  <p:cSld name="Slide 7">
+  <p:cSld name="Slide 8">
     <p:bg>
       <p:bgPr>
         <a:solidFill>
@@ -42301,7 +46086,7 @@
       </p:sp>
       <p:sp>
         <p:nvSpPr>
-          <p:cNvPr id="6" name="s7_txt_114"/>
+          <p:cNvPr id="6" name="s8_txt_140"/>
           <p:cNvSpPr txBox="1"/>
           <p:nvPr/>
         </p:nvSpPr>
@@ -42340,7 +46125,7 @@
       </p:sp>
       <p:sp>
         <p:nvSpPr>
-          <p:cNvPr id="7" name="s7_txt_115"/>
+          <p:cNvPr id="7" name="s8_txt_141"/>
           <p:cNvSpPr txBox="1"/>
           <p:nvPr/>
         </p:nvSpPr>
@@ -42379,7 +46164,7 @@
       </p:sp>
       <p:sp>
         <p:nvSpPr>
-          <p:cNvPr id="8" name="s7_shp_116"/>
+          <p:cNvPr id="8" name="s8_shp_142"/>
           <p:cNvSpPr/>
           <p:nvPr/>
         </p:nvSpPr>
@@ -42406,7 +46191,7 @@
       </p:sp>
       <p:sp>
         <p:nvSpPr>
-          <p:cNvPr id="9" name="s7_shp_117"/>
+          <p:cNvPr id="9" name="s8_shp_143"/>
           <p:cNvSpPr/>
           <p:nvPr/>
         </p:nvSpPr>
@@ -42433,7 +46218,7 @@
       </p:sp>
       <p:sp>
         <p:nvSpPr>
-          <p:cNvPr id="10" name="s7_shp_118"/>
+          <p:cNvPr id="10" name="s8_shp_144"/>
           <p:cNvSpPr/>
           <p:nvPr/>
         </p:nvSpPr>
@@ -42460,7 +46245,7 @@
       </p:sp>
       <p:sp>
         <p:nvSpPr>
-          <p:cNvPr id="11" name="s7_shp_119"/>
+          <p:cNvPr id="11" name="s8_shp_145"/>
           <p:cNvSpPr/>
           <p:nvPr/>
         </p:nvSpPr>
@@ -42505,9 +46290,9 @@
 </p:sld>
 </file>
 
-<file path=ppt/slides/slide8.xml><?xml version="1.0" encoding="utf-8"?>
+<file path=ppt/slides/slide9.xml><?xml version="1.0" encoding="utf-8"?>
 <p:sld xmlns:a="http://schemas.openxmlformats.org/drawingml/2006/main" xmlns:r="http://schemas.openxmlformats.org/officeDocument/2006/relationships" xmlns:p="http://schemas.openxmlformats.org/presentationml/2006/main">
-  <p:cSld name="Slide 8">
+  <p:cSld name="Slide 9">
     <p:bg>
       <p:bgPr>
         <a:solidFill>
@@ -42624,7 +46409,7 @@
       </p:sp>
       <p:sp>
         <p:nvSpPr>
-          <p:cNvPr id="5" name="s8_txt_120"/>
+          <p:cNvPr id="5" name="s9_txt_146"/>
           <p:cNvSpPr txBox="1"/>
           <p:nvPr/>
         </p:nvSpPr>
@@ -42663,7 +46448,7 @@
       </p:sp>
       <p:sp>
         <p:nvSpPr>
-          <p:cNvPr id="6" name="s8_txt_121"/>
+          <p:cNvPr id="6" name="s9_txt_147"/>
           <p:cNvSpPr txBox="1"/>
           <p:nvPr/>
         </p:nvSpPr>
@@ -42702,7 +46487,7 @@
       </p:sp>
       <p:sp>
         <p:nvSpPr>
-          <p:cNvPr id="7" name="s8_shp_122"/>
+          <p:cNvPr id="7" name="s9_shp_148"/>
           <p:cNvSpPr/>
           <p:nvPr/>
         </p:nvSpPr>
@@ -42731,7 +46516,7 @@
       </p:sp>
       <p:sp>
         <p:nvSpPr>
-          <p:cNvPr id="8" name="s8_shp_123"/>
+          <p:cNvPr id="8" name="s9_shp_149"/>
           <p:cNvSpPr/>
           <p:nvPr/>
         </p:nvSpPr>
@@ -42760,7 +46545,7 @@
       </p:sp>
       <p:sp>
         <p:nvSpPr>
-          <p:cNvPr id="9" name="s8_shp_124"/>
+          <p:cNvPr id="9" name="s9_shp_150"/>
           <p:cNvSpPr/>
           <p:nvPr/>
         </p:nvSpPr>
@@ -42787,7 +46572,7 @@
       </p:sp>
       <p:sp>
         <p:nvSpPr>
-          <p:cNvPr id="10" name="s8_shp_125"/>
+          <p:cNvPr id="10" name="s9_shp_151"/>
           <p:cNvSpPr/>
           <p:nvPr/>
         </p:nvSpPr>
@@ -42814,7 +46599,7 @@
       </p:sp>
       <p:sp>
         <p:nvSpPr>
-          <p:cNvPr id="11" name="s8_shp_126"/>
+          <p:cNvPr id="11" name="s9_shp_152"/>
           <p:cNvSpPr/>
           <p:nvPr/>
         </p:nvSpPr>
@@ -42834,7 +46619,7 @@
       </p:sp>
       <p:sp>
         <p:nvSpPr>
-          <p:cNvPr id="12" name="s8_txt_127"/>
+          <p:cNvPr id="12" name="s9_txt_153"/>
           <p:cNvSpPr txBox="1"/>
           <p:nvPr/>
         </p:nvSpPr>
@@ -42873,7 +46658,7 @@
       </p:sp>
       <p:sp>
         <p:nvSpPr>
-          <p:cNvPr id="13" name="s8_txt_128"/>
+          <p:cNvPr id="13" name="s9_txt_154"/>
           <p:cNvSpPr txBox="1"/>
           <p:nvPr/>
         </p:nvSpPr>
@@ -42912,7 +46697,7 @@
       </p:sp>
       <p:sp>
         <p:nvSpPr>
-          <p:cNvPr id="14" name="s8_txt_129"/>
+          <p:cNvPr id="14" name="s9_txt_155"/>
           <p:cNvSpPr txBox="1"/>
           <p:nvPr/>
         </p:nvSpPr>
@@ -42951,7 +46736,7 @@
       </p:sp>
       <p:sp>
         <p:nvSpPr>
-          <p:cNvPr id="15" name="s8_shp_130"/>
+          <p:cNvPr id="15" name="s9_shp_156"/>
           <p:cNvSpPr/>
           <p:nvPr/>
         </p:nvSpPr>
@@ -42980,7 +46765,7 @@
       </p:sp>
       <p:sp>
         <p:nvSpPr>
-          <p:cNvPr id="16" name="s8_shp_131"/>
+          <p:cNvPr id="16" name="s9_shp_157"/>
           <p:cNvSpPr/>
           <p:nvPr/>
         </p:nvSpPr>
@@ -43009,7 +46794,7 @@
       </p:sp>
       <p:sp>
         <p:nvSpPr>
-          <p:cNvPr id="17" name="s8_shp_132"/>
+          <p:cNvPr id="17" name="s9_shp_158"/>
           <p:cNvSpPr/>
           <p:nvPr/>
         </p:nvSpPr>
@@ -43036,7 +46821,7 @@
       </p:sp>
       <p:sp>
         <p:nvSpPr>
-          <p:cNvPr id="18" name="s8_shp_133"/>
+          <p:cNvPr id="18" name="s9_shp_159"/>
           <p:cNvSpPr/>
           <p:nvPr/>
         </p:nvSpPr>
@@ -43063,7 +46848,7 @@
       </p:sp>
       <p:sp>
         <p:nvSpPr>
-          <p:cNvPr id="19" name="s8_shp_134"/>
+          <p:cNvPr id="19" name="s9_shp_160"/>
           <p:cNvSpPr/>
           <p:nvPr/>
         </p:nvSpPr>
@@ -43083,7 +46868,7 @@
       </p:sp>
       <p:sp>
         <p:nvSpPr>
-          <p:cNvPr id="20" name="s8_shp_135"/>
+          <p:cNvPr id="20" name="s9_shp_161"/>
           <p:cNvSpPr/>
           <p:nvPr/>
         </p:nvSpPr>
@@ -43103,7 +46888,7 @@
       </p:sp>
       <p:sp>
         <p:nvSpPr>
-          <p:cNvPr id="21" name="s8_txt_136"/>
+          <p:cNvPr id="21" name="s9_txt_162"/>
           <p:cNvSpPr txBox="1"/>
           <p:nvPr/>
         </p:nvSpPr>
@@ -43142,7 +46927,7 @@
       </p:sp>
       <p:sp>
         <p:nvSpPr>
-          <p:cNvPr id="22" name="s8_txt_137"/>
+          <p:cNvPr id="22" name="s9_txt_163"/>
           <p:cNvSpPr txBox="1"/>
           <p:nvPr/>
         </p:nvSpPr>
@@ -43181,7 +46966,7 @@
       </p:sp>
       <p:sp>
         <p:nvSpPr>
-          <p:cNvPr id="23" name="s8_txt_138"/>
+          <p:cNvPr id="23" name="s9_txt_164"/>
           <p:cNvSpPr txBox="1"/>
           <p:nvPr/>
         </p:nvSpPr>
@@ -43220,7 +47005,7 @@
       </p:sp>
       <p:sp>
         <p:nvSpPr>
-          <p:cNvPr id="24" name="s8_shp_139"/>
+          <p:cNvPr id="24" name="s9_shp_165"/>
           <p:cNvSpPr/>
           <p:nvPr/>
         </p:nvSpPr>
@@ -43249,7 +47034,7 @@
       </p:sp>
       <p:sp>
         <p:nvSpPr>
-          <p:cNvPr id="25" name="s8_shp_140"/>
+          <p:cNvPr id="25" name="s9_shp_166"/>
           <p:cNvSpPr/>
           <p:nvPr/>
         </p:nvSpPr>
@@ -43278,7 +47063,7 @@
       </p:sp>
       <p:sp>
         <p:nvSpPr>
-          <p:cNvPr id="26" name="s8_shp_141"/>
+          <p:cNvPr id="26" name="s9_shp_167"/>
           <p:cNvSpPr/>
           <p:nvPr/>
         </p:nvSpPr>
@@ -43305,7 +47090,7 @@
       </p:sp>
       <p:sp>
         <p:nvSpPr>
-          <p:cNvPr id="27" name="s8_shp_142"/>
+          <p:cNvPr id="27" name="s9_shp_168"/>
           <p:cNvSpPr/>
           <p:nvPr/>
         </p:nvSpPr>
@@ -43332,7 +47117,7 @@
       </p:sp>
       <p:sp>
         <p:nvSpPr>
-          <p:cNvPr id="28" name="s8_shp_143"/>
+          <p:cNvPr id="28" name="s9_shp_169"/>
           <p:cNvSpPr/>
           <p:nvPr/>
         </p:nvSpPr>
@@ -43354,7 +47139,7 @@
       </p:sp>
       <p:sp>
         <p:nvSpPr>
-          <p:cNvPr id="29" name="s8_shp_144"/>
+          <p:cNvPr id="29" name="s9_shp_170"/>
           <p:cNvSpPr/>
           <p:nvPr/>
         </p:nvSpPr>
@@ -43376,7 +47161,7 @@
       </p:sp>
       <p:sp>
         <p:nvSpPr>
-          <p:cNvPr id="30" name="s8_shp_145"/>
+          <p:cNvPr id="30" name="s9_shp_171"/>
           <p:cNvSpPr/>
           <p:nvPr/>
         </p:nvSpPr>
@@ -43398,7 +47183,7 @@
       </p:sp>
       <p:sp>
         <p:nvSpPr>
-          <p:cNvPr id="31" name="s8_shp_146"/>
+          <p:cNvPr id="31" name="s9_shp_172"/>
           <p:cNvSpPr/>
           <p:nvPr/>
         </p:nvSpPr>
@@ -43420,7 +47205,7 @@
       </p:sp>
       <p:sp>
         <p:nvSpPr>
-          <p:cNvPr id="32" name="s8_shp_147"/>
+          <p:cNvPr id="32" name="s9_shp_173"/>
           <p:cNvSpPr/>
           <p:nvPr/>
         </p:nvSpPr>
@@ -43442,7 +47227,7 @@
       </p:sp>
       <p:sp>
         <p:nvSpPr>
-          <p:cNvPr id="33" name="s8_shp_148"/>
+          <p:cNvPr id="33" name="s9_shp_174"/>
           <p:cNvSpPr/>
           <p:nvPr/>
         </p:nvSpPr>
@@ -43464,7 +47249,7 @@
       </p:sp>
       <p:sp>
         <p:nvSpPr>
-          <p:cNvPr id="34" name="s8_shp_149"/>
+          <p:cNvPr id="34" name="s9_shp_175"/>
           <p:cNvSpPr/>
           <p:nvPr/>
         </p:nvSpPr>
@@ -43486,7 +47271,7 @@
       </p:sp>
       <p:sp>
         <p:nvSpPr>
-          <p:cNvPr id="35" name="s8_shp_150"/>
+          <p:cNvPr id="35" name="s9_shp_176"/>
           <p:cNvSpPr/>
           <p:nvPr/>
         </p:nvSpPr>
@@ -43508,7 +47293,7 @@
       </p:sp>
       <p:sp>
         <p:nvSpPr>
-          <p:cNvPr id="36" name="s8_shp_151"/>
+          <p:cNvPr id="36" name="s9_shp_177"/>
           <p:cNvSpPr/>
           <p:nvPr/>
         </p:nvSpPr>
@@ -43530,7 +47315,7 @@
       </p:sp>
       <p:sp>
         <p:nvSpPr>
-          <p:cNvPr id="37" name="s8_txt_152"/>
+          <p:cNvPr id="37" name="s9_txt_178"/>
           <p:cNvSpPr txBox="1"/>
           <p:nvPr/>
         </p:nvSpPr>
@@ -43569,7 +47354,7 @@
       </p:sp>
       <p:sp>
         <p:nvSpPr>
-          <p:cNvPr id="38" name="s8_txt_153"/>
+          <p:cNvPr id="38" name="s9_txt_179"/>
           <p:cNvSpPr txBox="1"/>
           <p:nvPr/>
         </p:nvSpPr>
@@ -43608,7 +47393,7 @@
       </p:sp>
       <p:sp>
         <p:nvSpPr>
-          <p:cNvPr id="39" name="s8_txt_154"/>
+          <p:cNvPr id="39" name="s9_txt_180"/>
           <p:cNvSpPr txBox="1"/>
           <p:nvPr/>
         </p:nvSpPr>
@@ -44919,1036 +48704,6 @@
       <p:bldP spid="37" grpId="0" animBg="1"/>
       <p:bldP spid="38" grpId="0" animBg="1"/>
       <p:bldP spid="39" grpId="0" animBg="1"/>
-    </p:bldLst>
-  </p:timing>
-</p:sld>
-</file>
-
-<file path=ppt/slides/slide9.xml><?xml version="1.0" encoding="utf-8"?>
-<p:sld xmlns:a="http://schemas.openxmlformats.org/drawingml/2006/main" xmlns:r="http://schemas.openxmlformats.org/officeDocument/2006/relationships" xmlns:p="http://schemas.openxmlformats.org/presentationml/2006/main">
-  <p:cSld name="Slide 9">
-    <p:bg>
-      <p:bgPr>
-        <a:solidFill>
-          <a:srgbClr val="E6EBF1"/>
-        </a:solidFill>
-      </p:bgPr>
-    </p:bg>
-    <p:spTree>
-      <p:nvGrpSpPr>
-        <p:cNvPr id="1" name=""/>
-        <p:cNvGrpSpPr/>
-        <p:nvPr/>
-      </p:nvGrpSpPr>
-      <p:grpSpPr>
-        <a:xfrm>
-          <a:off x="0" y="0"/>
-          <a:ext cx="0" cy="0"/>
-          <a:chOff x="0" y="0"/>
-          <a:chExt cx="0" cy="0"/>
-        </a:xfrm>
-      </p:grpSpPr>
-      <p:sp>
-        <p:nvSpPr>
-          <p:cNvPr id="2" name="!!orbL"/>
-          <p:cNvSpPr/>
-          <p:nvPr/>
-        </p:nvSpPr>
-        <p:spPr>
-          <a:xfrm>
-            <a:off x="502920" y="384048"/>
-            <a:ext cx="713232" cy="713232"/>
-          </a:xfrm>
-          <a:prstGeom prst="ellipse">
-            <a:avLst/>
-          </a:prstGeom>
-          <a:solidFill>
-            <a:srgbClr val="E6EBF1"/>
-          </a:solidFill>
-          <a:ln/>
-          <a:effectLst>
-            <a:outerShdw sx="100000" sy="100000" kx="0" ky="0" algn="bl" rotWithShape="0" blurRad="83820" dist="38100" dir="13500000">
-              <a:srgbClr val="FFFFFF">
-                <a:alpha val="95000"/>
-              </a:srgbClr>
-            </a:outerShdw>
-          </a:effectLst>
-        </p:spPr>
-      </p:sp>
-      <p:sp>
-        <p:nvSpPr>
-          <p:cNvPr id="3" name="!!orbD"/>
-          <p:cNvSpPr/>
-          <p:nvPr/>
-        </p:nvSpPr>
-        <p:spPr>
-          <a:xfrm>
-            <a:off x="502920" y="384048"/>
-            <a:ext cx="713232" cy="713232"/>
-          </a:xfrm>
-          <a:prstGeom prst="ellipse">
-            <a:avLst/>
-          </a:prstGeom>
-          <a:solidFill>
-            <a:srgbClr val="E6EBF1"/>
-          </a:solidFill>
-          <a:ln/>
-          <a:effectLst>
-            <a:outerShdw sx="100000" sy="100000" kx="0" ky="0" algn="bl" rotWithShape="0" blurRad="83820" dist="38100" dir="2700000">
-              <a:srgbClr val="A3B1C6">
-                <a:alpha val="60000"/>
-              </a:srgbClr>
-            </a:outerShdw>
-          </a:effectLst>
-        </p:spPr>
-      </p:sp>
-      <p:sp>
-        <p:nvSpPr>
-          <p:cNvPr id="4" name="!!num"/>
-          <p:cNvSpPr txBox="1"/>
-          <p:nvPr/>
-        </p:nvSpPr>
-        <p:spPr>
-          <a:xfrm>
-            <a:off x="502920" y="384048"/>
-            <a:ext cx="713232" cy="713232"/>
-          </a:xfrm>
-          <a:prstGeom prst="rect">
-            <a:avLst/>
-          </a:prstGeom>
-          <a:noFill/>
-          <a:ln/>
-        </p:spPr>
-        <p:txBody>
-          <a:bodyPr wrap="square" lIns="0" tIns="0" rIns="0" bIns="0" rtlCol="0" anchor="ctr"/>
-          <a:lstStyle/>
-          <a:p>
-            <a:pPr algn="ctr" indent="0" marL="0">
-              <a:buNone/>
-            </a:pPr>
-            <a:r>
-              <a:rPr lang="en-US" sz="2000" b="1" dirty="0">
-                <a:solidFill>
-                  <a:srgbClr val="2563C9"/>
-                </a:solidFill>
-                <a:latin typeface="Calibri" pitchFamily="34" charset="0"/>
-                <a:ea typeface="Calibri" pitchFamily="34" charset="-122"/>
-                <a:cs typeface="Calibri" pitchFamily="34" charset="-120"/>
-              </a:rPr>
-              <a:t>02</a:t>
-            </a:r>
-            <a:endParaRPr lang="en-US" sz="2000" dirty="0"/>
-          </a:p>
-        </p:txBody>
-      </p:sp>
-      <p:sp>
-        <p:nvSpPr>
-          <p:cNvPr id="5" name="s9_txt_155"/>
-          <p:cNvSpPr txBox="1"/>
-          <p:nvPr/>
-        </p:nvSpPr>
-        <p:spPr>
-          <a:xfrm>
-            <a:off x="1463040" y="384048"/>
-            <a:ext cx="10149840" cy="713232"/>
-          </a:xfrm>
-          <a:prstGeom prst="rect">
-            <a:avLst/>
-          </a:prstGeom>
-          <a:noFill/>
-          <a:ln/>
-        </p:spPr>
-        <p:txBody>
-          <a:bodyPr wrap="square" lIns="0" tIns="0" rIns="0" bIns="0" rtlCol="0" anchor="ctr"/>
-          <a:lstStyle/>
-          <a:p>
-            <a:pPr indent="0" marL="0">
-              <a:buNone/>
-            </a:pPr>
-            <a:r>
-              <a:rPr lang="en-US" sz="3200" b="1" dirty="0">
-                <a:solidFill>
-                  <a:srgbClr val="2D3748"/>
-                </a:solidFill>
-                <a:latin typeface="Calibri" pitchFamily="34" charset="0"/>
-                <a:ea typeface="Calibri" pitchFamily="34" charset="-122"/>
-                <a:cs typeface="Calibri" pitchFamily="34" charset="-120"/>
-              </a:rPr>
-              <a:t>Потребление зависит от температуры</a:t>
-            </a:r>
-            <a:endParaRPr lang="en-US" sz="3200" dirty="0"/>
-          </a:p>
-        </p:txBody>
-      </p:sp>
-      <p:sp>
-        <p:nvSpPr>
-          <p:cNvPr id="6" name="s9_txt_156"/>
-          <p:cNvSpPr txBox="1"/>
-          <p:nvPr/>
-        </p:nvSpPr>
-        <p:spPr>
-          <a:xfrm>
-            <a:off x="1463040" y="1060704"/>
-            <a:ext cx="10149840" cy="329184"/>
-          </a:xfrm>
-          <a:prstGeom prst="rect">
-            <a:avLst/>
-          </a:prstGeom>
-          <a:noFill/>
-          <a:ln/>
-        </p:spPr>
-        <p:txBody>
-          <a:bodyPr wrap="square" lIns="0" tIns="0" rIns="0" bIns="0" rtlCol="0" anchor="ctr"/>
-          <a:lstStyle/>
-          <a:p>
-            <a:pPr indent="0" marL="0">
-              <a:buNone/>
-            </a:pPr>
-            <a:r>
-              <a:rPr lang="en-US" sz="1500" dirty="0">
-                <a:solidFill>
-                  <a:srgbClr val="66768C"/>
-                </a:solidFill>
-                <a:latin typeface="Calibri" pitchFamily="34" charset="0"/>
-                <a:ea typeface="Calibri" pitchFamily="34" charset="-122"/>
-                <a:cs typeface="Calibri" pitchFamily="34" charset="-120"/>
-              </a:rPr>
-              <a:t>Среднесуточные значения, 2021–2026, 2 098 суток</a:t>
-            </a:r>
-            <a:endParaRPr lang="en-US" sz="1500" dirty="0"/>
-          </a:p>
-        </p:txBody>
-      </p:sp>
-      <p:sp>
-        <p:nvSpPr>
-          <p:cNvPr id="7" name="s9_shp_157"/>
-          <p:cNvSpPr/>
-          <p:nvPr/>
-        </p:nvSpPr>
-        <p:spPr>
-          <a:xfrm>
-            <a:off x="548640" y="1600200"/>
-            <a:ext cx="7406640" cy="4617720"/>
-          </a:xfrm>
-          <a:prstGeom prst="roundRect">
-            <a:avLst>
-              <a:gd name="adj" fmla="val 4356"/>
-            </a:avLst>
-          </a:prstGeom>
-          <a:solidFill>
-            <a:srgbClr val="E6EBF1"/>
-          </a:solidFill>
-          <a:ln/>
-          <a:effectLst>
-            <a:outerShdw sx="100000" sy="100000" kx="0" ky="0" algn="bl" rotWithShape="0" blurRad="139700" dist="63500" dir="13500000">
-              <a:srgbClr val="FFFFFF">
-                <a:alpha val="95000"/>
-              </a:srgbClr>
-            </a:outerShdw>
-          </a:effectLst>
-        </p:spPr>
-      </p:sp>
-      <p:sp>
-        <p:nvSpPr>
-          <p:cNvPr id="8" name="s9_shp_158"/>
-          <p:cNvSpPr/>
-          <p:nvPr/>
-        </p:nvSpPr>
-        <p:spPr>
-          <a:xfrm>
-            <a:off x="548640" y="1600200"/>
-            <a:ext cx="7406640" cy="4617720"/>
-          </a:xfrm>
-          <a:prstGeom prst="roundRect">
-            <a:avLst>
-              <a:gd name="adj" fmla="val 4356"/>
-            </a:avLst>
-          </a:prstGeom>
-          <a:solidFill>
-            <a:srgbClr val="E6EBF1"/>
-          </a:solidFill>
-          <a:ln/>
-          <a:effectLst>
-            <a:outerShdw sx="100000" sy="100000" kx="0" ky="0" algn="bl" rotWithShape="0" blurRad="139700" dist="63500" dir="2700000">
-              <a:srgbClr val="A3B1C6">
-                <a:alpha val="60000"/>
-              </a:srgbClr>
-            </a:outerShdw>
-          </a:effectLst>
-        </p:spPr>
-      </p:sp>
-      <p:graphicFrame>
-        <p:nvGraphicFramePr>
-          <p:cNvPr id="9" name="s9_chart_159" descr=""/>
-          <p:cNvGraphicFramePr/>
-          <p:nvPr/>
-        </p:nvGraphicFramePr>
-        <p:xfrm>
-          <a:off x="731520" y="1737360"/>
-          <a:ext cx="7040880" cy="4343400"/>
-        </p:xfrm>
-        <a:graphic xmlns:a="http://schemas.openxmlformats.org/drawingml/2006/main">
-          <a:graphicData uri="http://schemas.openxmlformats.org/drawingml/2006/chart">
-            <c:chart xmlns:c="http://schemas.openxmlformats.org/drawingml/2006/chart" r:id="rId1"/>
-          </a:graphicData>
-        </a:graphic>
-      </p:graphicFrame>
-      <p:sp>
-        <p:nvSpPr>
-          <p:cNvPr id="10" name="s9_shp_160"/>
-          <p:cNvSpPr/>
-          <p:nvPr/>
-        </p:nvSpPr>
-        <p:spPr>
-          <a:xfrm>
-            <a:off x="8321040" y="1600200"/>
-            <a:ext cx="3337560" cy="2103120"/>
-          </a:xfrm>
-          <a:prstGeom prst="roundRect">
-            <a:avLst>
-              <a:gd name="adj" fmla="val 9565"/>
-            </a:avLst>
-          </a:prstGeom>
-          <a:solidFill>
-            <a:srgbClr val="E6EBF1"/>
-          </a:solidFill>
-          <a:ln/>
-          <a:effectLst>
-            <a:outerShdw sx="100000" sy="100000" kx="0" ky="0" algn="bl" rotWithShape="0" blurRad="139700" dist="63500" dir="13500000">
-              <a:srgbClr val="FFFFFF">
-                <a:alpha val="95000"/>
-              </a:srgbClr>
-            </a:outerShdw>
-          </a:effectLst>
-        </p:spPr>
-      </p:sp>
-      <p:sp>
-        <p:nvSpPr>
-          <p:cNvPr id="11" name="s9_shp_161"/>
-          <p:cNvSpPr/>
-          <p:nvPr/>
-        </p:nvSpPr>
-        <p:spPr>
-          <a:xfrm>
-            <a:off x="8321040" y="1600200"/>
-            <a:ext cx="3337560" cy="2103120"/>
-          </a:xfrm>
-          <a:prstGeom prst="roundRect">
-            <a:avLst>
-              <a:gd name="adj" fmla="val 9565"/>
-            </a:avLst>
-          </a:prstGeom>
-          <a:solidFill>
-            <a:srgbClr val="E6EBF1"/>
-          </a:solidFill>
-          <a:ln/>
-          <a:effectLst>
-            <a:outerShdw sx="100000" sy="100000" kx="0" ky="0" algn="bl" rotWithShape="0" blurRad="139700" dist="63500" dir="2700000">
-              <a:srgbClr val="A3B1C6">
-                <a:alpha val="60000"/>
-              </a:srgbClr>
-            </a:outerShdw>
-          </a:effectLst>
-        </p:spPr>
-      </p:sp>
-      <p:sp>
-        <p:nvSpPr>
-          <p:cNvPr id="12" name="s9_txt_162"/>
-          <p:cNvSpPr txBox="1"/>
-          <p:nvPr/>
-        </p:nvSpPr>
-        <p:spPr>
-          <a:xfrm>
-            <a:off x="8577072" y="1783080"/>
-            <a:ext cx="2880360" cy="630621"/>
-          </a:xfrm>
-          <a:prstGeom prst="rect">
-            <a:avLst/>
-          </a:prstGeom>
-          <a:noFill/>
-          <a:ln/>
-        </p:spPr>
-        <p:txBody>
-          <a:bodyPr wrap="square" lIns="0" tIns="0" rIns="0" bIns="0" rtlCol="0" anchor="b"/>
-          <a:lstStyle/>
-          <a:p>
-            <a:pPr indent="0" marL="0">
-              <a:buNone/>
-            </a:pPr>
-            <a:r>
-              <a:rPr lang="en-US" sz="4000" b="1" dirty="0">
-                <a:solidFill>
-                  <a:srgbClr val="2563C9"/>
-                </a:solidFill>
-                <a:latin typeface="Calibri" pitchFamily="34" charset="0"/>
-                <a:ea typeface="Calibri" pitchFamily="34" charset="-122"/>
-                <a:cs typeface="Calibri" pitchFamily="34" charset="-120"/>
-              </a:rPr>
-              <a:t>r = −0,94</a:t>
-            </a:r>
-            <a:endParaRPr lang="en-US" sz="4000" dirty="0"/>
-          </a:p>
-        </p:txBody>
-      </p:sp>
-      <p:sp>
-        <p:nvSpPr>
-          <p:cNvPr id="13" name="s9_txt_163"/>
-          <p:cNvSpPr txBox="1"/>
-          <p:nvPr/>
-        </p:nvSpPr>
-        <p:spPr>
-          <a:xfrm>
-            <a:off x="8577072" y="2468565"/>
-            <a:ext cx="2880360" cy="1106739"/>
-          </a:xfrm>
-          <a:prstGeom prst="rect">
-            <a:avLst/>
-          </a:prstGeom>
-          <a:noFill/>
-          <a:ln/>
-        </p:spPr>
-        <p:txBody>
-          <a:bodyPr wrap="square" lIns="0" tIns="0" rIns="0" bIns="0" rtlCol="0" anchor="t"/>
-          <a:lstStyle/>
-          <a:p>
-            <a:pPr indent="0" marL="0">
-              <a:buNone/>
-            </a:pPr>
-            <a:r>
-              <a:rPr lang="en-US" sz="1300" dirty="0">
-                <a:solidFill>
-                  <a:srgbClr val="66768C"/>
-                </a:solidFill>
-                <a:latin typeface="Calibri" pitchFamily="34" charset="0"/>
-                <a:ea typeface="Calibri" pitchFamily="34" charset="-122"/>
-                <a:cs typeface="Calibri" pitchFamily="34" charset="-120"/>
-              </a:rPr>
-              <a:t>корреляция среднесуточного потребления и температуры</a:t>
-            </a:r>
-            <a:endParaRPr lang="en-US" sz="1300" dirty="0"/>
-          </a:p>
-        </p:txBody>
-      </p:sp>
-      <p:sp>
-        <p:nvSpPr>
-          <p:cNvPr id="14" name="s9_shp_164"/>
-          <p:cNvSpPr/>
-          <p:nvPr/>
-        </p:nvSpPr>
-        <p:spPr>
-          <a:xfrm>
-            <a:off x="8321040" y="4023360"/>
-            <a:ext cx="3337560" cy="2194560"/>
-          </a:xfrm>
-          <a:prstGeom prst="roundRect">
-            <a:avLst>
-              <a:gd name="adj" fmla="val 9167"/>
-            </a:avLst>
-          </a:prstGeom>
-          <a:solidFill>
-            <a:srgbClr val="E6EBF1"/>
-          </a:solidFill>
-          <a:ln/>
-          <a:effectLst>
-            <a:outerShdw sx="100000" sy="100000" kx="0" ky="0" algn="bl" rotWithShape="0" blurRad="139700" dist="63500" dir="13500000">
-              <a:srgbClr val="FFFFFF">
-                <a:alpha val="95000"/>
-              </a:srgbClr>
-            </a:outerShdw>
-          </a:effectLst>
-        </p:spPr>
-      </p:sp>
-      <p:sp>
-        <p:nvSpPr>
-          <p:cNvPr id="15" name="s9_shp_165"/>
-          <p:cNvSpPr/>
-          <p:nvPr/>
-        </p:nvSpPr>
-        <p:spPr>
-          <a:xfrm>
-            <a:off x="8321040" y="4023360"/>
-            <a:ext cx="3337560" cy="2194560"/>
-          </a:xfrm>
-          <a:prstGeom prst="roundRect">
-            <a:avLst>
-              <a:gd name="adj" fmla="val 9167"/>
-            </a:avLst>
-          </a:prstGeom>
-          <a:solidFill>
-            <a:srgbClr val="E6EBF1"/>
-          </a:solidFill>
-          <a:ln/>
-          <a:effectLst>
-            <a:outerShdw sx="100000" sy="100000" kx="0" ky="0" algn="bl" rotWithShape="0" blurRad="139700" dist="63500" dir="2700000">
-              <a:srgbClr val="A3B1C6">
-                <a:alpha val="60000"/>
-              </a:srgbClr>
-            </a:outerShdw>
-          </a:effectLst>
-        </p:spPr>
-      </p:sp>
-      <p:sp>
-        <p:nvSpPr>
-          <p:cNvPr id="16" name="s9_txt_166"/>
-          <p:cNvSpPr txBox="1"/>
-          <p:nvPr/>
-        </p:nvSpPr>
-        <p:spPr>
-          <a:xfrm>
-            <a:off x="8577072" y="4206240"/>
-            <a:ext cx="2880360" cy="630621"/>
-          </a:xfrm>
-          <a:prstGeom prst="rect">
-            <a:avLst/>
-          </a:prstGeom>
-          <a:noFill/>
-          <a:ln/>
-        </p:spPr>
-        <p:txBody>
-          <a:bodyPr wrap="square" lIns="0" tIns="0" rIns="0" bIns="0" rtlCol="0" anchor="b"/>
-          <a:lstStyle/>
-          <a:p>
-            <a:pPr indent="0" marL="0">
-              <a:buNone/>
-            </a:pPr>
-            <a:r>
-              <a:rPr lang="en-US" sz="4000" b="1" dirty="0">
-                <a:solidFill>
-                  <a:srgbClr val="2563C9"/>
-                </a:solidFill>
-                <a:latin typeface="Calibri" pitchFamily="34" charset="0"/>
-                <a:ea typeface="Calibri" pitchFamily="34" charset="-122"/>
-                <a:cs typeface="Calibri" pitchFamily="34" charset="-120"/>
-              </a:rPr>
-              <a:t>+45 %</a:t>
-            </a:r>
-            <a:endParaRPr lang="en-US" sz="4000" dirty="0"/>
-          </a:p>
-        </p:txBody>
-      </p:sp>
-      <p:sp>
-        <p:nvSpPr>
-          <p:cNvPr id="17" name="s9_txt_167"/>
-          <p:cNvSpPr txBox="1"/>
-          <p:nvPr/>
-        </p:nvSpPr>
-        <p:spPr>
-          <a:xfrm>
-            <a:off x="8577072" y="4891725"/>
-            <a:ext cx="2880360" cy="1198179"/>
-          </a:xfrm>
-          <a:prstGeom prst="rect">
-            <a:avLst/>
-          </a:prstGeom>
-          <a:noFill/>
-          <a:ln/>
-        </p:spPr>
-        <p:txBody>
-          <a:bodyPr wrap="square" lIns="0" tIns="0" rIns="0" bIns="0" rtlCol="0" anchor="t"/>
-          <a:lstStyle/>
-          <a:p>
-            <a:pPr indent="0" marL="0">
-              <a:buNone/>
-            </a:pPr>
-            <a:r>
-              <a:rPr lang="en-US" sz="1300" dirty="0">
-                <a:solidFill>
-                  <a:srgbClr val="66768C"/>
-                </a:solidFill>
-                <a:latin typeface="Calibri" pitchFamily="34" charset="0"/>
-                <a:ea typeface="Calibri" pitchFamily="34" charset="-122"/>
-                <a:cs typeface="Calibri" pitchFamily="34" charset="-120"/>
-              </a:rPr>
-              <a:t>потребление в морозы ниже −10 °C (13,7 ГВт) против дней теплее +15 °C (9,5 ГВт)</a:t>
-            </a:r>
-            <a:endParaRPr lang="en-US" sz="1300" dirty="0"/>
-          </a:p>
-        </p:txBody>
-      </p:sp>
-    </p:spTree>
-  </p:cSld>
-  <p:clrMapOvr>
-    <a:masterClrMapping/>
-  </p:clrMapOvr>
-  <mc:AlternateContent xmlns:mc="http://schemas.openxmlformats.org/markup-compatibility/2006">
-    <mc:Choice xmlns:p159="http://schemas.microsoft.com/office/powerpoint/2015/09/main" Requires="p159">
-      <p:transition xmlns:p14="http://schemas.microsoft.com/office/powerpoint/2010/main" spd="slow" p14:dur="1250">
-        <p159:morph option="byObject"/>
-      </p:transition>
-    </mc:Choice>
-    <mc:Fallback>
-      <p:transition spd="slow">
-        <p:fade/>
-      </p:transition>
-    </mc:Fallback>
-  </mc:AlternateContent>
-  <p:timing>
-    <p:tnLst>
-      <p:par>
-        <p:cTn id="1" dur="indefinite" restart="never" nodeType="tmRoot">
-          <p:childTnLst>
-            <p:seq concurrent="1" nextAc="seek">
-              <p:cTn id="2" dur="indefinite" nodeType="mainSeq">
-                <p:childTnLst>
-                  <p:par>
-                    <p:cTn id="3" fill="hold">
-                      <p:stCondLst>
-                        <p:cond delay="indefinite"/>
-                        <p:cond evt="onBegin" delay="0">
-                          <p:tn val="2"/>
-                        </p:cond>
-                      </p:stCondLst>
-                      <p:childTnLst>
-                        <p:par>
-                          <p:cTn id="4" fill="hold">
-                            <p:stCondLst>
-                              <p:cond delay="0"/>
-                            </p:stCondLst>
-                            <p:childTnLst>
-                              <p:par>
-                                <p:cTn id="5" presetID="10" presetClass="entr" presetSubtype="0" fill="hold" grpId="0" nodeType="afterEffect">
-                                  <p:stCondLst>
-                                    <p:cond delay="0"/>
-                                  </p:stCondLst>
-                                  <p:childTnLst>
-                                    <p:set>
-                                      <p:cBhvr>
-                                        <p:cTn id="6" dur="1" fill="hold">
-                                          <p:stCondLst>
-                                            <p:cond delay="0"/>
-                                          </p:stCondLst>
-                                        </p:cTn>
-                                        <p:tgtEl>
-                                          <p:spTgt spid="7"/>
-                                        </p:tgtEl>
-                                        <p:attrNameLst>
-                                          <p:attrName>style.visibility</p:attrName>
-                                        </p:attrNameLst>
-                                      </p:cBhvr>
-                                      <p:to>
-                                        <p:strVal val="visible"/>
-                                      </p:to>
-                                    </p:set>
-                                    <p:animEffect transition="in" filter="fade">
-                                      <p:cBhvr>
-                                        <p:cTn id="7" dur="500"/>
-                                        <p:tgtEl>
-                                          <p:spTgt spid="7"/>
-                                        </p:tgtEl>
-                                      </p:cBhvr>
-                                    </p:animEffect>
-                                  </p:childTnLst>
-                                </p:cTn>
-                              </p:par>
-                              <p:par>
-                                <p:cTn id="8" presetID="10" presetClass="entr" presetSubtype="0" fill="hold" grpId="0" nodeType="withEffect">
-                                  <p:stCondLst>
-                                    <p:cond delay="0"/>
-                                  </p:stCondLst>
-                                  <p:childTnLst>
-                                    <p:set>
-                                      <p:cBhvr>
-                                        <p:cTn id="9" dur="1" fill="hold">
-                                          <p:stCondLst>
-                                            <p:cond delay="0"/>
-                                          </p:stCondLst>
-                                        </p:cTn>
-                                        <p:tgtEl>
-                                          <p:spTgt spid="8"/>
-                                        </p:tgtEl>
-                                        <p:attrNameLst>
-                                          <p:attrName>style.visibility</p:attrName>
-                                        </p:attrNameLst>
-                                      </p:cBhvr>
-                                      <p:to>
-                                        <p:strVal val="visible"/>
-                                      </p:to>
-                                    </p:set>
-                                    <p:animEffect transition="in" filter="fade">
-                                      <p:cBhvr>
-                                        <p:cTn id="10" dur="500"/>
-                                        <p:tgtEl>
-                                          <p:spTgt spid="8"/>
-                                        </p:tgtEl>
-                                      </p:cBhvr>
-                                    </p:animEffect>
-                                  </p:childTnLst>
-                                </p:cTn>
-                              </p:par>
-                              <p:par>
-                                <p:cTn id="11" presetID="10" presetClass="entr" presetSubtype="0" fill="hold" grpId="0" nodeType="withEffect">
-                                  <p:stCondLst>
-                                    <p:cond delay="0"/>
-                                  </p:stCondLst>
-                                  <p:childTnLst>
-                                    <p:set>
-                                      <p:cBhvr>
-                                        <p:cTn id="12" dur="1" fill="hold">
-                                          <p:stCondLst>
-                                            <p:cond delay="0"/>
-                                          </p:stCondLst>
-                                        </p:cTn>
-                                        <p:tgtEl>
-                                          <p:spTgt spid="9"/>
-                                        </p:tgtEl>
-                                        <p:attrNameLst>
-                                          <p:attrName>style.visibility</p:attrName>
-                                        </p:attrNameLst>
-                                      </p:cBhvr>
-                                      <p:to>
-                                        <p:strVal val="visible"/>
-                                      </p:to>
-                                    </p:set>
-                                    <p:animEffect transition="in" filter="fade">
-                                      <p:cBhvr>
-                                        <p:cTn id="13" dur="500"/>
-                                        <p:tgtEl>
-                                          <p:spTgt spid="9"/>
-                                        </p:tgtEl>
-                                      </p:cBhvr>
-                                    </p:animEffect>
-                                  </p:childTnLst>
-                                </p:cTn>
-                              </p:par>
-                            </p:childTnLst>
-                          </p:cTn>
-                        </p:par>
-                        <p:par>
-                          <p:cTn id="14" fill="hold">
-                            <p:stCondLst>
-                              <p:cond delay="350"/>
-                            </p:stCondLst>
-                            <p:childTnLst>
-                              <p:par>
-                                <p:cTn id="15" presetID="10" presetClass="entr" presetSubtype="0" fill="hold" grpId="0" nodeType="afterEffect">
-                                  <p:stCondLst>
-                                    <p:cond delay="0"/>
-                                  </p:stCondLst>
-                                  <p:childTnLst>
-                                    <p:set>
-                                      <p:cBhvr>
-                                        <p:cTn id="16" dur="1" fill="hold">
-                                          <p:stCondLst>
-                                            <p:cond delay="0"/>
-                                          </p:stCondLst>
-                                        </p:cTn>
-                                        <p:tgtEl>
-                                          <p:spTgt spid="10"/>
-                                        </p:tgtEl>
-                                        <p:attrNameLst>
-                                          <p:attrName>style.visibility</p:attrName>
-                                        </p:attrNameLst>
-                                      </p:cBhvr>
-                                      <p:to>
-                                        <p:strVal val="visible"/>
-                                      </p:to>
-                                    </p:set>
-                                    <p:animEffect transition="in" filter="fade">
-                                      <p:cBhvr>
-                                        <p:cTn id="17" dur="500"/>
-                                        <p:tgtEl>
-                                          <p:spTgt spid="10"/>
-                                        </p:tgtEl>
-                                      </p:cBhvr>
-                                    </p:animEffect>
-                                  </p:childTnLst>
-                                </p:cTn>
-                              </p:par>
-                              <p:par>
-                                <p:cTn id="18" presetID="10" presetClass="entr" presetSubtype="0" fill="hold" grpId="0" nodeType="withEffect">
-                                  <p:stCondLst>
-                                    <p:cond delay="0"/>
-                                  </p:stCondLst>
-                                  <p:childTnLst>
-                                    <p:set>
-                                      <p:cBhvr>
-                                        <p:cTn id="19" dur="1" fill="hold">
-                                          <p:stCondLst>
-                                            <p:cond delay="0"/>
-                                          </p:stCondLst>
-                                        </p:cTn>
-                                        <p:tgtEl>
-                                          <p:spTgt spid="11"/>
-                                        </p:tgtEl>
-                                        <p:attrNameLst>
-                                          <p:attrName>style.visibility</p:attrName>
-                                        </p:attrNameLst>
-                                      </p:cBhvr>
-                                      <p:to>
-                                        <p:strVal val="visible"/>
-                                      </p:to>
-                                    </p:set>
-                                    <p:animEffect transition="in" filter="fade">
-                                      <p:cBhvr>
-                                        <p:cTn id="20" dur="500"/>
-                                        <p:tgtEl>
-                                          <p:spTgt spid="11"/>
-                                        </p:tgtEl>
-                                      </p:cBhvr>
-                                    </p:animEffect>
-                                  </p:childTnLst>
-                                </p:cTn>
-                              </p:par>
-                              <p:par>
-                                <p:cTn id="21" presetID="10" presetClass="entr" presetSubtype="0" fill="hold" grpId="0" nodeType="withEffect">
-                                  <p:stCondLst>
-                                    <p:cond delay="0"/>
-                                  </p:stCondLst>
-                                  <p:childTnLst>
-                                    <p:set>
-                                      <p:cBhvr>
-                                        <p:cTn id="22" dur="1" fill="hold">
-                                          <p:stCondLst>
-                                            <p:cond delay="0"/>
-                                          </p:stCondLst>
-                                        </p:cTn>
-                                        <p:tgtEl>
-                                          <p:spTgt spid="12"/>
-                                        </p:tgtEl>
-                                        <p:attrNameLst>
-                                          <p:attrName>style.visibility</p:attrName>
-                                        </p:attrNameLst>
-                                      </p:cBhvr>
-                                      <p:to>
-                                        <p:strVal val="visible"/>
-                                      </p:to>
-                                    </p:set>
-                                    <p:animEffect transition="in" filter="fade">
-                                      <p:cBhvr>
-                                        <p:cTn id="23" dur="500"/>
-                                        <p:tgtEl>
-                                          <p:spTgt spid="12"/>
-                                        </p:tgtEl>
-                                      </p:cBhvr>
-                                    </p:animEffect>
-                                  </p:childTnLst>
-                                </p:cTn>
-                              </p:par>
-                              <p:par>
-                                <p:cTn id="24" presetID="10" presetClass="entr" presetSubtype="0" fill="hold" grpId="0" nodeType="withEffect">
-                                  <p:stCondLst>
-                                    <p:cond delay="0"/>
-                                  </p:stCondLst>
-                                  <p:childTnLst>
-                                    <p:set>
-                                      <p:cBhvr>
-                                        <p:cTn id="25" dur="1" fill="hold">
-                                          <p:stCondLst>
-                                            <p:cond delay="0"/>
-                                          </p:stCondLst>
-                                        </p:cTn>
-                                        <p:tgtEl>
-                                          <p:spTgt spid="13"/>
-                                        </p:tgtEl>
-                                        <p:attrNameLst>
-                                          <p:attrName>style.visibility</p:attrName>
-                                        </p:attrNameLst>
-                                      </p:cBhvr>
-                                      <p:to>
-                                        <p:strVal val="visible"/>
-                                      </p:to>
-                                    </p:set>
-                                    <p:animEffect transition="in" filter="fade">
-                                      <p:cBhvr>
-                                        <p:cTn id="26" dur="500"/>
-                                        <p:tgtEl>
-                                          <p:spTgt spid="13"/>
-                                        </p:tgtEl>
-                                      </p:cBhvr>
-                                    </p:animEffect>
-                                  </p:childTnLst>
-                                </p:cTn>
-                              </p:par>
-                            </p:childTnLst>
-                          </p:cTn>
-                        </p:par>
-                        <p:par>
-                          <p:cTn id="27" fill="hold">
-                            <p:stCondLst>
-                              <p:cond delay="700"/>
-                            </p:stCondLst>
-                            <p:childTnLst>
-                              <p:par>
-                                <p:cTn id="28" presetID="10" presetClass="entr" presetSubtype="0" fill="hold" grpId="0" nodeType="afterEffect">
-                                  <p:stCondLst>
-                                    <p:cond delay="0"/>
-                                  </p:stCondLst>
-                                  <p:childTnLst>
-                                    <p:set>
-                                      <p:cBhvr>
-                                        <p:cTn id="29" dur="1" fill="hold">
-                                          <p:stCondLst>
-                                            <p:cond delay="0"/>
-                                          </p:stCondLst>
-                                        </p:cTn>
-                                        <p:tgtEl>
-                                          <p:spTgt spid="14"/>
-                                        </p:tgtEl>
-                                        <p:attrNameLst>
-                                          <p:attrName>style.visibility</p:attrName>
-                                        </p:attrNameLst>
-                                      </p:cBhvr>
-                                      <p:to>
-                                        <p:strVal val="visible"/>
-                                      </p:to>
-                                    </p:set>
-                                    <p:animEffect transition="in" filter="fade">
-                                      <p:cBhvr>
-                                        <p:cTn id="30" dur="500"/>
-                                        <p:tgtEl>
-                                          <p:spTgt spid="14"/>
-                                        </p:tgtEl>
-                                      </p:cBhvr>
-                                    </p:animEffect>
-                                  </p:childTnLst>
-                                </p:cTn>
-                              </p:par>
-                              <p:par>
-                                <p:cTn id="31" presetID="10" presetClass="entr" presetSubtype="0" fill="hold" grpId="0" nodeType="withEffect">
-                                  <p:stCondLst>
-                                    <p:cond delay="0"/>
-                                  </p:stCondLst>
-                                  <p:childTnLst>
-                                    <p:set>
-                                      <p:cBhvr>
-                                        <p:cTn id="32" dur="1" fill="hold">
-                                          <p:stCondLst>
-                                            <p:cond delay="0"/>
-                                          </p:stCondLst>
-                                        </p:cTn>
-                                        <p:tgtEl>
-                                          <p:spTgt spid="15"/>
-                                        </p:tgtEl>
-                                        <p:attrNameLst>
-                                          <p:attrName>style.visibility</p:attrName>
-                                        </p:attrNameLst>
-                                      </p:cBhvr>
-                                      <p:to>
-                                        <p:strVal val="visible"/>
-                                      </p:to>
-                                    </p:set>
-                                    <p:animEffect transition="in" filter="fade">
-                                      <p:cBhvr>
-                                        <p:cTn id="33" dur="500"/>
-                                        <p:tgtEl>
-                                          <p:spTgt spid="15"/>
-                                        </p:tgtEl>
-                                      </p:cBhvr>
-                                    </p:animEffect>
-                                  </p:childTnLst>
-                                </p:cTn>
-                              </p:par>
-                              <p:par>
-                                <p:cTn id="34" presetID="10" presetClass="entr" presetSubtype="0" fill="hold" grpId="0" nodeType="withEffect">
-                                  <p:stCondLst>
-                                    <p:cond delay="0"/>
-                                  </p:stCondLst>
-                                  <p:childTnLst>
-                                    <p:set>
-                                      <p:cBhvr>
-                                        <p:cTn id="35" dur="1" fill="hold">
-                                          <p:stCondLst>
-                                            <p:cond delay="0"/>
-                                          </p:stCondLst>
-                                        </p:cTn>
-                                        <p:tgtEl>
-                                          <p:spTgt spid="16"/>
-                                        </p:tgtEl>
-                                        <p:attrNameLst>
-                                          <p:attrName>style.visibility</p:attrName>
-                                        </p:attrNameLst>
-                                      </p:cBhvr>
-                                      <p:to>
-                                        <p:strVal val="visible"/>
-                                      </p:to>
-                                    </p:set>
-                                    <p:animEffect transition="in" filter="fade">
-                                      <p:cBhvr>
-                                        <p:cTn id="36" dur="500"/>
-                                        <p:tgtEl>
-                                          <p:spTgt spid="16"/>
-                                        </p:tgtEl>
-                                      </p:cBhvr>
-                                    </p:animEffect>
-                                  </p:childTnLst>
-                                </p:cTn>
-                              </p:par>
-                              <p:par>
-                                <p:cTn id="37" presetID="10" presetClass="entr" presetSubtype="0" fill="hold" grpId="0" nodeType="withEffect">
-                                  <p:stCondLst>
-                                    <p:cond delay="0"/>
-                                  </p:stCondLst>
-                                  <p:childTnLst>
-                                    <p:set>
-                                      <p:cBhvr>
-                                        <p:cTn id="38" dur="1" fill="hold">
-                                          <p:stCondLst>
-                                            <p:cond delay="0"/>
-                                          </p:stCondLst>
-                                        </p:cTn>
-                                        <p:tgtEl>
-                                          <p:spTgt spid="17"/>
-                                        </p:tgtEl>
-                                        <p:attrNameLst>
-                                          <p:attrName>style.visibility</p:attrName>
-                                        </p:attrNameLst>
-                                      </p:cBhvr>
-                                      <p:to>
-                                        <p:strVal val="visible"/>
-                                      </p:to>
-                                    </p:set>
-                                    <p:animEffect transition="in" filter="fade">
-                                      <p:cBhvr>
-                                        <p:cTn id="39" dur="500"/>
-                                        <p:tgtEl>
-                                          <p:spTgt spid="17"/>
-                                        </p:tgtEl>
-                                      </p:cBhvr>
-                                    </p:animEffect>
-                                  </p:childTnLst>
-                                </p:cTn>
-                              </p:par>
-                            </p:childTnLst>
-                          </p:cTn>
-                        </p:par>
-                      </p:childTnLst>
-                    </p:cTn>
-                  </p:par>
-                </p:childTnLst>
-              </p:cTn>
-              <p:prevCondLst>
-                <p:cond evt="onPrev" delay="0">
-                  <p:tgtEl>
-                    <p:sldTgt/>
-                  </p:tgtEl>
-                </p:cond>
-              </p:prevCondLst>
-              <p:nextCondLst>
-                <p:cond evt="onNext" delay="0">
-                  <p:tgtEl>
-                    <p:sldTgt/>
-                  </p:tgtEl>
-                </p:cond>
-              </p:nextCondLst>
-            </p:seq>
-          </p:childTnLst>
-        </p:cTn>
-      </p:par>
-    </p:tnLst>
-    <p:bldLst>
-      <p:bldP spid="7" grpId="0" animBg="1"/>
-      <p:bldP spid="8" grpId="0" animBg="1"/>
-      <p:bldGraphic spid="9" grpId="0">
-        <p:bldAsOne/>
-      </p:bldGraphic>
-      <p:bldP spid="10" grpId="0" animBg="1"/>
-      <p:bldP spid="11" grpId="0" animBg="1"/>
-      <p:bldP spid="12" grpId="0" animBg="1"/>
-      <p:bldP spid="13" grpId="0" animBg="1"/>
-      <p:bldP spid="14" grpId="0" animBg="1"/>
-      <p:bldP spid="15" grpId="0" animBg="1"/>
-      <p:bldP spid="16" grpId="0" animBg="1"/>
-      <p:bldP spid="17" grpId="0" animBg="1"/>
     </p:bldLst>
   </p:timing>
 </p:sld>

--- a/deck/Прогноз потребления ОЭС СЗ — неоморфизм.pptx
+++ b/deck/Прогноз потребления ОЭС СЗ — неоморфизм.pptx
@@ -162,7 +162,7 @@
           </c:spPr>
           <c:marker>
             <c:symbol val="circle"/>
-            <c:size val="4"/>
+            <c:size val="3"/>
             <c:spPr>
               <a:solidFill>
                 <a:srgbClr val="2563C9"/>
@@ -12852,7 +12852,7 @@
         <c:numFmt formatCode="#,##0" sourceLinked="1"/>
         <c:majorTickMark val="none"/>
         <c:minorTickMark val="none"/>
-        <c:tickLblPos val="nextTo"/>
+        <c:tickLblPos val="low"/>
         <c:spPr>
           <a:ln w="12700" cap="flat">
             <a:solidFill>
@@ -12936,7 +12936,7 @@
         <c:numFmt formatCode="#,##0" sourceLinked="0"/>
         <c:majorTickMark val="none"/>
         <c:minorTickMark val="none"/>
-        <c:tickLblPos val="nextTo"/>
+        <c:tickLblPos val="low"/>
         <c:spPr>
           <a:ln w="12700" cap="flat">
             <a:solidFill>
